--- a/Sphinx/SingleCrystalGeometry.pptx
+++ b/Sphinx/SingleCrystalGeometry.pptx
@@ -9,8 +9,10 @@
     <p:sldId id="257" r:id="rId3"/>
     <p:sldId id="258" r:id="rId4"/>
     <p:sldId id="259" r:id="rId5"/>
-    <p:sldId id="261" r:id="rId6"/>
-    <p:sldId id="262" r:id="rId7"/>
+    <p:sldId id="264" r:id="rId6"/>
+    <p:sldId id="261" r:id="rId7"/>
+    <p:sldId id="263" r:id="rId8"/>
+    <p:sldId id="262" r:id="rId9"/>
   </p:sldIdLst>
   <p:sldSz cx="12192000" cy="6858000"/>
   <p:notesSz cx="6858000" cy="9945688"/>
@@ -266,7 +268,7 @@
           <a:p>
             <a:fld id="{18C8C4B9-DDC0-4E58-82E3-7C78202F16A3}" type="datetimeFigureOut">
               <a:rPr lang="en-GB" smtClean="0"/>
-              <a:t>15/01/2024</a:t>
+              <a:t>13/02/2026</a:t>
             </a:fld>
             <a:endParaRPr lang="en-GB"/>
           </a:p>
@@ -466,7 +468,7 @@
           <a:p>
             <a:fld id="{18C8C4B9-DDC0-4E58-82E3-7C78202F16A3}" type="datetimeFigureOut">
               <a:rPr lang="en-GB" smtClean="0"/>
-              <a:t>15/01/2024</a:t>
+              <a:t>13/02/2026</a:t>
             </a:fld>
             <a:endParaRPr lang="en-GB"/>
           </a:p>
@@ -676,7 +678,7 @@
           <a:p>
             <a:fld id="{18C8C4B9-DDC0-4E58-82E3-7C78202F16A3}" type="datetimeFigureOut">
               <a:rPr lang="en-GB" smtClean="0"/>
-              <a:t>15/01/2024</a:t>
+              <a:t>13/02/2026</a:t>
             </a:fld>
             <a:endParaRPr lang="en-GB"/>
           </a:p>
@@ -876,7 +878,7 @@
           <a:p>
             <a:fld id="{18C8C4B9-DDC0-4E58-82E3-7C78202F16A3}" type="datetimeFigureOut">
               <a:rPr lang="en-GB" smtClean="0"/>
-              <a:t>15/01/2024</a:t>
+              <a:t>13/02/2026</a:t>
             </a:fld>
             <a:endParaRPr lang="en-GB"/>
           </a:p>
@@ -1152,7 +1154,7 @@
           <a:p>
             <a:fld id="{18C8C4B9-DDC0-4E58-82E3-7C78202F16A3}" type="datetimeFigureOut">
               <a:rPr lang="en-GB" smtClean="0"/>
-              <a:t>15/01/2024</a:t>
+              <a:t>13/02/2026</a:t>
             </a:fld>
             <a:endParaRPr lang="en-GB"/>
           </a:p>
@@ -1420,7 +1422,7 @@
           <a:p>
             <a:fld id="{18C8C4B9-DDC0-4E58-82E3-7C78202F16A3}" type="datetimeFigureOut">
               <a:rPr lang="en-GB" smtClean="0"/>
-              <a:t>15/01/2024</a:t>
+              <a:t>13/02/2026</a:t>
             </a:fld>
             <a:endParaRPr lang="en-GB"/>
           </a:p>
@@ -1835,7 +1837,7 @@
           <a:p>
             <a:fld id="{18C8C4B9-DDC0-4E58-82E3-7C78202F16A3}" type="datetimeFigureOut">
               <a:rPr lang="en-GB" smtClean="0"/>
-              <a:t>15/01/2024</a:t>
+              <a:t>13/02/2026</a:t>
             </a:fld>
             <a:endParaRPr lang="en-GB"/>
           </a:p>
@@ -1977,7 +1979,7 @@
           <a:p>
             <a:fld id="{18C8C4B9-DDC0-4E58-82E3-7C78202F16A3}" type="datetimeFigureOut">
               <a:rPr lang="en-GB" smtClean="0"/>
-              <a:t>15/01/2024</a:t>
+              <a:t>13/02/2026</a:t>
             </a:fld>
             <a:endParaRPr lang="en-GB"/>
           </a:p>
@@ -2090,7 +2092,7 @@
           <a:p>
             <a:fld id="{18C8C4B9-DDC0-4E58-82E3-7C78202F16A3}" type="datetimeFigureOut">
               <a:rPr lang="en-GB" smtClean="0"/>
-              <a:t>15/01/2024</a:t>
+              <a:t>13/02/2026</a:t>
             </a:fld>
             <a:endParaRPr lang="en-GB"/>
           </a:p>
@@ -2403,7 +2405,7 @@
           <a:p>
             <a:fld id="{18C8C4B9-DDC0-4E58-82E3-7C78202F16A3}" type="datetimeFigureOut">
               <a:rPr lang="en-GB" smtClean="0"/>
-              <a:t>15/01/2024</a:t>
+              <a:t>13/02/2026</a:t>
             </a:fld>
             <a:endParaRPr lang="en-GB"/>
           </a:p>
@@ -2692,7 +2694,7 @@
           <a:p>
             <a:fld id="{18C8C4B9-DDC0-4E58-82E3-7C78202F16A3}" type="datetimeFigureOut">
               <a:rPr lang="en-GB" smtClean="0"/>
-              <a:t>15/01/2024</a:t>
+              <a:t>13/02/2026</a:t>
             </a:fld>
             <a:endParaRPr lang="en-GB"/>
           </a:p>
@@ -2935,7 +2937,7 @@
           <a:p>
             <a:fld id="{18C8C4B9-DDC0-4E58-82E3-7C78202F16A3}" type="datetimeFigureOut">
               <a:rPr lang="en-GB" smtClean="0"/>
-              <a:t>15/01/2024</a:t>
+              <a:t>13/02/2026</a:t>
             </a:fld>
             <a:endParaRPr lang="en-GB"/>
           </a:p>
@@ -7681,6 +7683,2328 @@
       </p:grpSpPr>
       <p:sp>
         <p:nvSpPr>
+          <p:cNvPr id="46" name="Rectangle 45">
+            <a:extLst>
+              <a:ext uri="{FF2B5EF4-FFF2-40B4-BE49-F238E27FC236}">
+                <a16:creationId xmlns:a16="http://schemas.microsoft.com/office/drawing/2014/main" id="{A064D958-50B0-E1EB-36EC-5ECC266439CD}"/>
+              </a:ext>
+            </a:extLst>
+          </p:cNvPr>
+          <p:cNvSpPr/>
+          <p:nvPr/>
+        </p:nvSpPr>
+        <p:spPr>
+          <a:xfrm>
+            <a:off x="7184209" y="1553889"/>
+            <a:ext cx="2627113" cy="4081657"/>
+          </a:xfrm>
+          <a:prstGeom prst="rect">
+            <a:avLst/>
+          </a:prstGeom>
+          <a:gradFill flip="none" rotWithShape="1">
+            <a:gsLst>
+              <a:gs pos="0">
+                <a:schemeClr val="accent4">
+                  <a:lumMod val="5000"/>
+                  <a:lumOff val="95000"/>
+                </a:schemeClr>
+              </a:gs>
+              <a:gs pos="74000">
+                <a:schemeClr val="accent4">
+                  <a:lumMod val="45000"/>
+                  <a:lumOff val="55000"/>
+                </a:schemeClr>
+              </a:gs>
+              <a:gs pos="83000">
+                <a:schemeClr val="accent4">
+                  <a:lumMod val="45000"/>
+                  <a:lumOff val="55000"/>
+                </a:schemeClr>
+              </a:gs>
+              <a:gs pos="100000">
+                <a:schemeClr val="accent4">
+                  <a:lumMod val="30000"/>
+                  <a:lumOff val="70000"/>
+                </a:schemeClr>
+              </a:gs>
+            </a:gsLst>
+            <a:lin ang="10800000" scaled="1"/>
+            <a:tileRect/>
+          </a:gradFill>
+          <a:ln>
+            <a:noFill/>
+          </a:ln>
+        </p:spPr>
+        <p:style>
+          <a:lnRef idx="2">
+            <a:schemeClr val="accent1">
+              <a:shade val="15000"/>
+            </a:schemeClr>
+          </a:lnRef>
+          <a:fillRef idx="1">
+            <a:schemeClr val="accent1"/>
+          </a:fillRef>
+          <a:effectRef idx="0">
+            <a:schemeClr val="accent1"/>
+          </a:effectRef>
+          <a:fontRef idx="minor">
+            <a:schemeClr val="lt1"/>
+          </a:fontRef>
+        </p:style>
+        <p:txBody>
+          <a:bodyPr rtlCol="0" anchor="ctr"/>
+          <a:lstStyle/>
+          <a:p>
+            <a:pPr algn="ctr"/>
+            <a:endParaRPr lang="en-GB"/>
+          </a:p>
+        </p:txBody>
+      </p:sp>
+      <p:sp>
+        <p:nvSpPr>
+          <p:cNvPr id="45" name="Rectangle 44">
+            <a:extLst>
+              <a:ext uri="{FF2B5EF4-FFF2-40B4-BE49-F238E27FC236}">
+                <a16:creationId xmlns:a16="http://schemas.microsoft.com/office/drawing/2014/main" id="{E3BE91DA-5A98-FE13-B14A-2325C773592B}"/>
+              </a:ext>
+            </a:extLst>
+          </p:cNvPr>
+          <p:cNvSpPr/>
+          <p:nvPr/>
+        </p:nvSpPr>
+        <p:spPr>
+          <a:xfrm>
+            <a:off x="2074463" y="1542197"/>
+            <a:ext cx="2627113" cy="4081657"/>
+          </a:xfrm>
+          <a:prstGeom prst="rect">
+            <a:avLst/>
+          </a:prstGeom>
+          <a:gradFill flip="none" rotWithShape="1">
+            <a:gsLst>
+              <a:gs pos="0">
+                <a:schemeClr val="accent1">
+                  <a:lumMod val="5000"/>
+                  <a:lumOff val="95000"/>
+                </a:schemeClr>
+              </a:gs>
+              <a:gs pos="74000">
+                <a:schemeClr val="accent1">
+                  <a:lumMod val="45000"/>
+                  <a:lumOff val="55000"/>
+                </a:schemeClr>
+              </a:gs>
+              <a:gs pos="83000">
+                <a:schemeClr val="accent1">
+                  <a:lumMod val="45000"/>
+                  <a:lumOff val="55000"/>
+                </a:schemeClr>
+              </a:gs>
+              <a:gs pos="100000">
+                <a:schemeClr val="accent1">
+                  <a:lumMod val="30000"/>
+                  <a:lumOff val="70000"/>
+                </a:schemeClr>
+              </a:gs>
+            </a:gsLst>
+            <a:lin ang="0" scaled="1"/>
+            <a:tileRect/>
+          </a:gradFill>
+          <a:ln>
+            <a:noFill/>
+          </a:ln>
+        </p:spPr>
+        <p:style>
+          <a:lnRef idx="2">
+            <a:schemeClr val="accent1">
+              <a:shade val="15000"/>
+            </a:schemeClr>
+          </a:lnRef>
+          <a:fillRef idx="1">
+            <a:schemeClr val="accent1"/>
+          </a:fillRef>
+          <a:effectRef idx="0">
+            <a:schemeClr val="accent1"/>
+          </a:effectRef>
+          <a:fontRef idx="minor">
+            <a:schemeClr val="lt1"/>
+          </a:fontRef>
+        </p:style>
+        <p:txBody>
+          <a:bodyPr rtlCol="0" anchor="ctr"/>
+          <a:lstStyle/>
+          <a:p>
+            <a:pPr algn="ctr"/>
+            <a:endParaRPr lang="en-GB"/>
+          </a:p>
+        </p:txBody>
+      </p:sp>
+      <p:sp>
+        <p:nvSpPr>
+          <p:cNvPr id="27" name="Rectangle 26">
+            <a:extLst>
+              <a:ext uri="{FF2B5EF4-FFF2-40B4-BE49-F238E27FC236}">
+                <a16:creationId xmlns:a16="http://schemas.microsoft.com/office/drawing/2014/main" id="{B0267F43-3115-16CD-FE3F-48843AFC93EB}"/>
+              </a:ext>
+            </a:extLst>
+          </p:cNvPr>
+          <p:cNvSpPr/>
+          <p:nvPr/>
+        </p:nvSpPr>
+        <p:spPr>
+          <a:xfrm>
+            <a:off x="4717417" y="1542197"/>
+            <a:ext cx="2460170" cy="4081657"/>
+          </a:xfrm>
+          <a:prstGeom prst="rect">
+            <a:avLst/>
+          </a:prstGeom>
+          <a:solidFill>
+            <a:srgbClr val="00B0F0"/>
+          </a:solidFill>
+          <a:ln>
+            <a:noFill/>
+          </a:ln>
+        </p:spPr>
+        <p:style>
+          <a:lnRef idx="2">
+            <a:schemeClr val="accent1">
+              <a:shade val="15000"/>
+            </a:schemeClr>
+          </a:lnRef>
+          <a:fillRef idx="1">
+            <a:schemeClr val="accent1"/>
+          </a:fillRef>
+          <a:effectRef idx="0">
+            <a:schemeClr val="accent1"/>
+          </a:effectRef>
+          <a:fontRef idx="minor">
+            <a:schemeClr val="lt1"/>
+          </a:fontRef>
+        </p:style>
+        <p:txBody>
+          <a:bodyPr rtlCol="0" anchor="ctr"/>
+          <a:lstStyle/>
+          <a:p>
+            <a:pPr algn="ctr"/>
+            <a:endParaRPr lang="en-GB" sz="3200" dirty="0"/>
+          </a:p>
+        </p:txBody>
+      </p:sp>
+      <p:cxnSp>
+        <p:nvCxnSpPr>
+          <p:cNvPr id="4" name="Straight Connector 3">
+            <a:extLst>
+              <a:ext uri="{FF2B5EF4-FFF2-40B4-BE49-F238E27FC236}">
+                <a16:creationId xmlns:a16="http://schemas.microsoft.com/office/drawing/2014/main" id="{DA932656-EE33-2790-472C-2248AA5EA454}"/>
+              </a:ext>
+            </a:extLst>
+          </p:cNvPr>
+          <p:cNvCxnSpPr>
+            <a:cxnSpLocks/>
+          </p:cNvCxnSpPr>
+          <p:nvPr/>
+        </p:nvCxnSpPr>
+        <p:spPr>
+          <a:xfrm flipH="1">
+            <a:off x="4717417" y="1553889"/>
+            <a:ext cx="6622" cy="4069966"/>
+          </a:xfrm>
+          <a:prstGeom prst="line">
+            <a:avLst/>
+          </a:prstGeom>
+          <a:ln w="50800"/>
+        </p:spPr>
+        <p:style>
+          <a:lnRef idx="3">
+            <a:schemeClr val="dk1"/>
+          </a:lnRef>
+          <a:fillRef idx="0">
+            <a:schemeClr val="dk1"/>
+          </a:fillRef>
+          <a:effectRef idx="2">
+            <a:schemeClr val="dk1"/>
+          </a:effectRef>
+          <a:fontRef idx="minor">
+            <a:schemeClr val="tx1"/>
+          </a:fontRef>
+        </p:style>
+      </p:cxnSp>
+      <p:cxnSp>
+        <p:nvCxnSpPr>
+          <p:cNvPr id="6" name="Straight Connector 5">
+            <a:extLst>
+              <a:ext uri="{FF2B5EF4-FFF2-40B4-BE49-F238E27FC236}">
+                <a16:creationId xmlns:a16="http://schemas.microsoft.com/office/drawing/2014/main" id="{E1143595-44BD-B3F9-1C19-16326A3E2B1B}"/>
+              </a:ext>
+            </a:extLst>
+          </p:cNvPr>
+          <p:cNvCxnSpPr>
+            <a:cxnSpLocks/>
+          </p:cNvCxnSpPr>
+          <p:nvPr/>
+        </p:nvCxnSpPr>
+        <p:spPr>
+          <a:xfrm flipH="1">
+            <a:off x="7177589" y="1542197"/>
+            <a:ext cx="6620" cy="4081657"/>
+          </a:xfrm>
+          <a:prstGeom prst="line">
+            <a:avLst/>
+          </a:prstGeom>
+          <a:ln w="50800"/>
+        </p:spPr>
+        <p:style>
+          <a:lnRef idx="3">
+            <a:schemeClr val="dk1"/>
+          </a:lnRef>
+          <a:fillRef idx="0">
+            <a:schemeClr val="dk1"/>
+          </a:fillRef>
+          <a:effectRef idx="2">
+            <a:schemeClr val="dk1"/>
+          </a:effectRef>
+          <a:fontRef idx="minor">
+            <a:schemeClr val="tx1"/>
+          </a:fontRef>
+        </p:style>
+      </p:cxnSp>
+      <p:cxnSp>
+        <p:nvCxnSpPr>
+          <p:cNvPr id="10" name="Straight Connector 9">
+            <a:extLst>
+              <a:ext uri="{FF2B5EF4-FFF2-40B4-BE49-F238E27FC236}">
+                <a16:creationId xmlns:a16="http://schemas.microsoft.com/office/drawing/2014/main" id="{9D1BD05F-98F4-4D7D-6032-352A365C9927}"/>
+              </a:ext>
+            </a:extLst>
+          </p:cNvPr>
+          <p:cNvCxnSpPr/>
+          <p:nvPr/>
+        </p:nvCxnSpPr>
+        <p:spPr>
+          <a:xfrm flipH="1">
+            <a:off x="3002510" y="4421875"/>
+            <a:ext cx="1714907" cy="0"/>
+          </a:xfrm>
+          <a:prstGeom prst="line">
+            <a:avLst/>
+          </a:prstGeom>
+          <a:ln w="9525" cap="flat" cmpd="sng" algn="ctr">
+            <a:solidFill>
+              <a:schemeClr val="dk1"/>
+            </a:solidFill>
+            <a:prstDash val="dash"/>
+            <a:round/>
+            <a:headEnd type="none" w="med" len="med"/>
+            <a:tailEnd type="none" w="med" len="med"/>
+          </a:ln>
+        </p:spPr>
+        <p:style>
+          <a:lnRef idx="0">
+            <a:scrgbClr r="0" g="0" b="0"/>
+          </a:lnRef>
+          <a:fillRef idx="0">
+            <a:scrgbClr r="0" g="0" b="0"/>
+          </a:fillRef>
+          <a:effectRef idx="0">
+            <a:scrgbClr r="0" g="0" b="0"/>
+          </a:effectRef>
+          <a:fontRef idx="minor">
+            <a:schemeClr val="tx1"/>
+          </a:fontRef>
+        </p:style>
+      </p:cxnSp>
+      <p:cxnSp>
+        <p:nvCxnSpPr>
+          <p:cNvPr id="12" name="Straight Arrow Connector 11">
+            <a:extLst>
+              <a:ext uri="{FF2B5EF4-FFF2-40B4-BE49-F238E27FC236}">
+                <a16:creationId xmlns:a16="http://schemas.microsoft.com/office/drawing/2014/main" id="{CEA0EE32-BD76-F9BC-3925-131B4DAAE696}"/>
+              </a:ext>
+            </a:extLst>
+          </p:cNvPr>
+          <p:cNvCxnSpPr/>
+          <p:nvPr/>
+        </p:nvCxnSpPr>
+        <p:spPr>
+          <a:xfrm flipV="1">
+            <a:off x="3002510" y="4421875"/>
+            <a:ext cx="1687611" cy="1173707"/>
+          </a:xfrm>
+          <a:prstGeom prst="straightConnector1">
+            <a:avLst/>
+          </a:prstGeom>
+          <a:ln w="38100">
+            <a:solidFill>
+              <a:srgbClr val="FF0000"/>
+            </a:solidFill>
+            <a:headEnd type="none" w="lg" len="lg"/>
+            <a:tailEnd type="triangle" w="lg" len="lg"/>
+          </a:ln>
+        </p:spPr>
+        <p:style>
+          <a:lnRef idx="1">
+            <a:schemeClr val="accent1"/>
+          </a:lnRef>
+          <a:fillRef idx="0">
+            <a:schemeClr val="accent1"/>
+          </a:fillRef>
+          <a:effectRef idx="0">
+            <a:schemeClr val="accent1"/>
+          </a:effectRef>
+          <a:fontRef idx="minor">
+            <a:schemeClr val="tx1"/>
+          </a:fontRef>
+        </p:style>
+      </p:cxnSp>
+      <p:sp>
+        <p:nvSpPr>
+          <p:cNvPr id="22" name="TextBox 21">
+            <a:extLst>
+              <a:ext uri="{FF2B5EF4-FFF2-40B4-BE49-F238E27FC236}">
+                <a16:creationId xmlns:a16="http://schemas.microsoft.com/office/drawing/2014/main" id="{60BA1EEA-D810-280C-A684-92004F3B2235}"/>
+              </a:ext>
+            </a:extLst>
+          </p:cNvPr>
+          <p:cNvSpPr txBox="1"/>
+          <p:nvPr/>
+        </p:nvSpPr>
+        <p:spPr>
+          <a:xfrm>
+            <a:off x="3526797" y="5238858"/>
+            <a:ext cx="678391" cy="369332"/>
+          </a:xfrm>
+          <a:prstGeom prst="rect">
+            <a:avLst/>
+          </a:prstGeom>
+          <a:solidFill>
+            <a:srgbClr val="FFC000"/>
+          </a:solidFill>
+        </p:spPr>
+        <p:txBody>
+          <a:bodyPr wrap="none" rtlCol="0">
+            <a:spAutoFit/>
+          </a:bodyPr>
+          <a:lstStyle/>
+          <a:p>
+            <a:r>
+              <a:rPr lang="en-GB" dirty="0"/>
+              <a:t>Laser</a:t>
+            </a:r>
+          </a:p>
+        </p:txBody>
+      </p:sp>
+      <mc:AlternateContent xmlns:mc="http://schemas.openxmlformats.org/markup-compatibility/2006">
+        <mc:Choice xmlns:a14="http://schemas.microsoft.com/office/drawing/2010/main" Requires="a14">
+          <p:sp>
+            <p:nvSpPr>
+              <p:cNvPr id="24" name="TextBox 23">
+                <a:extLst>
+                  <a:ext uri="{FF2B5EF4-FFF2-40B4-BE49-F238E27FC236}">
+                    <a16:creationId xmlns:a16="http://schemas.microsoft.com/office/drawing/2014/main" id="{75E1E339-0CE3-E182-7659-EE3D71504947}"/>
+                  </a:ext>
+                </a:extLst>
+              </p:cNvPr>
+              <p:cNvSpPr txBox="1"/>
+              <p:nvPr/>
+            </p:nvSpPr>
+            <p:spPr>
+              <a:xfrm>
+                <a:off x="3948384" y="4486069"/>
+                <a:ext cx="251607" cy="270652"/>
+              </a:xfrm>
+              <a:prstGeom prst="rect">
+                <a:avLst/>
+              </a:prstGeom>
+              <a:noFill/>
+            </p:spPr>
+            <p:txBody>
+              <a:bodyPr wrap="none" lIns="0" tIns="0" rIns="0" bIns="0" rtlCol="0">
+                <a:spAutoFit/>
+              </a:bodyPr>
+              <a:lstStyle/>
+              <a:p>
+                <a:pPr/>
+                <a14:m>
+                  <m:oMathPara xmlns:m="http://schemas.openxmlformats.org/officeDocument/2006/math">
+                    <m:oMathParaPr>
+                      <m:jc m:val="centerGroup"/>
+                    </m:oMathParaPr>
+                    <m:oMath xmlns:m="http://schemas.openxmlformats.org/officeDocument/2006/math">
+                      <m:r>
+                        <a:rPr lang="en-GB" i="1" smtClean="0">
+                          <a:latin typeface="Cambria Math" panose="02040503050406030204" pitchFamily="18" charset="0"/>
+                          <a:ea typeface="Cambria Math" panose="02040503050406030204" pitchFamily="18" charset="0"/>
+                        </a:rPr>
+                        <m:t>𝜃</m:t>
+                      </m:r>
+                      <m:r>
+                        <a:rPr lang="en-GB" b="0" i="1" baseline="-25000" smtClean="0">
+                          <a:latin typeface="Cambria Math" panose="02040503050406030204" pitchFamily="18" charset="0"/>
+                          <a:ea typeface="Cambria Math" panose="02040503050406030204" pitchFamily="18" charset="0"/>
+                        </a:rPr>
+                        <m:t>𝐿</m:t>
+                      </m:r>
+                    </m:oMath>
+                  </m:oMathPara>
+                </a14:m>
+                <a:endParaRPr lang="en-GB" baseline="-25000" dirty="0"/>
+              </a:p>
+            </p:txBody>
+          </p:sp>
+        </mc:Choice>
+        <mc:Fallback>
+          <p:sp>
+            <p:nvSpPr>
+              <p:cNvPr id="24" name="TextBox 23">
+                <a:extLst>
+                  <a:ext uri="{FF2B5EF4-FFF2-40B4-BE49-F238E27FC236}">
+                    <a16:creationId xmlns:a16="http://schemas.microsoft.com/office/drawing/2014/main" id="{75E1E339-0CE3-E182-7659-EE3D71504947}"/>
+                  </a:ext>
+                </a:extLst>
+              </p:cNvPr>
+              <p:cNvSpPr txBox="1">
+                <a:spLocks noRot="1" noChangeAspect="1" noMove="1" noResize="1" noEditPoints="1" noAdjustHandles="1" noChangeArrowheads="1" noChangeShapeType="1" noTextEdit="1"/>
+              </p:cNvSpPr>
+              <p:nvPr/>
+            </p:nvSpPr>
+            <p:spPr>
+              <a:xfrm>
+                <a:off x="3948384" y="4486069"/>
+                <a:ext cx="251607" cy="270652"/>
+              </a:xfrm>
+              <a:prstGeom prst="rect">
+                <a:avLst/>
+              </a:prstGeom>
+              <a:blipFill>
+                <a:blip r:embed="rId2"/>
+                <a:stretch>
+                  <a:fillRect l="-26829" r="-12195" b="-20455"/>
+                </a:stretch>
+              </a:blipFill>
+            </p:spPr>
+            <p:txBody>
+              <a:bodyPr/>
+              <a:lstStyle/>
+              <a:p>
+                <a:r>
+                  <a:rPr lang="en-GB">
+                    <a:noFill/>
+                  </a:rPr>
+                  <a:t> </a:t>
+                </a:r>
+              </a:p>
+            </p:txBody>
+          </p:sp>
+        </mc:Fallback>
+      </mc:AlternateContent>
+      <p:sp>
+        <p:nvSpPr>
+          <p:cNvPr id="25" name="TextBox 24">
+            <a:extLst>
+              <a:ext uri="{FF2B5EF4-FFF2-40B4-BE49-F238E27FC236}">
+                <a16:creationId xmlns:a16="http://schemas.microsoft.com/office/drawing/2014/main" id="{4BBB8893-74D3-310C-1A6E-055E4B746060}"/>
+              </a:ext>
+            </a:extLst>
+          </p:cNvPr>
+          <p:cNvSpPr txBox="1"/>
+          <p:nvPr/>
+        </p:nvSpPr>
+        <p:spPr>
+          <a:xfrm>
+            <a:off x="3000239" y="1144682"/>
+            <a:ext cx="1263616" cy="369332"/>
+          </a:xfrm>
+          <a:prstGeom prst="rect">
+            <a:avLst/>
+          </a:prstGeom>
+          <a:noFill/>
+        </p:spPr>
+        <p:txBody>
+          <a:bodyPr wrap="none" rtlCol="0">
+            <a:spAutoFit/>
+          </a:bodyPr>
+          <a:lstStyle/>
+          <a:p>
+            <a:r>
+              <a:rPr lang="en-GB" dirty="0"/>
+              <a:t>Superstrate</a:t>
+            </a:r>
+          </a:p>
+        </p:txBody>
+      </p:sp>
+      <p:sp>
+        <p:nvSpPr>
+          <p:cNvPr id="26" name="TextBox 25">
+            <a:extLst>
+              <a:ext uri="{FF2B5EF4-FFF2-40B4-BE49-F238E27FC236}">
+                <a16:creationId xmlns:a16="http://schemas.microsoft.com/office/drawing/2014/main" id="{1C225569-2FC8-3E0D-302C-446B74416D96}"/>
+              </a:ext>
+            </a:extLst>
+          </p:cNvPr>
+          <p:cNvSpPr txBox="1"/>
+          <p:nvPr/>
+        </p:nvSpPr>
+        <p:spPr>
+          <a:xfrm>
+            <a:off x="7666302" y="1144682"/>
+            <a:ext cx="1070871" cy="369332"/>
+          </a:xfrm>
+          <a:prstGeom prst="rect">
+            <a:avLst/>
+          </a:prstGeom>
+          <a:noFill/>
+        </p:spPr>
+        <p:txBody>
+          <a:bodyPr wrap="none" rtlCol="0">
+            <a:spAutoFit/>
+          </a:bodyPr>
+          <a:lstStyle/>
+          <a:p>
+            <a:r>
+              <a:rPr lang="en-GB" dirty="0"/>
+              <a:t>Substrate</a:t>
+            </a:r>
+          </a:p>
+        </p:txBody>
+      </p:sp>
+      <p:sp>
+        <p:nvSpPr>
+          <p:cNvPr id="28" name="TextBox 27">
+            <a:extLst>
+              <a:ext uri="{FF2B5EF4-FFF2-40B4-BE49-F238E27FC236}">
+                <a16:creationId xmlns:a16="http://schemas.microsoft.com/office/drawing/2014/main" id="{29C8D42F-695F-AD6B-78E7-DE1B6427529C}"/>
+              </a:ext>
+            </a:extLst>
+          </p:cNvPr>
+          <p:cNvSpPr txBox="1"/>
+          <p:nvPr/>
+        </p:nvSpPr>
+        <p:spPr>
+          <a:xfrm>
+            <a:off x="5408212" y="1144682"/>
+            <a:ext cx="1069524" cy="369332"/>
+          </a:xfrm>
+          <a:prstGeom prst="rect">
+            <a:avLst/>
+          </a:prstGeom>
+          <a:noFill/>
+        </p:spPr>
+        <p:txBody>
+          <a:bodyPr wrap="none" rtlCol="0">
+            <a:spAutoFit/>
+          </a:bodyPr>
+          <a:lstStyle/>
+          <a:p>
+            <a:r>
+              <a:rPr lang="en-GB" dirty="0"/>
+              <a:t>Dielectric</a:t>
+            </a:r>
+          </a:p>
+        </p:txBody>
+      </p:sp>
+      <p:cxnSp>
+        <p:nvCxnSpPr>
+          <p:cNvPr id="29" name="Straight Arrow Connector 28">
+            <a:extLst>
+              <a:ext uri="{FF2B5EF4-FFF2-40B4-BE49-F238E27FC236}">
+                <a16:creationId xmlns:a16="http://schemas.microsoft.com/office/drawing/2014/main" id="{3DCB6619-BF28-2717-AF12-FF0800DFE0D3}"/>
+              </a:ext>
+            </a:extLst>
+          </p:cNvPr>
+          <p:cNvCxnSpPr>
+            <a:cxnSpLocks/>
+          </p:cNvCxnSpPr>
+          <p:nvPr/>
+        </p:nvCxnSpPr>
+        <p:spPr>
+          <a:xfrm flipV="1">
+            <a:off x="4708361" y="3850944"/>
+            <a:ext cx="2475848" cy="568746"/>
+          </a:xfrm>
+          <a:prstGeom prst="straightConnector1">
+            <a:avLst/>
+          </a:prstGeom>
+          <a:ln w="38100">
+            <a:solidFill>
+              <a:srgbClr val="FF0000"/>
+            </a:solidFill>
+            <a:headEnd type="none" w="lg" len="lg"/>
+            <a:tailEnd type="triangle" w="lg" len="lg"/>
+          </a:ln>
+        </p:spPr>
+        <p:style>
+          <a:lnRef idx="1">
+            <a:schemeClr val="accent1"/>
+          </a:lnRef>
+          <a:fillRef idx="0">
+            <a:schemeClr val="accent1"/>
+          </a:fillRef>
+          <a:effectRef idx="0">
+            <a:schemeClr val="accent1"/>
+          </a:effectRef>
+          <a:fontRef idx="minor">
+            <a:schemeClr val="tx1"/>
+          </a:fontRef>
+        </p:style>
+      </p:cxnSp>
+      <p:cxnSp>
+        <p:nvCxnSpPr>
+          <p:cNvPr id="31" name="Straight Arrow Connector 30">
+            <a:extLst>
+              <a:ext uri="{FF2B5EF4-FFF2-40B4-BE49-F238E27FC236}">
+                <a16:creationId xmlns:a16="http://schemas.microsoft.com/office/drawing/2014/main" id="{6A729513-B619-3451-B1A1-AC227B8868F4}"/>
+              </a:ext>
+            </a:extLst>
+          </p:cNvPr>
+          <p:cNvCxnSpPr>
+            <a:cxnSpLocks/>
+          </p:cNvCxnSpPr>
+          <p:nvPr/>
+        </p:nvCxnSpPr>
+        <p:spPr>
+          <a:xfrm flipH="1" flipV="1">
+            <a:off x="4708361" y="3264091"/>
+            <a:ext cx="2496522" cy="573205"/>
+          </a:xfrm>
+          <a:prstGeom prst="straightConnector1">
+            <a:avLst/>
+          </a:prstGeom>
+          <a:ln w="38100">
+            <a:solidFill>
+              <a:srgbClr val="FF0000"/>
+            </a:solidFill>
+            <a:headEnd type="none" w="lg" len="lg"/>
+            <a:tailEnd type="triangle" w="lg" len="lg"/>
+          </a:ln>
+        </p:spPr>
+        <p:style>
+          <a:lnRef idx="1">
+            <a:schemeClr val="accent1"/>
+          </a:lnRef>
+          <a:fillRef idx="0">
+            <a:schemeClr val="accent1"/>
+          </a:fillRef>
+          <a:effectRef idx="0">
+            <a:schemeClr val="accent1"/>
+          </a:effectRef>
+          <a:fontRef idx="minor">
+            <a:schemeClr val="tx1"/>
+          </a:fontRef>
+        </p:style>
+      </p:cxnSp>
+      <p:cxnSp>
+        <p:nvCxnSpPr>
+          <p:cNvPr id="39" name="Straight Arrow Connector 38">
+            <a:extLst>
+              <a:ext uri="{FF2B5EF4-FFF2-40B4-BE49-F238E27FC236}">
+                <a16:creationId xmlns:a16="http://schemas.microsoft.com/office/drawing/2014/main" id="{92C52C11-E71D-F1C3-A68C-E1C8EC798598}"/>
+              </a:ext>
+            </a:extLst>
+          </p:cNvPr>
+          <p:cNvCxnSpPr>
+            <a:cxnSpLocks/>
+          </p:cNvCxnSpPr>
+          <p:nvPr/>
+        </p:nvCxnSpPr>
+        <p:spPr>
+          <a:xfrm flipV="1">
+            <a:off x="4753832" y="2691121"/>
+            <a:ext cx="2469226" cy="559322"/>
+          </a:xfrm>
+          <a:prstGeom prst="straightConnector1">
+            <a:avLst/>
+          </a:prstGeom>
+          <a:ln w="38100">
+            <a:solidFill>
+              <a:srgbClr val="FF0000"/>
+            </a:solidFill>
+            <a:headEnd type="none" w="lg" len="lg"/>
+            <a:tailEnd type="triangle" w="lg" len="lg"/>
+          </a:ln>
+        </p:spPr>
+        <p:style>
+          <a:lnRef idx="1">
+            <a:schemeClr val="accent1"/>
+          </a:lnRef>
+          <a:fillRef idx="0">
+            <a:schemeClr val="accent1"/>
+          </a:fillRef>
+          <a:effectRef idx="0">
+            <a:schemeClr val="accent1"/>
+          </a:effectRef>
+          <a:fontRef idx="minor">
+            <a:schemeClr val="tx1"/>
+          </a:fontRef>
+        </p:style>
+      </p:cxnSp>
+      <p:cxnSp>
+        <p:nvCxnSpPr>
+          <p:cNvPr id="5" name="Straight Arrow Connector 4">
+            <a:extLst>
+              <a:ext uri="{FF2B5EF4-FFF2-40B4-BE49-F238E27FC236}">
+                <a16:creationId xmlns:a16="http://schemas.microsoft.com/office/drawing/2014/main" id="{54534C0F-E537-8F83-A281-D0E33CA61773}"/>
+              </a:ext>
+            </a:extLst>
+          </p:cNvPr>
+          <p:cNvCxnSpPr/>
+          <p:nvPr/>
+        </p:nvCxnSpPr>
+        <p:spPr>
+          <a:xfrm>
+            <a:off x="2074463" y="5595582"/>
+            <a:ext cx="7876361" cy="39964"/>
+          </a:xfrm>
+          <a:prstGeom prst="straightConnector1">
+            <a:avLst/>
+          </a:prstGeom>
+          <a:ln w="76200">
+            <a:solidFill>
+              <a:schemeClr val="tx1"/>
+            </a:solidFill>
+            <a:tailEnd type="triangle"/>
+          </a:ln>
+        </p:spPr>
+        <p:style>
+          <a:lnRef idx="1">
+            <a:schemeClr val="accent1"/>
+          </a:lnRef>
+          <a:fillRef idx="0">
+            <a:schemeClr val="accent1"/>
+          </a:fillRef>
+          <a:effectRef idx="0">
+            <a:schemeClr val="accent1"/>
+          </a:effectRef>
+          <a:fontRef idx="minor">
+            <a:schemeClr val="tx1"/>
+          </a:fontRef>
+        </p:style>
+      </p:cxnSp>
+      <p:cxnSp>
+        <p:nvCxnSpPr>
+          <p:cNvPr id="7" name="Straight Arrow Connector 6">
+            <a:extLst>
+              <a:ext uri="{FF2B5EF4-FFF2-40B4-BE49-F238E27FC236}">
+                <a16:creationId xmlns:a16="http://schemas.microsoft.com/office/drawing/2014/main" id="{790B5A56-E690-AD93-BA58-C17A732317A7}"/>
+              </a:ext>
+            </a:extLst>
+          </p:cNvPr>
+          <p:cNvCxnSpPr>
+            <a:cxnSpLocks/>
+          </p:cNvCxnSpPr>
+          <p:nvPr/>
+        </p:nvCxnSpPr>
+        <p:spPr>
+          <a:xfrm flipV="1">
+            <a:off x="2119319" y="1514014"/>
+            <a:ext cx="0" cy="4094176"/>
+          </a:xfrm>
+          <a:prstGeom prst="straightConnector1">
+            <a:avLst/>
+          </a:prstGeom>
+          <a:ln w="76200">
+            <a:solidFill>
+              <a:schemeClr val="tx1"/>
+            </a:solidFill>
+            <a:tailEnd type="triangle"/>
+          </a:ln>
+        </p:spPr>
+        <p:style>
+          <a:lnRef idx="1">
+            <a:schemeClr val="accent1"/>
+          </a:lnRef>
+          <a:fillRef idx="0">
+            <a:schemeClr val="accent1"/>
+          </a:fillRef>
+          <a:effectRef idx="0">
+            <a:schemeClr val="accent1"/>
+          </a:effectRef>
+          <a:fontRef idx="minor">
+            <a:schemeClr val="tx1"/>
+          </a:fontRef>
+        </p:style>
+      </p:cxnSp>
+      <p:sp>
+        <p:nvSpPr>
+          <p:cNvPr id="11" name="TextBox 10">
+            <a:extLst>
+              <a:ext uri="{FF2B5EF4-FFF2-40B4-BE49-F238E27FC236}">
+                <a16:creationId xmlns:a16="http://schemas.microsoft.com/office/drawing/2014/main" id="{7E4576C7-EC40-5BEF-D687-BE2D23CC5A2F}"/>
+              </a:ext>
+            </a:extLst>
+          </p:cNvPr>
+          <p:cNvSpPr txBox="1"/>
+          <p:nvPr/>
+        </p:nvSpPr>
+        <p:spPr>
+          <a:xfrm>
+            <a:off x="9260731" y="5608190"/>
+            <a:ext cx="377026" cy="584775"/>
+          </a:xfrm>
+          <a:prstGeom prst="rect">
+            <a:avLst/>
+          </a:prstGeom>
+          <a:noFill/>
+        </p:spPr>
+        <p:txBody>
+          <a:bodyPr wrap="none" rtlCol="0">
+            <a:spAutoFit/>
+          </a:bodyPr>
+          <a:lstStyle/>
+          <a:p>
+            <a:r>
+              <a:rPr lang="en-GB" sz="3200" dirty="0"/>
+              <a:t>Z</a:t>
+            </a:r>
+          </a:p>
+        </p:txBody>
+      </p:sp>
+      <p:sp>
+        <p:nvSpPr>
+          <p:cNvPr id="13" name="TextBox 12">
+            <a:extLst>
+              <a:ext uri="{FF2B5EF4-FFF2-40B4-BE49-F238E27FC236}">
+                <a16:creationId xmlns:a16="http://schemas.microsoft.com/office/drawing/2014/main" id="{0E963316-87EA-D2E1-54DE-1BF9728A2F4F}"/>
+              </a:ext>
+            </a:extLst>
+          </p:cNvPr>
+          <p:cNvSpPr txBox="1"/>
+          <p:nvPr/>
+        </p:nvSpPr>
+        <p:spPr>
+          <a:xfrm>
+            <a:off x="1690652" y="1887238"/>
+            <a:ext cx="397866" cy="584775"/>
+          </a:xfrm>
+          <a:prstGeom prst="rect">
+            <a:avLst/>
+          </a:prstGeom>
+          <a:noFill/>
+        </p:spPr>
+        <p:txBody>
+          <a:bodyPr wrap="none" rtlCol="0">
+            <a:spAutoFit/>
+          </a:bodyPr>
+          <a:lstStyle/>
+          <a:p>
+            <a:r>
+              <a:rPr lang="en-GB" sz="3200" dirty="0"/>
+              <a:t>X</a:t>
+            </a:r>
+          </a:p>
+        </p:txBody>
+      </p:sp>
+      <p:sp>
+        <p:nvSpPr>
+          <p:cNvPr id="18" name="AutoShape 2" descr="FreeRDP clipboard image">
+            <a:extLst>
+              <a:ext uri="{FF2B5EF4-FFF2-40B4-BE49-F238E27FC236}">
+                <a16:creationId xmlns:a16="http://schemas.microsoft.com/office/drawing/2014/main" id="{52C79D9D-5AB8-496C-0E5F-AC6EF03382D4}"/>
+              </a:ext>
+            </a:extLst>
+          </p:cNvPr>
+          <p:cNvSpPr>
+            <a:spLocks noChangeAspect="1" noChangeArrowheads="1"/>
+          </p:cNvSpPr>
+          <p:nvPr/>
+        </p:nvSpPr>
+        <p:spPr bwMode="auto">
+          <a:xfrm>
+            <a:off x="5943600" y="3276600"/>
+            <a:ext cx="304800" cy="304800"/>
+          </a:xfrm>
+          <a:prstGeom prst="rect">
+            <a:avLst/>
+          </a:prstGeom>
+          <a:noFill/>
+          <a:extLst>
+            <a:ext uri="{909E8E84-426E-40DD-AFC4-6F175D3DCCD1}">
+              <a14:hiddenFill xmlns:a14="http://schemas.microsoft.com/office/drawing/2010/main">
+                <a:solidFill>
+                  <a:srgbClr val="FFFFFF"/>
+                </a:solidFill>
+              </a14:hiddenFill>
+            </a:ext>
+          </a:extLst>
+        </p:spPr>
+        <p:txBody>
+          <a:bodyPr vert="horz" wrap="square" lIns="91440" tIns="45720" rIns="91440" bIns="45720" numCol="1" anchor="t" anchorCtr="0" compatLnSpc="1">
+            <a:prstTxWarp prst="textNoShape">
+              <a:avLst/>
+            </a:prstTxWarp>
+          </a:bodyPr>
+          <a:lstStyle/>
+          <a:p>
+            <a:endParaRPr lang="en-GB"/>
+          </a:p>
+        </p:txBody>
+      </p:sp>
+      <p:grpSp>
+        <p:nvGrpSpPr>
+          <p:cNvPr id="3" name="Group 2">
+            <a:extLst>
+              <a:ext uri="{FF2B5EF4-FFF2-40B4-BE49-F238E27FC236}">
+                <a16:creationId xmlns:a16="http://schemas.microsoft.com/office/drawing/2014/main" id="{58F6C431-11F3-A72F-3B62-215624775DF9}"/>
+              </a:ext>
+            </a:extLst>
+          </p:cNvPr>
+          <p:cNvGrpSpPr/>
+          <p:nvPr/>
+        </p:nvGrpSpPr>
+        <p:grpSpPr>
+          <a:xfrm>
+            <a:off x="5450248" y="1939960"/>
+            <a:ext cx="932737" cy="914398"/>
+            <a:chOff x="8201738" y="2970782"/>
+            <a:chExt cx="932737" cy="914398"/>
+          </a:xfrm>
+        </p:grpSpPr>
+        <p:cxnSp>
+          <p:nvCxnSpPr>
+            <p:cNvPr id="9" name="Straight Arrow Connector 8">
+              <a:extLst>
+                <a:ext uri="{FF2B5EF4-FFF2-40B4-BE49-F238E27FC236}">
+                  <a16:creationId xmlns:a16="http://schemas.microsoft.com/office/drawing/2014/main" id="{6CD5DAE8-8932-AB45-71F4-D81531D5F1EA}"/>
+                </a:ext>
+              </a:extLst>
+            </p:cNvPr>
+            <p:cNvCxnSpPr>
+              <a:cxnSpLocks/>
+            </p:cNvCxnSpPr>
+            <p:nvPr/>
+          </p:nvCxnSpPr>
+          <p:spPr>
+            <a:xfrm flipV="1">
+              <a:off x="8658937" y="2970782"/>
+              <a:ext cx="0" cy="435384"/>
+            </a:xfrm>
+            <a:prstGeom prst="straightConnector1">
+              <a:avLst/>
+            </a:prstGeom>
+            <a:ln w="34925">
+              <a:solidFill>
+                <a:schemeClr val="accent6">
+                  <a:lumMod val="75000"/>
+                </a:schemeClr>
+              </a:solidFill>
+              <a:tailEnd type="triangle"/>
+            </a:ln>
+          </p:spPr>
+          <p:style>
+            <a:lnRef idx="1">
+              <a:schemeClr val="accent1"/>
+            </a:lnRef>
+            <a:fillRef idx="0">
+              <a:schemeClr val="accent1"/>
+            </a:fillRef>
+            <a:effectRef idx="0">
+              <a:schemeClr val="accent1"/>
+            </a:effectRef>
+            <a:fontRef idx="minor">
+              <a:schemeClr val="tx1"/>
+            </a:fontRef>
+          </p:style>
+        </p:cxnSp>
+        <p:cxnSp>
+          <p:nvCxnSpPr>
+            <p:cNvPr id="30" name="Straight Arrow Connector 29">
+              <a:extLst>
+                <a:ext uri="{FF2B5EF4-FFF2-40B4-BE49-F238E27FC236}">
+                  <a16:creationId xmlns:a16="http://schemas.microsoft.com/office/drawing/2014/main" id="{839926A8-D093-9A65-86FB-D68B478DE529}"/>
+                </a:ext>
+              </a:extLst>
+            </p:cNvPr>
+            <p:cNvCxnSpPr>
+              <a:cxnSpLocks/>
+            </p:cNvCxnSpPr>
+            <p:nvPr/>
+          </p:nvCxnSpPr>
+          <p:spPr>
+            <a:xfrm flipV="1">
+              <a:off x="8658937" y="3314700"/>
+              <a:ext cx="475538" cy="91466"/>
+            </a:xfrm>
+            <a:prstGeom prst="straightConnector1">
+              <a:avLst/>
+            </a:prstGeom>
+            <a:ln w="34925">
+              <a:solidFill>
+                <a:schemeClr val="accent6">
+                  <a:lumMod val="75000"/>
+                </a:schemeClr>
+              </a:solidFill>
+              <a:tailEnd type="triangle"/>
+            </a:ln>
+          </p:spPr>
+          <p:style>
+            <a:lnRef idx="1">
+              <a:schemeClr val="accent1"/>
+            </a:lnRef>
+            <a:fillRef idx="0">
+              <a:schemeClr val="accent1"/>
+            </a:fillRef>
+            <a:effectRef idx="0">
+              <a:schemeClr val="accent1"/>
+            </a:effectRef>
+            <a:fontRef idx="minor">
+              <a:schemeClr val="tx1"/>
+            </a:fontRef>
+          </p:style>
+        </p:cxnSp>
+        <p:cxnSp>
+          <p:nvCxnSpPr>
+            <p:cNvPr id="35" name="Straight Arrow Connector 34">
+              <a:extLst>
+                <a:ext uri="{FF2B5EF4-FFF2-40B4-BE49-F238E27FC236}">
+                  <a16:creationId xmlns:a16="http://schemas.microsoft.com/office/drawing/2014/main" id="{05FE1D34-F9F2-6598-F7B6-CFE8D7470683}"/>
+                </a:ext>
+              </a:extLst>
+            </p:cNvPr>
+            <p:cNvCxnSpPr>
+              <a:cxnSpLocks/>
+            </p:cNvCxnSpPr>
+            <p:nvPr/>
+          </p:nvCxnSpPr>
+          <p:spPr>
+            <a:xfrm>
+              <a:off x="8658987" y="3394356"/>
+              <a:ext cx="282515" cy="490824"/>
+            </a:xfrm>
+            <a:prstGeom prst="straightConnector1">
+              <a:avLst/>
+            </a:prstGeom>
+            <a:ln w="34925">
+              <a:solidFill>
+                <a:schemeClr val="accent6">
+                  <a:lumMod val="75000"/>
+                </a:schemeClr>
+              </a:solidFill>
+              <a:tailEnd type="triangle"/>
+            </a:ln>
+          </p:spPr>
+          <p:style>
+            <a:lnRef idx="1">
+              <a:schemeClr val="accent1"/>
+            </a:lnRef>
+            <a:fillRef idx="0">
+              <a:schemeClr val="accent1"/>
+            </a:fillRef>
+            <a:effectRef idx="0">
+              <a:schemeClr val="accent1"/>
+            </a:effectRef>
+            <a:fontRef idx="minor">
+              <a:schemeClr val="tx1"/>
+            </a:fontRef>
+          </p:style>
+        </p:cxnSp>
+        <p:cxnSp>
+          <p:nvCxnSpPr>
+            <p:cNvPr id="36" name="Straight Arrow Connector 35">
+              <a:extLst>
+                <a:ext uri="{FF2B5EF4-FFF2-40B4-BE49-F238E27FC236}">
+                  <a16:creationId xmlns:a16="http://schemas.microsoft.com/office/drawing/2014/main" id="{A43EC3CF-C276-D709-AE05-051686DEB03A}"/>
+                </a:ext>
+              </a:extLst>
+            </p:cNvPr>
+            <p:cNvCxnSpPr>
+              <a:cxnSpLocks/>
+            </p:cNvCxnSpPr>
+            <p:nvPr/>
+          </p:nvCxnSpPr>
+          <p:spPr>
+            <a:xfrm flipH="1">
+              <a:off x="8376372" y="3406166"/>
+              <a:ext cx="282565" cy="479014"/>
+            </a:xfrm>
+            <a:prstGeom prst="straightConnector1">
+              <a:avLst/>
+            </a:prstGeom>
+            <a:ln w="34925">
+              <a:solidFill>
+                <a:schemeClr val="accent6">
+                  <a:lumMod val="75000"/>
+                </a:schemeClr>
+              </a:solidFill>
+              <a:tailEnd type="triangle"/>
+            </a:ln>
+          </p:spPr>
+          <p:style>
+            <a:lnRef idx="1">
+              <a:schemeClr val="accent1"/>
+            </a:lnRef>
+            <a:fillRef idx="0">
+              <a:schemeClr val="accent1"/>
+            </a:fillRef>
+            <a:effectRef idx="0">
+              <a:schemeClr val="accent1"/>
+            </a:effectRef>
+            <a:fontRef idx="minor">
+              <a:schemeClr val="tx1"/>
+            </a:fontRef>
+          </p:style>
+        </p:cxnSp>
+        <p:cxnSp>
+          <p:nvCxnSpPr>
+            <p:cNvPr id="38" name="Straight Arrow Connector 37">
+              <a:extLst>
+                <a:ext uri="{FF2B5EF4-FFF2-40B4-BE49-F238E27FC236}">
+                  <a16:creationId xmlns:a16="http://schemas.microsoft.com/office/drawing/2014/main" id="{350EA904-221C-B530-5C6A-722E4B9C6F42}"/>
+                </a:ext>
+              </a:extLst>
+            </p:cNvPr>
+            <p:cNvCxnSpPr>
+              <a:cxnSpLocks/>
+            </p:cNvCxnSpPr>
+            <p:nvPr/>
+          </p:nvCxnSpPr>
+          <p:spPr>
+            <a:xfrm flipH="1" flipV="1">
+              <a:off x="8201738" y="3320051"/>
+              <a:ext cx="457199" cy="86115"/>
+            </a:xfrm>
+            <a:prstGeom prst="straightConnector1">
+              <a:avLst/>
+            </a:prstGeom>
+            <a:ln w="34925">
+              <a:solidFill>
+                <a:schemeClr val="accent6">
+                  <a:lumMod val="75000"/>
+                </a:schemeClr>
+              </a:solidFill>
+              <a:tailEnd type="triangle"/>
+            </a:ln>
+          </p:spPr>
+          <p:style>
+            <a:lnRef idx="1">
+              <a:schemeClr val="accent1"/>
+            </a:lnRef>
+            <a:fillRef idx="0">
+              <a:schemeClr val="accent1"/>
+            </a:fillRef>
+            <a:effectRef idx="0">
+              <a:schemeClr val="accent1"/>
+            </a:effectRef>
+            <a:fontRef idx="minor">
+              <a:schemeClr val="tx1"/>
+            </a:fontRef>
+          </p:style>
+        </p:cxnSp>
+      </p:grpSp>
+      <p:cxnSp>
+        <p:nvCxnSpPr>
+          <p:cNvPr id="14" name="Straight Connector 13">
+            <a:extLst>
+              <a:ext uri="{FF2B5EF4-FFF2-40B4-BE49-F238E27FC236}">
+                <a16:creationId xmlns:a16="http://schemas.microsoft.com/office/drawing/2014/main" id="{1DEB8E6C-3ABA-8DE4-F022-47B5E740FFAE}"/>
+              </a:ext>
+            </a:extLst>
+          </p:cNvPr>
+          <p:cNvCxnSpPr>
+            <a:endCxn id="27" idx="2"/>
+          </p:cNvCxnSpPr>
+          <p:nvPr/>
+        </p:nvCxnSpPr>
+        <p:spPr>
+          <a:xfrm>
+            <a:off x="5907447" y="2363534"/>
+            <a:ext cx="40055" cy="3260320"/>
+          </a:xfrm>
+          <a:prstGeom prst="line">
+            <a:avLst/>
+          </a:prstGeom>
+        </p:spPr>
+        <p:style>
+          <a:lnRef idx="1">
+            <a:schemeClr val="accent1"/>
+          </a:lnRef>
+          <a:fillRef idx="0">
+            <a:schemeClr val="accent1"/>
+          </a:fillRef>
+          <a:effectRef idx="0">
+            <a:schemeClr val="accent1"/>
+          </a:effectRef>
+          <a:fontRef idx="minor">
+            <a:schemeClr val="tx1"/>
+          </a:fontRef>
+        </p:style>
+      </p:cxnSp>
+      <p:sp>
+        <p:nvSpPr>
+          <p:cNvPr id="15" name="TextBox 14">
+            <a:extLst>
+              <a:ext uri="{FF2B5EF4-FFF2-40B4-BE49-F238E27FC236}">
+                <a16:creationId xmlns:a16="http://schemas.microsoft.com/office/drawing/2014/main" id="{C766DDA1-9F5B-A4F5-1342-62DA09976A1A}"/>
+              </a:ext>
+            </a:extLst>
+          </p:cNvPr>
+          <p:cNvSpPr txBox="1"/>
+          <p:nvPr/>
+        </p:nvSpPr>
+        <p:spPr>
+          <a:xfrm>
+            <a:off x="5792234" y="5573997"/>
+            <a:ext cx="352982" cy="369332"/>
+          </a:xfrm>
+          <a:prstGeom prst="rect">
+            <a:avLst/>
+          </a:prstGeom>
+          <a:noFill/>
+        </p:spPr>
+        <p:txBody>
+          <a:bodyPr wrap="none" rtlCol="0">
+            <a:spAutoFit/>
+          </a:bodyPr>
+          <a:lstStyle/>
+          <a:p>
+            <a:r>
+              <a:rPr lang="en-GB" dirty="0"/>
+              <a:t>Z</a:t>
+            </a:r>
+            <a:r>
+              <a:rPr lang="en-GB" baseline="-25000" dirty="0"/>
+              <a:t>s</a:t>
+            </a:r>
+          </a:p>
+        </p:txBody>
+      </p:sp>
+      <p:cxnSp>
+        <p:nvCxnSpPr>
+          <p:cNvPr id="17" name="Straight Arrow Connector 16">
+            <a:extLst>
+              <a:ext uri="{FF2B5EF4-FFF2-40B4-BE49-F238E27FC236}">
+                <a16:creationId xmlns:a16="http://schemas.microsoft.com/office/drawing/2014/main" id="{4B6C920E-D9F2-B910-1BFD-C6D0DC909FAD}"/>
+              </a:ext>
+            </a:extLst>
+          </p:cNvPr>
+          <p:cNvCxnSpPr>
+            <a:cxnSpLocks/>
+          </p:cNvCxnSpPr>
+          <p:nvPr/>
+        </p:nvCxnSpPr>
+        <p:spPr>
+          <a:xfrm>
+            <a:off x="7191326" y="2514600"/>
+            <a:ext cx="1740918" cy="1679420"/>
+          </a:xfrm>
+          <a:prstGeom prst="straightConnector1">
+            <a:avLst/>
+          </a:prstGeom>
+          <a:ln w="38100">
+            <a:solidFill>
+              <a:schemeClr val="accent6">
+                <a:lumMod val="75000"/>
+              </a:schemeClr>
+            </a:solidFill>
+            <a:tailEnd type="triangle"/>
+          </a:ln>
+        </p:spPr>
+        <p:style>
+          <a:lnRef idx="1">
+            <a:schemeClr val="accent1"/>
+          </a:lnRef>
+          <a:fillRef idx="0">
+            <a:schemeClr val="accent1"/>
+          </a:fillRef>
+          <a:effectRef idx="0">
+            <a:schemeClr val="accent1"/>
+          </a:effectRef>
+          <a:fontRef idx="minor">
+            <a:schemeClr val="tx1"/>
+          </a:fontRef>
+        </p:style>
+      </p:cxnSp>
+      <p:cxnSp>
+        <p:nvCxnSpPr>
+          <p:cNvPr id="20" name="Straight Arrow Connector 19">
+            <a:extLst>
+              <a:ext uri="{FF2B5EF4-FFF2-40B4-BE49-F238E27FC236}">
+                <a16:creationId xmlns:a16="http://schemas.microsoft.com/office/drawing/2014/main" id="{05391E77-D50F-E740-205F-4B337532F7B1}"/>
+              </a:ext>
+            </a:extLst>
+          </p:cNvPr>
+          <p:cNvCxnSpPr>
+            <a:cxnSpLocks/>
+          </p:cNvCxnSpPr>
+          <p:nvPr/>
+        </p:nvCxnSpPr>
+        <p:spPr>
+          <a:xfrm>
+            <a:off x="5913759" y="2367647"/>
+            <a:ext cx="1291124" cy="158116"/>
+          </a:xfrm>
+          <a:prstGeom prst="straightConnector1">
+            <a:avLst/>
+          </a:prstGeom>
+          <a:ln w="38100">
+            <a:solidFill>
+              <a:schemeClr val="accent6">
+                <a:lumMod val="75000"/>
+              </a:schemeClr>
+            </a:solidFill>
+            <a:tailEnd type="triangle"/>
+          </a:ln>
+        </p:spPr>
+        <p:style>
+          <a:lnRef idx="1">
+            <a:schemeClr val="accent1"/>
+          </a:lnRef>
+          <a:fillRef idx="0">
+            <a:schemeClr val="accent1"/>
+          </a:fillRef>
+          <a:effectRef idx="0">
+            <a:schemeClr val="accent1"/>
+          </a:effectRef>
+          <a:fontRef idx="minor">
+            <a:schemeClr val="tx1"/>
+          </a:fontRef>
+        </p:style>
+      </p:cxnSp>
+      <p:cxnSp>
+        <p:nvCxnSpPr>
+          <p:cNvPr id="21" name="Straight Arrow Connector 20">
+            <a:extLst>
+              <a:ext uri="{FF2B5EF4-FFF2-40B4-BE49-F238E27FC236}">
+                <a16:creationId xmlns:a16="http://schemas.microsoft.com/office/drawing/2014/main" id="{E12D3199-279E-4A43-EDAE-7DD6D1D401C9}"/>
+              </a:ext>
+            </a:extLst>
+          </p:cNvPr>
+          <p:cNvCxnSpPr>
+            <a:cxnSpLocks/>
+          </p:cNvCxnSpPr>
+          <p:nvPr/>
+        </p:nvCxnSpPr>
+        <p:spPr>
+          <a:xfrm flipH="1">
+            <a:off x="2768305" y="2608946"/>
+            <a:ext cx="1969424" cy="1177805"/>
+          </a:xfrm>
+          <a:prstGeom prst="straightConnector1">
+            <a:avLst/>
+          </a:prstGeom>
+          <a:ln w="38100">
+            <a:solidFill>
+              <a:schemeClr val="accent6">
+                <a:lumMod val="75000"/>
+              </a:schemeClr>
+            </a:solidFill>
+            <a:tailEnd type="triangle"/>
+          </a:ln>
+        </p:spPr>
+        <p:style>
+          <a:lnRef idx="1">
+            <a:schemeClr val="accent1"/>
+          </a:lnRef>
+          <a:fillRef idx="0">
+            <a:schemeClr val="accent1"/>
+          </a:fillRef>
+          <a:effectRef idx="0">
+            <a:schemeClr val="accent1"/>
+          </a:effectRef>
+          <a:fontRef idx="minor">
+            <a:schemeClr val="tx1"/>
+          </a:fontRef>
+        </p:style>
+      </p:cxnSp>
+      <p:cxnSp>
+        <p:nvCxnSpPr>
+          <p:cNvPr id="23" name="Straight Arrow Connector 22">
+            <a:extLst>
+              <a:ext uri="{FF2B5EF4-FFF2-40B4-BE49-F238E27FC236}">
+                <a16:creationId xmlns:a16="http://schemas.microsoft.com/office/drawing/2014/main" id="{7B0991C5-8AAB-8190-D25E-EF4CEDEB0D39}"/>
+              </a:ext>
+            </a:extLst>
+          </p:cNvPr>
+          <p:cNvCxnSpPr>
+            <a:cxnSpLocks/>
+          </p:cNvCxnSpPr>
+          <p:nvPr/>
+        </p:nvCxnSpPr>
+        <p:spPr>
+          <a:xfrm flipH="1">
+            <a:off x="4708196" y="2387154"/>
+            <a:ext cx="1189722" cy="241375"/>
+          </a:xfrm>
+          <a:prstGeom prst="straightConnector1">
+            <a:avLst/>
+          </a:prstGeom>
+          <a:ln w="38100">
+            <a:solidFill>
+              <a:schemeClr val="accent6">
+                <a:lumMod val="75000"/>
+              </a:schemeClr>
+            </a:solidFill>
+            <a:tailEnd type="triangle"/>
+          </a:ln>
+        </p:spPr>
+        <p:style>
+          <a:lnRef idx="1">
+            <a:schemeClr val="accent1"/>
+          </a:lnRef>
+          <a:fillRef idx="0">
+            <a:schemeClr val="accent1"/>
+          </a:fillRef>
+          <a:effectRef idx="0">
+            <a:schemeClr val="accent1"/>
+          </a:effectRef>
+          <a:fontRef idx="minor">
+            <a:schemeClr val="tx1"/>
+          </a:fontRef>
+        </p:style>
+      </p:cxnSp>
+      <p:sp>
+        <p:nvSpPr>
+          <p:cNvPr id="52" name="TextBox 51">
+            <a:extLst>
+              <a:ext uri="{FF2B5EF4-FFF2-40B4-BE49-F238E27FC236}">
+                <a16:creationId xmlns:a16="http://schemas.microsoft.com/office/drawing/2014/main" id="{CCA5D9FE-123F-49EC-F079-7028CB955CFA}"/>
+              </a:ext>
+            </a:extLst>
+          </p:cNvPr>
+          <p:cNvSpPr txBox="1"/>
+          <p:nvPr/>
+        </p:nvSpPr>
+        <p:spPr>
+          <a:xfrm>
+            <a:off x="5346332" y="1620151"/>
+            <a:ext cx="1122230" cy="369332"/>
+          </a:xfrm>
+          <a:prstGeom prst="rect">
+            <a:avLst/>
+          </a:prstGeom>
+          <a:noFill/>
+        </p:spPr>
+        <p:txBody>
+          <a:bodyPr wrap="none" rtlCol="0">
+            <a:spAutoFit/>
+          </a:bodyPr>
+          <a:lstStyle/>
+          <a:p>
+            <a:r>
+              <a:rPr lang="en-GB" dirty="0">
+                <a:solidFill>
+                  <a:schemeClr val="accent6">
+                    <a:lumMod val="75000"/>
+                  </a:schemeClr>
+                </a:solidFill>
+              </a:rPr>
+              <a:t>Scattering</a:t>
+            </a:r>
+          </a:p>
+        </p:txBody>
+      </p:sp>
+      <p:sp>
+        <p:nvSpPr>
+          <p:cNvPr id="53" name="TextBox 52">
+            <a:extLst>
+              <a:ext uri="{FF2B5EF4-FFF2-40B4-BE49-F238E27FC236}">
+                <a16:creationId xmlns:a16="http://schemas.microsoft.com/office/drawing/2014/main" id="{05DF996D-A913-176A-B2F5-EC247C6A8A3A}"/>
+              </a:ext>
+            </a:extLst>
+          </p:cNvPr>
+          <p:cNvSpPr txBox="1"/>
+          <p:nvPr/>
+        </p:nvSpPr>
+        <p:spPr>
+          <a:xfrm>
+            <a:off x="8995307" y="3832810"/>
+            <a:ext cx="1122230" cy="923330"/>
+          </a:xfrm>
+          <a:prstGeom prst="rect">
+            <a:avLst/>
+          </a:prstGeom>
+          <a:solidFill>
+            <a:srgbClr val="FFC000"/>
+          </a:solidFill>
+        </p:spPr>
+        <p:txBody>
+          <a:bodyPr wrap="none" rtlCol="0">
+            <a:spAutoFit/>
+          </a:bodyPr>
+          <a:lstStyle/>
+          <a:p>
+            <a:pPr algn="ctr"/>
+            <a:r>
+              <a:rPr lang="en-GB" dirty="0">
+                <a:solidFill>
+                  <a:schemeClr val="accent6">
+                    <a:lumMod val="75000"/>
+                  </a:schemeClr>
+                </a:solidFill>
+              </a:rPr>
+              <a:t>Detector</a:t>
+            </a:r>
+            <a:br>
+              <a:rPr lang="en-GB" dirty="0">
+                <a:solidFill>
+                  <a:schemeClr val="accent6">
+                    <a:lumMod val="75000"/>
+                  </a:schemeClr>
+                </a:solidFill>
+              </a:rPr>
+            </a:br>
+            <a:r>
+              <a:rPr lang="en-GB" dirty="0">
+                <a:solidFill>
+                  <a:schemeClr val="accent6">
+                    <a:lumMod val="75000"/>
+                  </a:schemeClr>
+                </a:solidFill>
+              </a:rPr>
+              <a:t>Forward</a:t>
+            </a:r>
+            <a:br>
+              <a:rPr lang="en-GB" dirty="0">
+                <a:solidFill>
+                  <a:schemeClr val="accent6">
+                    <a:lumMod val="75000"/>
+                  </a:schemeClr>
+                </a:solidFill>
+              </a:rPr>
+            </a:br>
+            <a:r>
+              <a:rPr lang="en-GB" dirty="0">
+                <a:solidFill>
+                  <a:schemeClr val="accent6">
+                    <a:lumMod val="75000"/>
+                  </a:schemeClr>
+                </a:solidFill>
+              </a:rPr>
+              <a:t>Scattering</a:t>
+            </a:r>
+          </a:p>
+        </p:txBody>
+      </p:sp>
+      <p:sp>
+        <p:nvSpPr>
+          <p:cNvPr id="57" name="TextBox 56">
+            <a:extLst>
+              <a:ext uri="{FF2B5EF4-FFF2-40B4-BE49-F238E27FC236}">
+                <a16:creationId xmlns:a16="http://schemas.microsoft.com/office/drawing/2014/main" id="{CF882EEF-AEAA-AD26-84EE-C98A3BA45921}"/>
+              </a:ext>
+            </a:extLst>
+          </p:cNvPr>
+          <p:cNvSpPr txBox="1"/>
+          <p:nvPr/>
+        </p:nvSpPr>
+        <p:spPr>
+          <a:xfrm>
+            <a:off x="1607746" y="3509806"/>
+            <a:ext cx="1122230" cy="923330"/>
+          </a:xfrm>
+          <a:prstGeom prst="rect">
+            <a:avLst/>
+          </a:prstGeom>
+          <a:solidFill>
+            <a:srgbClr val="FFC000"/>
+          </a:solidFill>
+        </p:spPr>
+        <p:txBody>
+          <a:bodyPr wrap="none" rtlCol="0">
+            <a:spAutoFit/>
+          </a:bodyPr>
+          <a:lstStyle/>
+          <a:p>
+            <a:pPr algn="ctr"/>
+            <a:r>
+              <a:rPr lang="en-GB" dirty="0">
+                <a:solidFill>
+                  <a:schemeClr val="accent6">
+                    <a:lumMod val="75000"/>
+                  </a:schemeClr>
+                </a:solidFill>
+              </a:rPr>
+              <a:t>Detector</a:t>
+            </a:r>
+            <a:br>
+              <a:rPr lang="en-GB" dirty="0">
+                <a:solidFill>
+                  <a:schemeClr val="accent6">
+                    <a:lumMod val="75000"/>
+                  </a:schemeClr>
+                </a:solidFill>
+              </a:rPr>
+            </a:br>
+            <a:r>
+              <a:rPr lang="en-GB" dirty="0">
+                <a:solidFill>
+                  <a:schemeClr val="accent6">
+                    <a:lumMod val="75000"/>
+                  </a:schemeClr>
+                </a:solidFill>
+              </a:rPr>
+              <a:t>Back</a:t>
+            </a:r>
+            <a:br>
+              <a:rPr lang="en-GB" dirty="0">
+                <a:solidFill>
+                  <a:schemeClr val="accent6">
+                    <a:lumMod val="75000"/>
+                  </a:schemeClr>
+                </a:solidFill>
+              </a:rPr>
+            </a:br>
+            <a:r>
+              <a:rPr lang="en-GB" dirty="0">
+                <a:solidFill>
+                  <a:schemeClr val="accent6">
+                    <a:lumMod val="75000"/>
+                  </a:schemeClr>
+                </a:solidFill>
+              </a:rPr>
+              <a:t>Scattering</a:t>
+            </a:r>
+          </a:p>
+        </p:txBody>
+      </p:sp>
+      <p:cxnSp>
+        <p:nvCxnSpPr>
+          <p:cNvPr id="59" name="Straight Connector 58">
+            <a:extLst>
+              <a:ext uri="{FF2B5EF4-FFF2-40B4-BE49-F238E27FC236}">
+                <a16:creationId xmlns:a16="http://schemas.microsoft.com/office/drawing/2014/main" id="{BFDA2F7A-DE9D-16D8-4AC5-787974EB177D}"/>
+              </a:ext>
+            </a:extLst>
+          </p:cNvPr>
+          <p:cNvCxnSpPr/>
+          <p:nvPr/>
+        </p:nvCxnSpPr>
+        <p:spPr>
+          <a:xfrm flipH="1">
+            <a:off x="3009132" y="2601596"/>
+            <a:ext cx="1714907" cy="0"/>
+          </a:xfrm>
+          <a:prstGeom prst="line">
+            <a:avLst/>
+          </a:prstGeom>
+          <a:ln w="9525" cap="flat" cmpd="sng" algn="ctr">
+            <a:solidFill>
+              <a:schemeClr val="dk1"/>
+            </a:solidFill>
+            <a:prstDash val="dash"/>
+            <a:round/>
+            <a:headEnd type="none" w="med" len="med"/>
+            <a:tailEnd type="none" w="med" len="med"/>
+          </a:ln>
+        </p:spPr>
+        <p:style>
+          <a:lnRef idx="0">
+            <a:scrgbClr r="0" g="0" b="0"/>
+          </a:lnRef>
+          <a:fillRef idx="0">
+            <a:scrgbClr r="0" g="0" b="0"/>
+          </a:fillRef>
+          <a:effectRef idx="0">
+            <a:scrgbClr r="0" g="0" b="0"/>
+          </a:effectRef>
+          <a:fontRef idx="minor">
+            <a:schemeClr val="tx1"/>
+          </a:fontRef>
+        </p:style>
+      </p:cxnSp>
+      <mc:AlternateContent xmlns:mc="http://schemas.openxmlformats.org/markup-compatibility/2006">
+        <mc:Choice xmlns:a14="http://schemas.microsoft.com/office/drawing/2010/main" Requires="a14">
+          <p:sp>
+            <p:nvSpPr>
+              <p:cNvPr id="61" name="TextBox 60">
+                <a:extLst>
+                  <a:ext uri="{FF2B5EF4-FFF2-40B4-BE49-F238E27FC236}">
+                    <a16:creationId xmlns:a16="http://schemas.microsoft.com/office/drawing/2014/main" id="{F2ED502E-45F9-9062-D646-7C3A12D3B85A}"/>
+                  </a:ext>
+                </a:extLst>
+              </p:cNvPr>
+              <p:cNvSpPr txBox="1"/>
+              <p:nvPr/>
+            </p:nvSpPr>
+            <p:spPr>
+              <a:xfrm>
+                <a:off x="3982728" y="2584337"/>
+                <a:ext cx="251351" cy="270652"/>
+              </a:xfrm>
+              <a:prstGeom prst="rect">
+                <a:avLst/>
+              </a:prstGeom>
+              <a:noFill/>
+            </p:spPr>
+            <p:txBody>
+              <a:bodyPr wrap="none" lIns="0" tIns="0" rIns="0" bIns="0" rtlCol="0">
+                <a:spAutoFit/>
+              </a:bodyPr>
+              <a:lstStyle/>
+              <a:p>
+                <a:pPr/>
+                <a14:m>
+                  <m:oMathPara xmlns:m="http://schemas.openxmlformats.org/officeDocument/2006/math">
+                    <m:oMathParaPr>
+                      <m:jc m:val="centerGroup"/>
+                    </m:oMathParaPr>
+                    <m:oMath xmlns:m="http://schemas.openxmlformats.org/officeDocument/2006/math">
+                      <m:r>
+                        <a:rPr lang="en-GB" i="1" smtClean="0">
+                          <a:latin typeface="Cambria Math" panose="02040503050406030204" pitchFamily="18" charset="0"/>
+                          <a:ea typeface="Cambria Math" panose="02040503050406030204" pitchFamily="18" charset="0"/>
+                        </a:rPr>
+                        <m:t>𝜃</m:t>
+                      </m:r>
+                      <m:r>
+                        <a:rPr lang="en-GB" b="0" i="1" baseline="-25000" smtClean="0">
+                          <a:latin typeface="Cambria Math" panose="02040503050406030204" pitchFamily="18" charset="0"/>
+                          <a:ea typeface="Cambria Math" panose="02040503050406030204" pitchFamily="18" charset="0"/>
+                        </a:rPr>
+                        <m:t>𝑆</m:t>
+                      </m:r>
+                    </m:oMath>
+                  </m:oMathPara>
+                </a14:m>
+                <a:endParaRPr lang="en-GB" baseline="-25000" dirty="0"/>
+              </a:p>
+            </p:txBody>
+          </p:sp>
+        </mc:Choice>
+        <mc:Fallback>
+          <p:sp>
+            <p:nvSpPr>
+              <p:cNvPr id="61" name="TextBox 60">
+                <a:extLst>
+                  <a:ext uri="{FF2B5EF4-FFF2-40B4-BE49-F238E27FC236}">
+                    <a16:creationId xmlns:a16="http://schemas.microsoft.com/office/drawing/2014/main" id="{F2ED502E-45F9-9062-D646-7C3A12D3B85A}"/>
+                  </a:ext>
+                </a:extLst>
+              </p:cNvPr>
+              <p:cNvSpPr txBox="1">
+                <a:spLocks noRot="1" noChangeAspect="1" noMove="1" noResize="1" noEditPoints="1" noAdjustHandles="1" noChangeArrowheads="1" noChangeShapeType="1" noTextEdit="1"/>
+              </p:cNvSpPr>
+              <p:nvPr/>
+            </p:nvSpPr>
+            <p:spPr>
+              <a:xfrm>
+                <a:off x="3982728" y="2584337"/>
+                <a:ext cx="251351" cy="270652"/>
+              </a:xfrm>
+              <a:prstGeom prst="rect">
+                <a:avLst/>
+              </a:prstGeom>
+              <a:blipFill>
+                <a:blip r:embed="rId3"/>
+                <a:stretch>
+                  <a:fillRect l="-23810" r="-9524" b="-20455"/>
+                </a:stretch>
+              </a:blipFill>
+            </p:spPr>
+            <p:txBody>
+              <a:bodyPr/>
+              <a:lstStyle/>
+              <a:p>
+                <a:r>
+                  <a:rPr lang="en-GB">
+                    <a:noFill/>
+                  </a:rPr>
+                  <a:t> </a:t>
+                </a:r>
+              </a:p>
+            </p:txBody>
+          </p:sp>
+        </mc:Fallback>
+      </mc:AlternateContent>
+      <p:cxnSp>
+        <p:nvCxnSpPr>
+          <p:cNvPr id="63" name="Straight Connector 62">
+            <a:extLst>
+              <a:ext uri="{FF2B5EF4-FFF2-40B4-BE49-F238E27FC236}">
+                <a16:creationId xmlns:a16="http://schemas.microsoft.com/office/drawing/2014/main" id="{85C9765E-27B6-3286-305B-8465AA700743}"/>
+              </a:ext>
+            </a:extLst>
+          </p:cNvPr>
+          <p:cNvCxnSpPr/>
+          <p:nvPr/>
+        </p:nvCxnSpPr>
+        <p:spPr>
+          <a:xfrm flipH="1">
+            <a:off x="7204331" y="2507332"/>
+            <a:ext cx="1714907" cy="0"/>
+          </a:xfrm>
+          <a:prstGeom prst="line">
+            <a:avLst/>
+          </a:prstGeom>
+          <a:ln w="9525" cap="flat" cmpd="sng" algn="ctr">
+            <a:solidFill>
+              <a:schemeClr val="dk1"/>
+            </a:solidFill>
+            <a:prstDash val="dash"/>
+            <a:round/>
+            <a:headEnd type="none" w="med" len="med"/>
+            <a:tailEnd type="none" w="med" len="med"/>
+          </a:ln>
+        </p:spPr>
+        <p:style>
+          <a:lnRef idx="0">
+            <a:scrgbClr r="0" g="0" b="0"/>
+          </a:lnRef>
+          <a:fillRef idx="0">
+            <a:scrgbClr r="0" g="0" b="0"/>
+          </a:fillRef>
+          <a:effectRef idx="0">
+            <a:scrgbClr r="0" g="0" b="0"/>
+          </a:effectRef>
+          <a:fontRef idx="minor">
+            <a:schemeClr val="tx1"/>
+          </a:fontRef>
+        </p:style>
+      </p:cxnSp>
+      <p:sp>
+        <p:nvSpPr>
+          <p:cNvPr id="65" name="AutoShape 18" descr="FreeRDP clipboard image">
+            <a:extLst>
+              <a:ext uri="{FF2B5EF4-FFF2-40B4-BE49-F238E27FC236}">
+                <a16:creationId xmlns:a16="http://schemas.microsoft.com/office/drawing/2014/main" id="{5AC8D6AD-9A9A-7A26-542C-816D38E5D46E}"/>
+              </a:ext>
+            </a:extLst>
+          </p:cNvPr>
+          <p:cNvSpPr>
+            <a:spLocks noChangeAspect="1" noChangeArrowheads="1"/>
+          </p:cNvSpPr>
+          <p:nvPr/>
+        </p:nvSpPr>
+        <p:spPr bwMode="auto">
+          <a:xfrm>
+            <a:off x="6096000" y="3429000"/>
+            <a:ext cx="304800" cy="304800"/>
+          </a:xfrm>
+          <a:prstGeom prst="rect">
+            <a:avLst/>
+          </a:prstGeom>
+          <a:noFill/>
+          <a:extLst>
+            <a:ext uri="{909E8E84-426E-40DD-AFC4-6F175D3DCCD1}">
+              <a14:hiddenFill xmlns:a14="http://schemas.microsoft.com/office/drawing/2010/main">
+                <a:solidFill>
+                  <a:srgbClr val="FFFFFF"/>
+                </a:solidFill>
+              </a14:hiddenFill>
+            </a:ext>
+          </a:extLst>
+        </p:spPr>
+        <p:txBody>
+          <a:bodyPr vert="horz" wrap="square" lIns="91440" tIns="45720" rIns="91440" bIns="45720" numCol="1" anchor="t" anchorCtr="0" compatLnSpc="1">
+            <a:prstTxWarp prst="textNoShape">
+              <a:avLst/>
+            </a:prstTxWarp>
+          </a:bodyPr>
+          <a:lstStyle/>
+          <a:p>
+            <a:endParaRPr lang="en-GB"/>
+          </a:p>
+        </p:txBody>
+      </p:sp>
+      <mc:AlternateContent xmlns:mc="http://schemas.openxmlformats.org/markup-compatibility/2006">
+        <mc:Choice xmlns:a14="http://schemas.microsoft.com/office/drawing/2010/main" Requires="a14">
+          <p:sp>
+            <p:nvSpPr>
+              <p:cNvPr id="66" name="TextBox 65">
+                <a:extLst>
+                  <a:ext uri="{FF2B5EF4-FFF2-40B4-BE49-F238E27FC236}">
+                    <a16:creationId xmlns:a16="http://schemas.microsoft.com/office/drawing/2014/main" id="{D7891217-1326-5300-B6A8-90D19293140A}"/>
+                  </a:ext>
+                </a:extLst>
+              </p:cNvPr>
+              <p:cNvSpPr txBox="1"/>
+              <p:nvPr/>
+            </p:nvSpPr>
+            <p:spPr>
+              <a:xfrm>
+                <a:off x="7469382" y="2507332"/>
+                <a:ext cx="251351" cy="270652"/>
+              </a:xfrm>
+              <a:prstGeom prst="rect">
+                <a:avLst/>
+              </a:prstGeom>
+              <a:noFill/>
+            </p:spPr>
+            <p:txBody>
+              <a:bodyPr wrap="none" lIns="0" tIns="0" rIns="0" bIns="0" rtlCol="0">
+                <a:spAutoFit/>
+              </a:bodyPr>
+              <a:lstStyle/>
+              <a:p>
+                <a:pPr/>
+                <a14:m>
+                  <m:oMathPara xmlns:m="http://schemas.openxmlformats.org/officeDocument/2006/math">
+                    <m:oMathParaPr>
+                      <m:jc m:val="centerGroup"/>
+                    </m:oMathParaPr>
+                    <m:oMath xmlns:m="http://schemas.openxmlformats.org/officeDocument/2006/math">
+                      <m:r>
+                        <a:rPr lang="en-GB" i="1" smtClean="0">
+                          <a:latin typeface="Cambria Math" panose="02040503050406030204" pitchFamily="18" charset="0"/>
+                          <a:ea typeface="Cambria Math" panose="02040503050406030204" pitchFamily="18" charset="0"/>
+                        </a:rPr>
+                        <m:t>𝜃</m:t>
+                      </m:r>
+                      <m:r>
+                        <a:rPr lang="en-GB" b="0" i="1" baseline="-25000" smtClean="0">
+                          <a:latin typeface="Cambria Math" panose="02040503050406030204" pitchFamily="18" charset="0"/>
+                          <a:ea typeface="Cambria Math" panose="02040503050406030204" pitchFamily="18" charset="0"/>
+                        </a:rPr>
+                        <m:t>𝑆</m:t>
+                      </m:r>
+                    </m:oMath>
+                  </m:oMathPara>
+                </a14:m>
+                <a:endParaRPr lang="en-GB" baseline="-25000" dirty="0"/>
+              </a:p>
+            </p:txBody>
+          </p:sp>
+        </mc:Choice>
+        <mc:Fallback>
+          <p:sp>
+            <p:nvSpPr>
+              <p:cNvPr id="66" name="TextBox 65">
+                <a:extLst>
+                  <a:ext uri="{FF2B5EF4-FFF2-40B4-BE49-F238E27FC236}">
+                    <a16:creationId xmlns:a16="http://schemas.microsoft.com/office/drawing/2014/main" id="{D7891217-1326-5300-B6A8-90D19293140A}"/>
+                  </a:ext>
+                </a:extLst>
+              </p:cNvPr>
+              <p:cNvSpPr txBox="1">
+                <a:spLocks noRot="1" noChangeAspect="1" noMove="1" noResize="1" noEditPoints="1" noAdjustHandles="1" noChangeArrowheads="1" noChangeShapeType="1" noTextEdit="1"/>
+              </p:cNvSpPr>
+              <p:nvPr/>
+            </p:nvSpPr>
+            <p:spPr>
+              <a:xfrm>
+                <a:off x="7469382" y="2507332"/>
+                <a:ext cx="251351" cy="270652"/>
+              </a:xfrm>
+              <a:prstGeom prst="rect">
+                <a:avLst/>
+              </a:prstGeom>
+              <a:blipFill>
+                <a:blip r:embed="rId4"/>
+                <a:stretch>
+                  <a:fillRect l="-23810" r="-9524" b="-17778"/>
+                </a:stretch>
+              </a:blipFill>
+            </p:spPr>
+            <p:txBody>
+              <a:bodyPr/>
+              <a:lstStyle/>
+              <a:p>
+                <a:r>
+                  <a:rPr lang="en-GB">
+                    <a:noFill/>
+                  </a:rPr>
+                  <a:t> </a:t>
+                </a:r>
+              </a:p>
+            </p:txBody>
+          </p:sp>
+        </mc:Fallback>
+      </mc:AlternateContent>
+      <p:cxnSp>
+        <p:nvCxnSpPr>
+          <p:cNvPr id="68" name="Straight Arrow Connector 67">
+            <a:extLst>
+              <a:ext uri="{FF2B5EF4-FFF2-40B4-BE49-F238E27FC236}">
+                <a16:creationId xmlns:a16="http://schemas.microsoft.com/office/drawing/2014/main" id="{9C3340D3-65D8-B7B1-DD09-21F09F320D6E}"/>
+              </a:ext>
+            </a:extLst>
+          </p:cNvPr>
+          <p:cNvCxnSpPr>
+            <a:cxnSpLocks/>
+          </p:cNvCxnSpPr>
+          <p:nvPr/>
+        </p:nvCxnSpPr>
+        <p:spPr>
+          <a:xfrm>
+            <a:off x="4749935" y="2635878"/>
+            <a:ext cx="2454396" cy="636150"/>
+          </a:xfrm>
+          <a:prstGeom prst="straightConnector1">
+            <a:avLst/>
+          </a:prstGeom>
+          <a:ln w="38100">
+            <a:solidFill>
+              <a:schemeClr val="accent6">
+                <a:lumMod val="75000"/>
+              </a:schemeClr>
+            </a:solidFill>
+            <a:tailEnd type="triangle"/>
+          </a:ln>
+        </p:spPr>
+        <p:style>
+          <a:lnRef idx="1">
+            <a:schemeClr val="accent1"/>
+          </a:lnRef>
+          <a:fillRef idx="0">
+            <a:schemeClr val="accent1"/>
+          </a:fillRef>
+          <a:effectRef idx="0">
+            <a:schemeClr val="accent1"/>
+          </a:effectRef>
+          <a:fontRef idx="minor">
+            <a:schemeClr val="tx1"/>
+          </a:fontRef>
+        </p:style>
+      </p:cxnSp>
+      <p:cxnSp>
+        <p:nvCxnSpPr>
+          <p:cNvPr id="71" name="Straight Arrow Connector 70">
+            <a:extLst>
+              <a:ext uri="{FF2B5EF4-FFF2-40B4-BE49-F238E27FC236}">
+                <a16:creationId xmlns:a16="http://schemas.microsoft.com/office/drawing/2014/main" id="{0B7D9326-3F54-3E7E-BF8E-3540E511A40C}"/>
+              </a:ext>
+            </a:extLst>
+          </p:cNvPr>
+          <p:cNvCxnSpPr>
+            <a:cxnSpLocks/>
+          </p:cNvCxnSpPr>
+          <p:nvPr/>
+        </p:nvCxnSpPr>
+        <p:spPr>
+          <a:xfrm flipH="1">
+            <a:off x="4716401" y="3250443"/>
+            <a:ext cx="2494550" cy="483357"/>
+          </a:xfrm>
+          <a:prstGeom prst="straightConnector1">
+            <a:avLst/>
+          </a:prstGeom>
+          <a:ln w="38100">
+            <a:solidFill>
+              <a:schemeClr val="accent6">
+                <a:lumMod val="75000"/>
+              </a:schemeClr>
+            </a:solidFill>
+            <a:tailEnd type="triangle"/>
+          </a:ln>
+        </p:spPr>
+        <p:style>
+          <a:lnRef idx="1">
+            <a:schemeClr val="accent1"/>
+          </a:lnRef>
+          <a:fillRef idx="0">
+            <a:schemeClr val="accent1"/>
+          </a:fillRef>
+          <a:effectRef idx="0">
+            <a:schemeClr val="accent1"/>
+          </a:effectRef>
+          <a:fontRef idx="minor">
+            <a:schemeClr val="tx1"/>
+          </a:fontRef>
+        </p:style>
+      </p:cxnSp>
+      <p:cxnSp>
+        <p:nvCxnSpPr>
+          <p:cNvPr id="74" name="Straight Arrow Connector 73">
+            <a:extLst>
+              <a:ext uri="{FF2B5EF4-FFF2-40B4-BE49-F238E27FC236}">
+                <a16:creationId xmlns:a16="http://schemas.microsoft.com/office/drawing/2014/main" id="{E58D1D11-E373-3C50-108D-373F09D30B86}"/>
+              </a:ext>
+            </a:extLst>
+          </p:cNvPr>
+          <p:cNvCxnSpPr>
+            <a:cxnSpLocks/>
+          </p:cNvCxnSpPr>
+          <p:nvPr/>
+        </p:nvCxnSpPr>
+        <p:spPr>
+          <a:xfrm flipH="1">
+            <a:off x="4017186" y="3753270"/>
+            <a:ext cx="720541" cy="539852"/>
+          </a:xfrm>
+          <a:prstGeom prst="straightConnector1">
+            <a:avLst/>
+          </a:prstGeom>
+          <a:ln w="38100">
+            <a:solidFill>
+              <a:schemeClr val="accent6">
+                <a:lumMod val="75000"/>
+              </a:schemeClr>
+            </a:solidFill>
+            <a:tailEnd type="triangle"/>
+          </a:ln>
+        </p:spPr>
+        <p:style>
+          <a:lnRef idx="1">
+            <a:schemeClr val="accent1"/>
+          </a:lnRef>
+          <a:fillRef idx="0">
+            <a:schemeClr val="accent1"/>
+          </a:fillRef>
+          <a:effectRef idx="0">
+            <a:schemeClr val="accent1"/>
+          </a:effectRef>
+          <a:fontRef idx="minor">
+            <a:schemeClr val="tx1"/>
+          </a:fontRef>
+        </p:style>
+      </p:cxnSp>
+      <p:sp>
+        <p:nvSpPr>
+          <p:cNvPr id="77" name="AutoShape 26" descr="FreeRDP clipboard image">
+            <a:extLst>
+              <a:ext uri="{FF2B5EF4-FFF2-40B4-BE49-F238E27FC236}">
+                <a16:creationId xmlns:a16="http://schemas.microsoft.com/office/drawing/2014/main" id="{169C79B6-FEFE-9BDC-AD16-F44AF5D1577A}"/>
+              </a:ext>
+            </a:extLst>
+          </p:cNvPr>
+          <p:cNvSpPr>
+            <a:spLocks noChangeAspect="1" noChangeArrowheads="1"/>
+          </p:cNvSpPr>
+          <p:nvPr/>
+        </p:nvSpPr>
+        <p:spPr bwMode="auto">
+          <a:xfrm>
+            <a:off x="6248400" y="3581400"/>
+            <a:ext cx="304800" cy="304800"/>
+          </a:xfrm>
+          <a:prstGeom prst="rect">
+            <a:avLst/>
+          </a:prstGeom>
+          <a:noFill/>
+          <a:extLst>
+            <a:ext uri="{909E8E84-426E-40DD-AFC4-6F175D3DCCD1}">
+              <a14:hiddenFill xmlns:a14="http://schemas.microsoft.com/office/drawing/2010/main">
+                <a:solidFill>
+                  <a:srgbClr val="FFFFFF"/>
+                </a:solidFill>
+              </a14:hiddenFill>
+            </a:ext>
+          </a:extLst>
+        </p:spPr>
+        <p:txBody>
+          <a:bodyPr vert="horz" wrap="square" lIns="91440" tIns="45720" rIns="91440" bIns="45720" numCol="1" anchor="t" anchorCtr="0" compatLnSpc="1">
+            <a:prstTxWarp prst="textNoShape">
+              <a:avLst/>
+            </a:prstTxWarp>
+          </a:bodyPr>
+          <a:lstStyle/>
+          <a:p>
+            <a:endParaRPr lang="en-GB"/>
+          </a:p>
+        </p:txBody>
+      </p:sp>
+      <p:cxnSp>
+        <p:nvCxnSpPr>
+          <p:cNvPr id="78" name="Straight Arrow Connector 77">
+            <a:extLst>
+              <a:ext uri="{FF2B5EF4-FFF2-40B4-BE49-F238E27FC236}">
+                <a16:creationId xmlns:a16="http://schemas.microsoft.com/office/drawing/2014/main" id="{6C901726-5223-47B9-F2E1-F0A4268B0EDD}"/>
+              </a:ext>
+            </a:extLst>
+          </p:cNvPr>
+          <p:cNvCxnSpPr>
+            <a:cxnSpLocks/>
+          </p:cNvCxnSpPr>
+          <p:nvPr/>
+        </p:nvCxnSpPr>
+        <p:spPr>
+          <a:xfrm flipV="1">
+            <a:off x="7161847" y="3509806"/>
+            <a:ext cx="558886" cy="310519"/>
+          </a:xfrm>
+          <a:prstGeom prst="straightConnector1">
+            <a:avLst/>
+          </a:prstGeom>
+          <a:ln w="38100">
+            <a:solidFill>
+              <a:srgbClr val="FF0000"/>
+            </a:solidFill>
+            <a:headEnd type="none" w="lg" len="lg"/>
+            <a:tailEnd type="triangle" w="lg" len="lg"/>
+          </a:ln>
+        </p:spPr>
+        <p:style>
+          <a:lnRef idx="1">
+            <a:schemeClr val="accent1"/>
+          </a:lnRef>
+          <a:fillRef idx="0">
+            <a:schemeClr val="accent1"/>
+          </a:fillRef>
+          <a:effectRef idx="0">
+            <a:schemeClr val="accent1"/>
+          </a:effectRef>
+          <a:fontRef idx="minor">
+            <a:schemeClr val="tx1"/>
+          </a:fontRef>
+        </p:style>
+      </p:cxnSp>
+      <p:cxnSp>
+        <p:nvCxnSpPr>
+          <p:cNvPr id="82" name="Straight Arrow Connector 81">
+            <a:extLst>
+              <a:ext uri="{FF2B5EF4-FFF2-40B4-BE49-F238E27FC236}">
+                <a16:creationId xmlns:a16="http://schemas.microsoft.com/office/drawing/2014/main" id="{DD69E473-BBF4-5CC6-4FAE-BA46783C0E5D}"/>
+              </a:ext>
+            </a:extLst>
+          </p:cNvPr>
+          <p:cNvCxnSpPr>
+            <a:cxnSpLocks/>
+          </p:cNvCxnSpPr>
+          <p:nvPr/>
+        </p:nvCxnSpPr>
+        <p:spPr>
+          <a:xfrm flipV="1">
+            <a:off x="7217571" y="3002103"/>
+            <a:ext cx="306385" cy="245954"/>
+          </a:xfrm>
+          <a:prstGeom prst="straightConnector1">
+            <a:avLst/>
+          </a:prstGeom>
+          <a:ln w="38100">
+            <a:solidFill>
+              <a:schemeClr val="accent6">
+                <a:lumMod val="75000"/>
+              </a:schemeClr>
+            </a:solidFill>
+            <a:tailEnd type="triangle"/>
+          </a:ln>
+        </p:spPr>
+        <p:style>
+          <a:lnRef idx="1">
+            <a:schemeClr val="accent1"/>
+          </a:lnRef>
+          <a:fillRef idx="0">
+            <a:schemeClr val="accent1"/>
+          </a:fillRef>
+          <a:effectRef idx="0">
+            <a:schemeClr val="accent1"/>
+          </a:effectRef>
+          <a:fontRef idx="minor">
+            <a:schemeClr val="tx1"/>
+          </a:fontRef>
+        </p:style>
+      </p:cxnSp>
+    </p:spTree>
+    <p:extLst>
+      <p:ext uri="{BB962C8B-B14F-4D97-AF65-F5344CB8AC3E}">
+        <p14:creationId xmlns:p14="http://schemas.microsoft.com/office/powerpoint/2010/main" val="1340147092"/>
+      </p:ext>
+    </p:extLst>
+  </p:cSld>
+  <p:clrMapOvr>
+    <a:masterClrMapping/>
+  </p:clrMapOvr>
+</p:sld>
+</file>
+
+<file path=ppt/slides/slide6.xml><?xml version="1.0" encoding="utf-8"?>
+<p:sld xmlns:a="http://schemas.openxmlformats.org/drawingml/2006/main" xmlns:r="http://schemas.openxmlformats.org/officeDocument/2006/relationships" xmlns:p="http://schemas.openxmlformats.org/presentationml/2006/main">
+  <p:cSld>
+    <p:spTree>
+      <p:nvGrpSpPr>
+        <p:cNvPr id="1" name=""/>
+        <p:cNvGrpSpPr/>
+        <p:nvPr/>
+      </p:nvGrpSpPr>
+      <p:grpSpPr>
+        <a:xfrm>
+          <a:off x="0" y="0"/>
+          <a:ext cx="0" cy="0"/>
+          <a:chOff x="0" y="0"/>
+          <a:chExt cx="0" cy="0"/>
+        </a:xfrm>
+      </p:grpSpPr>
+      <p:sp>
+        <p:nvSpPr>
           <p:cNvPr id="75" name="Rectangle 74">
             <a:extLst>
               <a:ext uri="{FF2B5EF4-FFF2-40B4-BE49-F238E27FC236}">
@@ -13348,7 +15672,5952 @@
 </p:sld>
 </file>
 
-<file path=ppt/slides/slide6.xml><?xml version="1.0" encoding="utf-8"?>
+<file path=ppt/slides/slide7.xml><?xml version="1.0" encoding="utf-8"?>
+<p:sld xmlns:a="http://schemas.openxmlformats.org/drawingml/2006/main" xmlns:r="http://schemas.openxmlformats.org/officeDocument/2006/relationships" xmlns:p="http://schemas.openxmlformats.org/presentationml/2006/main">
+  <p:cSld>
+    <p:spTree>
+      <p:nvGrpSpPr>
+        <p:cNvPr id="1" name=""/>
+        <p:cNvGrpSpPr/>
+        <p:nvPr/>
+      </p:nvGrpSpPr>
+      <p:grpSpPr>
+        <a:xfrm>
+          <a:off x="0" y="0"/>
+          <a:ext cx="0" cy="0"/>
+          <a:chOff x="0" y="0"/>
+          <a:chExt cx="0" cy="0"/>
+        </a:xfrm>
+      </p:grpSpPr>
+      <p:sp>
+        <p:nvSpPr>
+          <p:cNvPr id="75" name="Rectangle 74">
+            <a:extLst>
+              <a:ext uri="{FF2B5EF4-FFF2-40B4-BE49-F238E27FC236}">
+                <a16:creationId xmlns:a16="http://schemas.microsoft.com/office/drawing/2014/main" id="{1D50B3AA-7ED8-E120-77C2-838ABCD76D8C}"/>
+              </a:ext>
+            </a:extLst>
+          </p:cNvPr>
+          <p:cNvSpPr/>
+          <p:nvPr/>
+        </p:nvSpPr>
+        <p:spPr>
+          <a:xfrm>
+            <a:off x="9894050" y="22881"/>
+            <a:ext cx="2259562" cy="6669741"/>
+          </a:xfrm>
+          <a:prstGeom prst="rect">
+            <a:avLst/>
+          </a:prstGeom>
+          <a:gradFill flip="none" rotWithShape="1">
+            <a:gsLst>
+              <a:gs pos="0">
+                <a:schemeClr val="accent1">
+                  <a:lumMod val="5000"/>
+                  <a:lumOff val="95000"/>
+                </a:schemeClr>
+              </a:gs>
+              <a:gs pos="74000">
+                <a:schemeClr val="accent1">
+                  <a:lumMod val="45000"/>
+                  <a:lumOff val="55000"/>
+                </a:schemeClr>
+              </a:gs>
+              <a:gs pos="83000">
+                <a:schemeClr val="accent1">
+                  <a:lumMod val="45000"/>
+                  <a:lumOff val="55000"/>
+                </a:schemeClr>
+              </a:gs>
+              <a:gs pos="100000">
+                <a:schemeClr val="accent1">
+                  <a:lumMod val="30000"/>
+                  <a:lumOff val="70000"/>
+                </a:schemeClr>
+              </a:gs>
+            </a:gsLst>
+            <a:lin ang="10800000" scaled="1"/>
+            <a:tileRect/>
+          </a:gradFill>
+        </p:spPr>
+        <p:style>
+          <a:lnRef idx="2">
+            <a:schemeClr val="accent1">
+              <a:shade val="15000"/>
+            </a:schemeClr>
+          </a:lnRef>
+          <a:fillRef idx="1">
+            <a:schemeClr val="accent1"/>
+          </a:fillRef>
+          <a:effectRef idx="0">
+            <a:schemeClr val="accent1"/>
+          </a:effectRef>
+          <a:fontRef idx="minor">
+            <a:schemeClr val="lt1"/>
+          </a:fontRef>
+        </p:style>
+        <p:txBody>
+          <a:bodyPr rtlCol="0" anchor="ctr"/>
+          <a:lstStyle/>
+          <a:p>
+            <a:pPr algn="ctr"/>
+            <a:endParaRPr lang="en-GB"/>
+          </a:p>
+        </p:txBody>
+      </p:sp>
+      <p:sp>
+        <p:nvSpPr>
+          <p:cNvPr id="65" name="Rectangle 64">
+            <a:extLst>
+              <a:ext uri="{FF2B5EF4-FFF2-40B4-BE49-F238E27FC236}">
+                <a16:creationId xmlns:a16="http://schemas.microsoft.com/office/drawing/2014/main" id="{485D7D2E-8C49-3773-5CA9-FEF5970BAF82}"/>
+              </a:ext>
+            </a:extLst>
+          </p:cNvPr>
+          <p:cNvSpPr/>
+          <p:nvPr/>
+        </p:nvSpPr>
+        <p:spPr>
+          <a:xfrm>
+            <a:off x="2077871" y="31036"/>
+            <a:ext cx="7816179" cy="6669741"/>
+          </a:xfrm>
+          <a:prstGeom prst="rect">
+            <a:avLst/>
+          </a:prstGeom>
+          <a:solidFill>
+            <a:schemeClr val="accent3">
+              <a:lumMod val="20000"/>
+              <a:lumOff val="80000"/>
+            </a:schemeClr>
+          </a:solidFill>
+        </p:spPr>
+        <p:style>
+          <a:lnRef idx="2">
+            <a:schemeClr val="accent1">
+              <a:shade val="15000"/>
+            </a:schemeClr>
+          </a:lnRef>
+          <a:fillRef idx="1">
+            <a:schemeClr val="accent1"/>
+          </a:fillRef>
+          <a:effectRef idx="0">
+            <a:schemeClr val="accent1"/>
+          </a:effectRef>
+          <a:fontRef idx="minor">
+            <a:schemeClr val="lt1"/>
+          </a:fontRef>
+        </p:style>
+        <p:txBody>
+          <a:bodyPr rtlCol="0" anchor="ctr"/>
+          <a:lstStyle/>
+          <a:p>
+            <a:pPr algn="ctr"/>
+            <a:endParaRPr lang="en-GB"/>
+          </a:p>
+        </p:txBody>
+      </p:sp>
+      <p:sp>
+        <p:nvSpPr>
+          <p:cNvPr id="64" name="Rectangle 63">
+            <a:extLst>
+              <a:ext uri="{FF2B5EF4-FFF2-40B4-BE49-F238E27FC236}">
+                <a16:creationId xmlns:a16="http://schemas.microsoft.com/office/drawing/2014/main" id="{90EF3FE8-5CEF-AA67-6E10-E3DF48671609}"/>
+              </a:ext>
+            </a:extLst>
+          </p:cNvPr>
+          <p:cNvSpPr/>
+          <p:nvPr/>
+        </p:nvSpPr>
+        <p:spPr>
+          <a:xfrm>
+            <a:off x="-58812" y="22882"/>
+            <a:ext cx="2129658" cy="6669741"/>
+          </a:xfrm>
+          <a:prstGeom prst="rect">
+            <a:avLst/>
+          </a:prstGeom>
+          <a:gradFill>
+            <a:gsLst>
+              <a:gs pos="0">
+                <a:schemeClr val="accent1">
+                  <a:lumMod val="5000"/>
+                  <a:lumOff val="95000"/>
+                </a:schemeClr>
+              </a:gs>
+              <a:gs pos="74000">
+                <a:schemeClr val="accent1">
+                  <a:lumMod val="45000"/>
+                  <a:lumOff val="55000"/>
+                </a:schemeClr>
+              </a:gs>
+              <a:gs pos="83000">
+                <a:schemeClr val="accent1">
+                  <a:lumMod val="45000"/>
+                  <a:lumOff val="55000"/>
+                </a:schemeClr>
+              </a:gs>
+              <a:gs pos="100000">
+                <a:schemeClr val="accent1">
+                  <a:lumMod val="30000"/>
+                  <a:lumOff val="70000"/>
+                </a:schemeClr>
+              </a:gs>
+            </a:gsLst>
+            <a:lin ang="10800000" scaled="1"/>
+          </a:gradFill>
+        </p:spPr>
+        <p:style>
+          <a:lnRef idx="2">
+            <a:schemeClr val="accent1">
+              <a:shade val="15000"/>
+            </a:schemeClr>
+          </a:lnRef>
+          <a:fillRef idx="1">
+            <a:schemeClr val="accent1"/>
+          </a:fillRef>
+          <a:effectRef idx="0">
+            <a:schemeClr val="accent1"/>
+          </a:effectRef>
+          <a:fontRef idx="minor">
+            <a:schemeClr val="lt1"/>
+          </a:fontRef>
+        </p:style>
+        <p:txBody>
+          <a:bodyPr rtlCol="0" anchor="ctr"/>
+          <a:lstStyle/>
+          <a:p>
+            <a:pPr algn="ctr"/>
+            <a:endParaRPr lang="en-GB" dirty="0"/>
+          </a:p>
+        </p:txBody>
+      </p:sp>
+      <p:cxnSp>
+        <p:nvCxnSpPr>
+          <p:cNvPr id="5" name="Straight Arrow Connector 4">
+            <a:extLst>
+              <a:ext uri="{FF2B5EF4-FFF2-40B4-BE49-F238E27FC236}">
+                <a16:creationId xmlns:a16="http://schemas.microsoft.com/office/drawing/2014/main" id="{C9E31A86-FF4C-FB3B-F7F9-1BE9FD473187}"/>
+              </a:ext>
+            </a:extLst>
+          </p:cNvPr>
+          <p:cNvCxnSpPr>
+            <a:cxnSpLocks/>
+          </p:cNvCxnSpPr>
+          <p:nvPr/>
+        </p:nvCxnSpPr>
+        <p:spPr>
+          <a:xfrm flipH="1">
+            <a:off x="2070847" y="0"/>
+            <a:ext cx="7024" cy="6669741"/>
+          </a:xfrm>
+          <a:prstGeom prst="straightConnector1">
+            <a:avLst/>
+          </a:prstGeom>
+          <a:ln w="25400">
+            <a:solidFill>
+              <a:schemeClr val="tx1"/>
+            </a:solidFill>
+            <a:headEnd type="triangle" w="lg" len="lg"/>
+            <a:tailEnd type="none"/>
+          </a:ln>
+        </p:spPr>
+        <p:style>
+          <a:lnRef idx="1">
+            <a:schemeClr val="accent1"/>
+          </a:lnRef>
+          <a:fillRef idx="0">
+            <a:schemeClr val="accent1"/>
+          </a:fillRef>
+          <a:effectRef idx="0">
+            <a:schemeClr val="accent1"/>
+          </a:effectRef>
+          <a:fontRef idx="minor">
+            <a:schemeClr val="tx1"/>
+          </a:fontRef>
+        </p:style>
+      </p:cxnSp>
+      <p:cxnSp>
+        <p:nvCxnSpPr>
+          <p:cNvPr id="6" name="Straight Arrow Connector 5">
+            <a:extLst>
+              <a:ext uri="{FF2B5EF4-FFF2-40B4-BE49-F238E27FC236}">
+                <a16:creationId xmlns:a16="http://schemas.microsoft.com/office/drawing/2014/main" id="{5FD7F144-C7A8-1F9C-13EE-6C0BFDACE58B}"/>
+              </a:ext>
+            </a:extLst>
+          </p:cNvPr>
+          <p:cNvCxnSpPr>
+            <a:cxnSpLocks/>
+          </p:cNvCxnSpPr>
+          <p:nvPr/>
+        </p:nvCxnSpPr>
+        <p:spPr>
+          <a:xfrm flipH="1">
+            <a:off x="1154545" y="3429000"/>
+            <a:ext cx="10806546" cy="0"/>
+          </a:xfrm>
+          <a:prstGeom prst="straightConnector1">
+            <a:avLst/>
+          </a:prstGeom>
+          <a:ln w="25400">
+            <a:solidFill>
+              <a:schemeClr val="tx1"/>
+            </a:solidFill>
+            <a:headEnd type="triangle" w="lg" len="lg"/>
+            <a:tailEnd type="none"/>
+          </a:ln>
+        </p:spPr>
+        <p:style>
+          <a:lnRef idx="1">
+            <a:schemeClr val="accent1"/>
+          </a:lnRef>
+          <a:fillRef idx="0">
+            <a:schemeClr val="accent1"/>
+          </a:fillRef>
+          <a:effectRef idx="0">
+            <a:schemeClr val="accent1"/>
+          </a:effectRef>
+          <a:fontRef idx="minor">
+            <a:schemeClr val="tx1"/>
+          </a:fontRef>
+        </p:style>
+      </p:cxnSp>
+      <p:sp>
+        <p:nvSpPr>
+          <p:cNvPr id="9" name="TextBox 8">
+            <a:extLst>
+              <a:ext uri="{FF2B5EF4-FFF2-40B4-BE49-F238E27FC236}">
+                <a16:creationId xmlns:a16="http://schemas.microsoft.com/office/drawing/2014/main" id="{F99B3354-18F4-55E1-ECB2-1B34590A86D3}"/>
+              </a:ext>
+            </a:extLst>
+          </p:cNvPr>
+          <p:cNvSpPr txBox="1"/>
+          <p:nvPr/>
+        </p:nvSpPr>
+        <p:spPr>
+          <a:xfrm>
+            <a:off x="2070847" y="233082"/>
+            <a:ext cx="304892" cy="369332"/>
+          </a:xfrm>
+          <a:prstGeom prst="rect">
+            <a:avLst/>
+          </a:prstGeom>
+          <a:noFill/>
+        </p:spPr>
+        <p:txBody>
+          <a:bodyPr wrap="none" rtlCol="0">
+            <a:spAutoFit/>
+          </a:bodyPr>
+          <a:lstStyle/>
+          <a:p>
+            <a:r>
+              <a:rPr lang="en-GB" dirty="0"/>
+              <a:t>X</a:t>
+            </a:r>
+          </a:p>
+        </p:txBody>
+      </p:sp>
+      <p:sp>
+        <p:nvSpPr>
+          <p:cNvPr id="12" name="TextBox 11">
+            <a:extLst>
+              <a:ext uri="{FF2B5EF4-FFF2-40B4-BE49-F238E27FC236}">
+                <a16:creationId xmlns:a16="http://schemas.microsoft.com/office/drawing/2014/main" id="{F9DF2681-BA7D-1C14-54DA-186B2A9D0A07}"/>
+              </a:ext>
+            </a:extLst>
+          </p:cNvPr>
+          <p:cNvSpPr txBox="1"/>
+          <p:nvPr/>
+        </p:nvSpPr>
+        <p:spPr>
+          <a:xfrm>
+            <a:off x="11702475" y="3451411"/>
+            <a:ext cx="258616" cy="369332"/>
+          </a:xfrm>
+          <a:prstGeom prst="rect">
+            <a:avLst/>
+          </a:prstGeom>
+          <a:noFill/>
+        </p:spPr>
+        <p:txBody>
+          <a:bodyPr wrap="square">
+            <a:spAutoFit/>
+          </a:bodyPr>
+          <a:lstStyle/>
+          <a:p>
+            <a:r>
+              <a:rPr lang="en-GB" dirty="0"/>
+              <a:t>Z</a:t>
+            </a:r>
+          </a:p>
+        </p:txBody>
+      </p:sp>
+      <p:grpSp>
+        <p:nvGrpSpPr>
+          <p:cNvPr id="18" name="Group 17">
+            <a:extLst>
+              <a:ext uri="{FF2B5EF4-FFF2-40B4-BE49-F238E27FC236}">
+                <a16:creationId xmlns:a16="http://schemas.microsoft.com/office/drawing/2014/main" id="{C7E0AC6C-C926-CA13-BAC7-0CD0BD7F0015}"/>
+              </a:ext>
+            </a:extLst>
+          </p:cNvPr>
+          <p:cNvGrpSpPr/>
+          <p:nvPr/>
+        </p:nvGrpSpPr>
+        <p:grpSpPr>
+          <a:xfrm rot="17643515">
+            <a:off x="-357231" y="5026459"/>
+            <a:ext cx="3449781" cy="0"/>
+            <a:chOff x="5273964" y="4692073"/>
+            <a:chExt cx="3449781" cy="0"/>
+          </a:xfrm>
+        </p:grpSpPr>
+        <p:cxnSp>
+          <p:nvCxnSpPr>
+            <p:cNvPr id="16" name="Straight Arrow Connector 15">
+              <a:extLst>
+                <a:ext uri="{FF2B5EF4-FFF2-40B4-BE49-F238E27FC236}">
+                  <a16:creationId xmlns:a16="http://schemas.microsoft.com/office/drawing/2014/main" id="{C85AAC02-A75F-F8C3-CD6E-883B10174F64}"/>
+                </a:ext>
+              </a:extLst>
+            </p:cNvPr>
+            <p:cNvCxnSpPr/>
+            <p:nvPr/>
+          </p:nvCxnSpPr>
+          <p:spPr>
+            <a:xfrm>
+              <a:off x="5273964" y="4692073"/>
+              <a:ext cx="1764145" cy="0"/>
+            </a:xfrm>
+            <a:prstGeom prst="straightConnector1">
+              <a:avLst/>
+            </a:prstGeom>
+            <a:ln w="47625">
+              <a:tailEnd type="triangle"/>
+            </a:ln>
+          </p:spPr>
+          <p:style>
+            <a:lnRef idx="1">
+              <a:schemeClr val="accent1"/>
+            </a:lnRef>
+            <a:fillRef idx="0">
+              <a:schemeClr val="accent1"/>
+            </a:fillRef>
+            <a:effectRef idx="0">
+              <a:schemeClr val="accent1"/>
+            </a:effectRef>
+            <a:fontRef idx="minor">
+              <a:schemeClr val="tx1"/>
+            </a:fontRef>
+          </p:style>
+        </p:cxnSp>
+        <p:cxnSp>
+          <p:nvCxnSpPr>
+            <p:cNvPr id="17" name="Straight Arrow Connector 16">
+              <a:extLst>
+                <a:ext uri="{FF2B5EF4-FFF2-40B4-BE49-F238E27FC236}">
+                  <a16:creationId xmlns:a16="http://schemas.microsoft.com/office/drawing/2014/main" id="{2D7789A1-90D2-4C74-0971-F03AAE4A122D}"/>
+                </a:ext>
+              </a:extLst>
+            </p:cNvPr>
+            <p:cNvCxnSpPr/>
+            <p:nvPr/>
+          </p:nvCxnSpPr>
+          <p:spPr>
+            <a:xfrm>
+              <a:off x="6959600" y="4692073"/>
+              <a:ext cx="1764145" cy="0"/>
+            </a:xfrm>
+            <a:prstGeom prst="straightConnector1">
+              <a:avLst/>
+            </a:prstGeom>
+            <a:ln w="47625">
+              <a:tailEnd type="none"/>
+            </a:ln>
+          </p:spPr>
+          <p:style>
+            <a:lnRef idx="1">
+              <a:schemeClr val="accent1"/>
+            </a:lnRef>
+            <a:fillRef idx="0">
+              <a:schemeClr val="accent1"/>
+            </a:fillRef>
+            <a:effectRef idx="0">
+              <a:schemeClr val="accent1"/>
+            </a:effectRef>
+            <a:fontRef idx="minor">
+              <a:schemeClr val="tx1"/>
+            </a:fontRef>
+          </p:style>
+        </p:cxnSp>
+      </p:grpSp>
+      <p:grpSp>
+        <p:nvGrpSpPr>
+          <p:cNvPr id="19" name="Group 18">
+            <a:extLst>
+              <a:ext uri="{FF2B5EF4-FFF2-40B4-BE49-F238E27FC236}">
+                <a16:creationId xmlns:a16="http://schemas.microsoft.com/office/drawing/2014/main" id="{3672E67E-4B4C-8125-7F7E-5A6880CCDB58}"/>
+              </a:ext>
+            </a:extLst>
+          </p:cNvPr>
+          <p:cNvGrpSpPr/>
+          <p:nvPr/>
+        </p:nvGrpSpPr>
+        <p:grpSpPr>
+          <a:xfrm rot="14737700">
+            <a:off x="281599" y="2197739"/>
+            <a:ext cx="2591698" cy="113653"/>
+            <a:chOff x="5273964" y="4692073"/>
+            <a:chExt cx="3449781" cy="0"/>
+          </a:xfrm>
+        </p:grpSpPr>
+        <p:cxnSp>
+          <p:nvCxnSpPr>
+            <p:cNvPr id="20" name="Straight Arrow Connector 19">
+              <a:extLst>
+                <a:ext uri="{FF2B5EF4-FFF2-40B4-BE49-F238E27FC236}">
+                  <a16:creationId xmlns:a16="http://schemas.microsoft.com/office/drawing/2014/main" id="{30E9312A-D926-215E-26C1-E7AD9E9B8C46}"/>
+                </a:ext>
+              </a:extLst>
+            </p:cNvPr>
+            <p:cNvCxnSpPr/>
+            <p:nvPr/>
+          </p:nvCxnSpPr>
+          <p:spPr>
+            <a:xfrm>
+              <a:off x="5273964" y="4692073"/>
+              <a:ext cx="1764145" cy="0"/>
+            </a:xfrm>
+            <a:prstGeom prst="straightConnector1">
+              <a:avLst/>
+            </a:prstGeom>
+            <a:ln w="47625">
+              <a:solidFill>
+                <a:schemeClr val="accent6">
+                  <a:lumMod val="75000"/>
+                </a:schemeClr>
+              </a:solidFill>
+              <a:tailEnd type="triangle"/>
+            </a:ln>
+          </p:spPr>
+          <p:style>
+            <a:lnRef idx="1">
+              <a:schemeClr val="accent1"/>
+            </a:lnRef>
+            <a:fillRef idx="0">
+              <a:schemeClr val="accent1"/>
+            </a:fillRef>
+            <a:effectRef idx="0">
+              <a:schemeClr val="accent1"/>
+            </a:effectRef>
+            <a:fontRef idx="minor">
+              <a:schemeClr val="tx1"/>
+            </a:fontRef>
+          </p:style>
+        </p:cxnSp>
+        <p:cxnSp>
+          <p:nvCxnSpPr>
+            <p:cNvPr id="21" name="Straight Arrow Connector 20">
+              <a:extLst>
+                <a:ext uri="{FF2B5EF4-FFF2-40B4-BE49-F238E27FC236}">
+                  <a16:creationId xmlns:a16="http://schemas.microsoft.com/office/drawing/2014/main" id="{45CC7A0E-A0A2-BD9A-DD21-27E1C94D57D4}"/>
+                </a:ext>
+              </a:extLst>
+            </p:cNvPr>
+            <p:cNvCxnSpPr/>
+            <p:nvPr/>
+          </p:nvCxnSpPr>
+          <p:spPr>
+            <a:xfrm>
+              <a:off x="6959600" y="4692073"/>
+              <a:ext cx="1764145" cy="0"/>
+            </a:xfrm>
+            <a:prstGeom prst="straightConnector1">
+              <a:avLst/>
+            </a:prstGeom>
+            <a:ln w="47625">
+              <a:solidFill>
+                <a:schemeClr val="accent6">
+                  <a:lumMod val="75000"/>
+                </a:schemeClr>
+              </a:solidFill>
+              <a:tailEnd type="none"/>
+            </a:ln>
+          </p:spPr>
+          <p:style>
+            <a:lnRef idx="1">
+              <a:schemeClr val="accent1"/>
+            </a:lnRef>
+            <a:fillRef idx="0">
+              <a:schemeClr val="accent1"/>
+            </a:fillRef>
+            <a:effectRef idx="0">
+              <a:schemeClr val="accent1"/>
+            </a:effectRef>
+            <a:fontRef idx="minor">
+              <a:schemeClr val="tx1"/>
+            </a:fontRef>
+          </p:style>
+        </p:cxnSp>
+      </p:grpSp>
+      <p:sp>
+        <p:nvSpPr>
+          <p:cNvPr id="23" name="TextBox 22">
+            <a:extLst>
+              <a:ext uri="{FF2B5EF4-FFF2-40B4-BE49-F238E27FC236}">
+                <a16:creationId xmlns:a16="http://schemas.microsoft.com/office/drawing/2014/main" id="{7A509DB2-CDEE-53BA-9BB5-DACCF3D2C39E}"/>
+              </a:ext>
+            </a:extLst>
+          </p:cNvPr>
+          <p:cNvSpPr txBox="1"/>
+          <p:nvPr/>
+        </p:nvSpPr>
+        <p:spPr>
+          <a:xfrm rot="17645088">
+            <a:off x="590733" y="5862350"/>
+            <a:ext cx="1015996" cy="369332"/>
+          </a:xfrm>
+          <a:prstGeom prst="rect">
+            <a:avLst/>
+          </a:prstGeom>
+          <a:noFill/>
+        </p:spPr>
+        <p:txBody>
+          <a:bodyPr wrap="square">
+            <a:spAutoFit/>
+          </a:bodyPr>
+          <a:lstStyle/>
+          <a:p>
+            <a:r>
+              <a:rPr lang="en-GB" dirty="0"/>
+              <a:t>Incident</a:t>
+            </a:r>
+          </a:p>
+        </p:txBody>
+      </p:sp>
+      <p:sp>
+        <p:nvSpPr>
+          <p:cNvPr id="24" name="TextBox 23">
+            <a:extLst>
+              <a:ext uri="{FF2B5EF4-FFF2-40B4-BE49-F238E27FC236}">
+                <a16:creationId xmlns:a16="http://schemas.microsoft.com/office/drawing/2014/main" id="{D4AE5EBC-B37A-CF35-B2FB-156EB38C2C8D}"/>
+              </a:ext>
+            </a:extLst>
+          </p:cNvPr>
+          <p:cNvSpPr txBox="1"/>
+          <p:nvPr/>
+        </p:nvSpPr>
+        <p:spPr>
+          <a:xfrm rot="3901637">
+            <a:off x="559418" y="1091227"/>
+            <a:ext cx="1563830" cy="369332"/>
+          </a:xfrm>
+          <a:prstGeom prst="rect">
+            <a:avLst/>
+          </a:prstGeom>
+          <a:noFill/>
+        </p:spPr>
+        <p:txBody>
+          <a:bodyPr wrap="square">
+            <a:spAutoFit/>
+          </a:bodyPr>
+          <a:lstStyle/>
+          <a:p>
+            <a:r>
+              <a:rPr lang="en-GB" dirty="0"/>
+              <a:t>Scattered back</a:t>
+            </a:r>
+          </a:p>
+        </p:txBody>
+      </p:sp>
+      <p:cxnSp>
+        <p:nvCxnSpPr>
+          <p:cNvPr id="25" name="Straight Arrow Connector 24">
+            <a:extLst>
+              <a:ext uri="{FF2B5EF4-FFF2-40B4-BE49-F238E27FC236}">
+                <a16:creationId xmlns:a16="http://schemas.microsoft.com/office/drawing/2014/main" id="{DC9EAD7E-688C-4E6E-E315-33285CC58009}"/>
+              </a:ext>
+            </a:extLst>
+          </p:cNvPr>
+          <p:cNvCxnSpPr>
+            <a:cxnSpLocks/>
+          </p:cNvCxnSpPr>
+          <p:nvPr/>
+        </p:nvCxnSpPr>
+        <p:spPr>
+          <a:xfrm>
+            <a:off x="3156119" y="31036"/>
+            <a:ext cx="0" cy="6634084"/>
+          </a:xfrm>
+          <a:prstGeom prst="straightConnector1">
+            <a:avLst/>
+          </a:prstGeom>
+          <a:ln w="25400">
+            <a:solidFill>
+              <a:schemeClr val="tx1"/>
+            </a:solidFill>
+            <a:prstDash val="sysDot"/>
+            <a:headEnd type="none" w="lg" len="lg"/>
+            <a:tailEnd type="none"/>
+          </a:ln>
+        </p:spPr>
+        <p:style>
+          <a:lnRef idx="1">
+            <a:schemeClr val="accent1"/>
+          </a:lnRef>
+          <a:fillRef idx="0">
+            <a:schemeClr val="accent1"/>
+          </a:fillRef>
+          <a:effectRef idx="0">
+            <a:schemeClr val="accent1"/>
+          </a:effectRef>
+          <a:fontRef idx="minor">
+            <a:schemeClr val="tx1"/>
+          </a:fontRef>
+        </p:style>
+      </p:cxnSp>
+      <p:cxnSp>
+        <p:nvCxnSpPr>
+          <p:cNvPr id="27" name="Straight Arrow Connector 26">
+            <a:extLst>
+              <a:ext uri="{FF2B5EF4-FFF2-40B4-BE49-F238E27FC236}">
+                <a16:creationId xmlns:a16="http://schemas.microsoft.com/office/drawing/2014/main" id="{A8B4FA56-F20E-DE47-A4E5-F5A0DAF5912C}"/>
+              </a:ext>
+            </a:extLst>
+          </p:cNvPr>
+          <p:cNvCxnSpPr>
+            <a:cxnSpLocks/>
+          </p:cNvCxnSpPr>
+          <p:nvPr/>
+        </p:nvCxnSpPr>
+        <p:spPr>
+          <a:xfrm>
+            <a:off x="4269111" y="31036"/>
+            <a:ext cx="0" cy="6663780"/>
+          </a:xfrm>
+          <a:prstGeom prst="straightConnector1">
+            <a:avLst/>
+          </a:prstGeom>
+          <a:ln w="25400">
+            <a:solidFill>
+              <a:schemeClr val="tx1"/>
+            </a:solidFill>
+            <a:prstDash val="sysDot"/>
+            <a:headEnd type="none" w="lg" len="lg"/>
+            <a:tailEnd type="none"/>
+          </a:ln>
+        </p:spPr>
+        <p:style>
+          <a:lnRef idx="1">
+            <a:schemeClr val="accent1"/>
+          </a:lnRef>
+          <a:fillRef idx="0">
+            <a:schemeClr val="accent1"/>
+          </a:fillRef>
+          <a:effectRef idx="0">
+            <a:schemeClr val="accent1"/>
+          </a:effectRef>
+          <a:fontRef idx="minor">
+            <a:schemeClr val="tx1"/>
+          </a:fontRef>
+        </p:style>
+      </p:cxnSp>
+      <p:cxnSp>
+        <p:nvCxnSpPr>
+          <p:cNvPr id="28" name="Straight Arrow Connector 27">
+            <a:extLst>
+              <a:ext uri="{FF2B5EF4-FFF2-40B4-BE49-F238E27FC236}">
+                <a16:creationId xmlns:a16="http://schemas.microsoft.com/office/drawing/2014/main" id="{D4D6FE18-6D56-D177-F067-ADBD61B41D3D}"/>
+              </a:ext>
+            </a:extLst>
+          </p:cNvPr>
+          <p:cNvCxnSpPr>
+            <a:cxnSpLocks/>
+          </p:cNvCxnSpPr>
+          <p:nvPr/>
+        </p:nvCxnSpPr>
+        <p:spPr>
+          <a:xfrm>
+            <a:off x="4994163" y="31036"/>
+            <a:ext cx="0" cy="6634084"/>
+          </a:xfrm>
+          <a:prstGeom prst="straightConnector1">
+            <a:avLst/>
+          </a:prstGeom>
+          <a:ln w="25400">
+            <a:solidFill>
+              <a:schemeClr val="tx1"/>
+            </a:solidFill>
+            <a:prstDash val="sysDot"/>
+            <a:headEnd type="none" w="lg" len="lg"/>
+            <a:tailEnd type="none"/>
+          </a:ln>
+        </p:spPr>
+        <p:style>
+          <a:lnRef idx="1">
+            <a:schemeClr val="accent1"/>
+          </a:lnRef>
+          <a:fillRef idx="0">
+            <a:schemeClr val="accent1"/>
+          </a:fillRef>
+          <a:effectRef idx="0">
+            <a:schemeClr val="accent1"/>
+          </a:effectRef>
+          <a:fontRef idx="minor">
+            <a:schemeClr val="tx1"/>
+          </a:fontRef>
+        </p:style>
+      </p:cxnSp>
+      <p:cxnSp>
+        <p:nvCxnSpPr>
+          <p:cNvPr id="29" name="Straight Arrow Connector 28">
+            <a:extLst>
+              <a:ext uri="{FF2B5EF4-FFF2-40B4-BE49-F238E27FC236}">
+                <a16:creationId xmlns:a16="http://schemas.microsoft.com/office/drawing/2014/main" id="{5018B095-D0AC-31F6-57B4-1BCEEDD126D0}"/>
+              </a:ext>
+            </a:extLst>
+          </p:cNvPr>
+          <p:cNvCxnSpPr>
+            <a:cxnSpLocks/>
+          </p:cNvCxnSpPr>
+          <p:nvPr/>
+        </p:nvCxnSpPr>
+        <p:spPr>
+          <a:xfrm flipH="1">
+            <a:off x="6088671" y="31036"/>
+            <a:ext cx="7329" cy="6663780"/>
+          </a:xfrm>
+          <a:prstGeom prst="straightConnector1">
+            <a:avLst/>
+          </a:prstGeom>
+          <a:ln w="25400">
+            <a:solidFill>
+              <a:schemeClr val="tx1"/>
+            </a:solidFill>
+            <a:prstDash val="sysDot"/>
+            <a:headEnd type="none" w="lg" len="lg"/>
+            <a:tailEnd type="none"/>
+          </a:ln>
+        </p:spPr>
+        <p:style>
+          <a:lnRef idx="1">
+            <a:schemeClr val="accent1"/>
+          </a:lnRef>
+          <a:fillRef idx="0">
+            <a:schemeClr val="accent1"/>
+          </a:fillRef>
+          <a:effectRef idx="0">
+            <a:schemeClr val="accent1"/>
+          </a:effectRef>
+          <a:fontRef idx="minor">
+            <a:schemeClr val="tx1"/>
+          </a:fontRef>
+        </p:style>
+      </p:cxnSp>
+      <p:cxnSp>
+        <p:nvCxnSpPr>
+          <p:cNvPr id="30" name="Straight Arrow Connector 29">
+            <a:extLst>
+              <a:ext uri="{FF2B5EF4-FFF2-40B4-BE49-F238E27FC236}">
+                <a16:creationId xmlns:a16="http://schemas.microsoft.com/office/drawing/2014/main" id="{B63824F2-F061-21A7-FA9F-5213FC27B5BF}"/>
+              </a:ext>
+            </a:extLst>
+          </p:cNvPr>
+          <p:cNvCxnSpPr>
+            <a:cxnSpLocks/>
+          </p:cNvCxnSpPr>
+          <p:nvPr/>
+        </p:nvCxnSpPr>
+        <p:spPr>
+          <a:xfrm>
+            <a:off x="7118526" y="31036"/>
+            <a:ext cx="0" cy="6634084"/>
+          </a:xfrm>
+          <a:prstGeom prst="straightConnector1">
+            <a:avLst/>
+          </a:prstGeom>
+          <a:ln w="25400">
+            <a:solidFill>
+              <a:schemeClr val="tx1"/>
+            </a:solidFill>
+            <a:prstDash val="sysDot"/>
+            <a:headEnd type="none" w="lg" len="lg"/>
+            <a:tailEnd type="none"/>
+          </a:ln>
+        </p:spPr>
+        <p:style>
+          <a:lnRef idx="1">
+            <a:schemeClr val="accent1"/>
+          </a:lnRef>
+          <a:fillRef idx="0">
+            <a:schemeClr val="accent1"/>
+          </a:fillRef>
+          <a:effectRef idx="0">
+            <a:schemeClr val="accent1"/>
+          </a:effectRef>
+          <a:fontRef idx="minor">
+            <a:schemeClr val="tx1"/>
+          </a:fontRef>
+        </p:style>
+      </p:cxnSp>
+      <p:cxnSp>
+        <p:nvCxnSpPr>
+          <p:cNvPr id="31" name="Straight Arrow Connector 30">
+            <a:extLst>
+              <a:ext uri="{FF2B5EF4-FFF2-40B4-BE49-F238E27FC236}">
+                <a16:creationId xmlns:a16="http://schemas.microsoft.com/office/drawing/2014/main" id="{DA73F99C-BC1A-CF63-CDDC-29CC50829CCD}"/>
+              </a:ext>
+            </a:extLst>
+          </p:cNvPr>
+          <p:cNvCxnSpPr>
+            <a:cxnSpLocks/>
+          </p:cNvCxnSpPr>
+          <p:nvPr/>
+        </p:nvCxnSpPr>
+        <p:spPr>
+          <a:xfrm>
+            <a:off x="8102199" y="31036"/>
+            <a:ext cx="0" cy="6634084"/>
+          </a:xfrm>
+          <a:prstGeom prst="straightConnector1">
+            <a:avLst/>
+          </a:prstGeom>
+          <a:ln w="25400">
+            <a:solidFill>
+              <a:schemeClr val="tx1"/>
+            </a:solidFill>
+            <a:prstDash val="sysDot"/>
+            <a:headEnd type="none" w="lg" len="lg"/>
+            <a:tailEnd type="none"/>
+          </a:ln>
+        </p:spPr>
+        <p:style>
+          <a:lnRef idx="1">
+            <a:schemeClr val="accent1"/>
+          </a:lnRef>
+          <a:fillRef idx="0">
+            <a:schemeClr val="accent1"/>
+          </a:fillRef>
+          <a:effectRef idx="0">
+            <a:schemeClr val="accent1"/>
+          </a:effectRef>
+          <a:fontRef idx="minor">
+            <a:schemeClr val="tx1"/>
+          </a:fontRef>
+        </p:style>
+      </p:cxnSp>
+      <p:sp>
+        <p:nvSpPr>
+          <p:cNvPr id="32" name="TextBox 31">
+            <a:extLst>
+              <a:ext uri="{FF2B5EF4-FFF2-40B4-BE49-F238E27FC236}">
+                <a16:creationId xmlns:a16="http://schemas.microsoft.com/office/drawing/2014/main" id="{45499741-3AB3-A2E5-DCE8-7E21F306C56A}"/>
+              </a:ext>
+            </a:extLst>
+          </p:cNvPr>
+          <p:cNvSpPr txBox="1"/>
+          <p:nvPr/>
+        </p:nvSpPr>
+        <p:spPr>
+          <a:xfrm>
+            <a:off x="2344131" y="602414"/>
+            <a:ext cx="685701" cy="646331"/>
+          </a:xfrm>
+          <a:prstGeom prst="rect">
+            <a:avLst/>
+          </a:prstGeom>
+          <a:noFill/>
+        </p:spPr>
+        <p:txBody>
+          <a:bodyPr wrap="none" rtlCol="0">
+            <a:spAutoFit/>
+          </a:bodyPr>
+          <a:lstStyle/>
+          <a:p>
+            <a:r>
+              <a:rPr lang="en-GB" dirty="0"/>
+              <a:t>Layer</a:t>
+            </a:r>
+          </a:p>
+          <a:p>
+            <a:pPr algn="ctr"/>
+            <a:r>
+              <a:rPr lang="en-GB" dirty="0"/>
+              <a:t>1</a:t>
+            </a:r>
+          </a:p>
+        </p:txBody>
+      </p:sp>
+      <p:sp>
+        <p:nvSpPr>
+          <p:cNvPr id="33" name="TextBox 32">
+            <a:extLst>
+              <a:ext uri="{FF2B5EF4-FFF2-40B4-BE49-F238E27FC236}">
+                <a16:creationId xmlns:a16="http://schemas.microsoft.com/office/drawing/2014/main" id="{26015E95-5A3C-D90D-94DB-197D29AB7F68}"/>
+              </a:ext>
+            </a:extLst>
+          </p:cNvPr>
+          <p:cNvSpPr txBox="1"/>
+          <p:nvPr/>
+        </p:nvSpPr>
+        <p:spPr>
+          <a:xfrm>
+            <a:off x="3392797" y="602405"/>
+            <a:ext cx="685701" cy="646331"/>
+          </a:xfrm>
+          <a:prstGeom prst="rect">
+            <a:avLst/>
+          </a:prstGeom>
+          <a:noFill/>
+        </p:spPr>
+        <p:txBody>
+          <a:bodyPr wrap="none" rtlCol="0">
+            <a:spAutoFit/>
+          </a:bodyPr>
+          <a:lstStyle/>
+          <a:p>
+            <a:r>
+              <a:rPr lang="en-GB" dirty="0"/>
+              <a:t>Layer</a:t>
+            </a:r>
+          </a:p>
+          <a:p>
+            <a:pPr algn="ctr"/>
+            <a:r>
+              <a:rPr lang="en-GB" dirty="0"/>
+              <a:t>2</a:t>
+            </a:r>
+          </a:p>
+        </p:txBody>
+      </p:sp>
+      <p:sp>
+        <p:nvSpPr>
+          <p:cNvPr id="34" name="TextBox 33">
+            <a:extLst>
+              <a:ext uri="{FF2B5EF4-FFF2-40B4-BE49-F238E27FC236}">
+                <a16:creationId xmlns:a16="http://schemas.microsoft.com/office/drawing/2014/main" id="{A8646407-582F-57DA-70CB-277367E858AA}"/>
+              </a:ext>
+            </a:extLst>
+          </p:cNvPr>
+          <p:cNvSpPr txBox="1"/>
+          <p:nvPr/>
+        </p:nvSpPr>
+        <p:spPr>
+          <a:xfrm>
+            <a:off x="4476802" y="602402"/>
+            <a:ext cx="343364" cy="369332"/>
+          </a:xfrm>
+          <a:prstGeom prst="rect">
+            <a:avLst/>
+          </a:prstGeom>
+          <a:noFill/>
+        </p:spPr>
+        <p:txBody>
+          <a:bodyPr wrap="none" rtlCol="0">
+            <a:spAutoFit/>
+          </a:bodyPr>
+          <a:lstStyle/>
+          <a:p>
+            <a:r>
+              <a:rPr lang="en-GB" dirty="0"/>
+              <a:t>…</a:t>
+            </a:r>
+          </a:p>
+        </p:txBody>
+      </p:sp>
+      <p:sp>
+        <p:nvSpPr>
+          <p:cNvPr id="35" name="TextBox 34">
+            <a:extLst>
+              <a:ext uri="{FF2B5EF4-FFF2-40B4-BE49-F238E27FC236}">
+                <a16:creationId xmlns:a16="http://schemas.microsoft.com/office/drawing/2014/main" id="{5B2620A3-277C-EE73-5B63-C5C61D7FAA4F}"/>
+              </a:ext>
+            </a:extLst>
+          </p:cNvPr>
+          <p:cNvSpPr txBox="1"/>
+          <p:nvPr/>
+        </p:nvSpPr>
+        <p:spPr>
+          <a:xfrm>
+            <a:off x="5225168" y="602404"/>
+            <a:ext cx="685701" cy="646331"/>
+          </a:xfrm>
+          <a:prstGeom prst="rect">
+            <a:avLst/>
+          </a:prstGeom>
+          <a:noFill/>
+        </p:spPr>
+        <p:txBody>
+          <a:bodyPr wrap="none" rtlCol="0">
+            <a:spAutoFit/>
+          </a:bodyPr>
+          <a:lstStyle/>
+          <a:p>
+            <a:r>
+              <a:rPr lang="en-GB" dirty="0"/>
+              <a:t>Layer</a:t>
+            </a:r>
+          </a:p>
+          <a:p>
+            <a:pPr algn="ctr"/>
+            <a:r>
+              <a:rPr lang="en-GB" dirty="0"/>
+              <a:t>i-1</a:t>
+            </a:r>
+          </a:p>
+        </p:txBody>
+      </p:sp>
+      <p:sp>
+        <p:nvSpPr>
+          <p:cNvPr id="36" name="TextBox 35">
+            <a:extLst>
+              <a:ext uri="{FF2B5EF4-FFF2-40B4-BE49-F238E27FC236}">
+                <a16:creationId xmlns:a16="http://schemas.microsoft.com/office/drawing/2014/main" id="{44C2608A-A720-60EB-1D23-31904C171959}"/>
+              </a:ext>
+            </a:extLst>
+          </p:cNvPr>
+          <p:cNvSpPr txBox="1"/>
+          <p:nvPr/>
+        </p:nvSpPr>
+        <p:spPr>
+          <a:xfrm>
+            <a:off x="6301505" y="602403"/>
+            <a:ext cx="685701" cy="646331"/>
+          </a:xfrm>
+          <a:prstGeom prst="rect">
+            <a:avLst/>
+          </a:prstGeom>
+          <a:noFill/>
+        </p:spPr>
+        <p:txBody>
+          <a:bodyPr wrap="none" rtlCol="0">
+            <a:spAutoFit/>
+          </a:bodyPr>
+          <a:lstStyle/>
+          <a:p>
+            <a:r>
+              <a:rPr lang="en-GB" dirty="0"/>
+              <a:t>Layer</a:t>
+            </a:r>
+          </a:p>
+          <a:p>
+            <a:pPr algn="ctr"/>
+            <a:r>
+              <a:rPr lang="en-GB" dirty="0"/>
+              <a:t>i</a:t>
+            </a:r>
+          </a:p>
+        </p:txBody>
+      </p:sp>
+      <p:sp>
+        <p:nvSpPr>
+          <p:cNvPr id="37" name="TextBox 36">
+            <a:extLst>
+              <a:ext uri="{FF2B5EF4-FFF2-40B4-BE49-F238E27FC236}">
+                <a16:creationId xmlns:a16="http://schemas.microsoft.com/office/drawing/2014/main" id="{3E0A656C-3D4F-BEE8-CAFC-B4816CCE76AF}"/>
+              </a:ext>
+            </a:extLst>
+          </p:cNvPr>
+          <p:cNvSpPr txBox="1"/>
+          <p:nvPr/>
+        </p:nvSpPr>
+        <p:spPr>
+          <a:xfrm>
+            <a:off x="7231615" y="602402"/>
+            <a:ext cx="685701" cy="646331"/>
+          </a:xfrm>
+          <a:prstGeom prst="rect">
+            <a:avLst/>
+          </a:prstGeom>
+          <a:noFill/>
+        </p:spPr>
+        <p:txBody>
+          <a:bodyPr wrap="none" rtlCol="0">
+            <a:spAutoFit/>
+          </a:bodyPr>
+          <a:lstStyle/>
+          <a:p>
+            <a:r>
+              <a:rPr lang="en-GB" dirty="0"/>
+              <a:t>Layer</a:t>
+            </a:r>
+          </a:p>
+          <a:p>
+            <a:pPr algn="ctr"/>
+            <a:r>
+              <a:rPr lang="en-GB" dirty="0"/>
+              <a:t>i+1</a:t>
+            </a:r>
+          </a:p>
+        </p:txBody>
+      </p:sp>
+      <p:sp>
+        <p:nvSpPr>
+          <p:cNvPr id="38" name="TextBox 37">
+            <a:extLst>
+              <a:ext uri="{FF2B5EF4-FFF2-40B4-BE49-F238E27FC236}">
+                <a16:creationId xmlns:a16="http://schemas.microsoft.com/office/drawing/2014/main" id="{974EAD6B-4F00-97C0-C9C3-304C87FEADF3}"/>
+              </a:ext>
+            </a:extLst>
+          </p:cNvPr>
+          <p:cNvSpPr txBox="1"/>
+          <p:nvPr/>
+        </p:nvSpPr>
+        <p:spPr>
+          <a:xfrm>
+            <a:off x="8306386" y="556235"/>
+            <a:ext cx="343364" cy="369332"/>
+          </a:xfrm>
+          <a:prstGeom prst="rect">
+            <a:avLst/>
+          </a:prstGeom>
+          <a:noFill/>
+        </p:spPr>
+        <p:txBody>
+          <a:bodyPr wrap="none" rtlCol="0">
+            <a:spAutoFit/>
+          </a:bodyPr>
+          <a:lstStyle/>
+          <a:p>
+            <a:r>
+              <a:rPr lang="en-GB" dirty="0"/>
+              <a:t>…</a:t>
+            </a:r>
+          </a:p>
+        </p:txBody>
+      </p:sp>
+      <p:cxnSp>
+        <p:nvCxnSpPr>
+          <p:cNvPr id="39" name="Straight Arrow Connector 38">
+            <a:extLst>
+              <a:ext uri="{FF2B5EF4-FFF2-40B4-BE49-F238E27FC236}">
+                <a16:creationId xmlns:a16="http://schemas.microsoft.com/office/drawing/2014/main" id="{988D4250-BCAF-D3D9-A71D-E9FE71D11AC2}"/>
+              </a:ext>
+            </a:extLst>
+          </p:cNvPr>
+          <p:cNvCxnSpPr>
+            <a:cxnSpLocks/>
+          </p:cNvCxnSpPr>
+          <p:nvPr/>
+        </p:nvCxnSpPr>
+        <p:spPr>
+          <a:xfrm>
+            <a:off x="8859380" y="31036"/>
+            <a:ext cx="0" cy="6634084"/>
+          </a:xfrm>
+          <a:prstGeom prst="straightConnector1">
+            <a:avLst/>
+          </a:prstGeom>
+          <a:ln w="25400">
+            <a:solidFill>
+              <a:schemeClr val="tx1"/>
+            </a:solidFill>
+            <a:prstDash val="sysDot"/>
+            <a:headEnd type="none" w="lg" len="lg"/>
+            <a:tailEnd type="none"/>
+          </a:ln>
+        </p:spPr>
+        <p:style>
+          <a:lnRef idx="1">
+            <a:schemeClr val="accent1"/>
+          </a:lnRef>
+          <a:fillRef idx="0">
+            <a:schemeClr val="accent1"/>
+          </a:fillRef>
+          <a:effectRef idx="0">
+            <a:schemeClr val="accent1"/>
+          </a:effectRef>
+          <a:fontRef idx="minor">
+            <a:schemeClr val="tx1"/>
+          </a:fontRef>
+        </p:style>
+      </p:cxnSp>
+      <p:cxnSp>
+        <p:nvCxnSpPr>
+          <p:cNvPr id="40" name="Straight Arrow Connector 39">
+            <a:extLst>
+              <a:ext uri="{FF2B5EF4-FFF2-40B4-BE49-F238E27FC236}">
+                <a16:creationId xmlns:a16="http://schemas.microsoft.com/office/drawing/2014/main" id="{21CE5241-694B-77A3-04E9-1CCFEB248CC5}"/>
+              </a:ext>
+            </a:extLst>
+          </p:cNvPr>
+          <p:cNvCxnSpPr>
+            <a:cxnSpLocks/>
+          </p:cNvCxnSpPr>
+          <p:nvPr/>
+        </p:nvCxnSpPr>
+        <p:spPr>
+          <a:xfrm>
+            <a:off x="9894050" y="31036"/>
+            <a:ext cx="0" cy="6634084"/>
+          </a:xfrm>
+          <a:prstGeom prst="straightConnector1">
+            <a:avLst/>
+          </a:prstGeom>
+          <a:ln w="25400">
+            <a:solidFill>
+              <a:schemeClr val="tx1"/>
+            </a:solidFill>
+            <a:prstDash val="sysDot"/>
+            <a:headEnd type="none" w="lg" len="lg"/>
+            <a:tailEnd type="none"/>
+          </a:ln>
+        </p:spPr>
+        <p:style>
+          <a:lnRef idx="1">
+            <a:schemeClr val="accent1"/>
+          </a:lnRef>
+          <a:fillRef idx="0">
+            <a:schemeClr val="accent1"/>
+          </a:fillRef>
+          <a:effectRef idx="0">
+            <a:schemeClr val="accent1"/>
+          </a:effectRef>
+          <a:fontRef idx="minor">
+            <a:schemeClr val="tx1"/>
+          </a:fontRef>
+        </p:style>
+      </p:cxnSp>
+      <p:sp>
+        <p:nvSpPr>
+          <p:cNvPr id="41" name="TextBox 40">
+            <a:extLst>
+              <a:ext uri="{FF2B5EF4-FFF2-40B4-BE49-F238E27FC236}">
+                <a16:creationId xmlns:a16="http://schemas.microsoft.com/office/drawing/2014/main" id="{F7FF265A-FFED-792B-9E52-E332B30A72DD}"/>
+              </a:ext>
+            </a:extLst>
+          </p:cNvPr>
+          <p:cNvSpPr txBox="1"/>
+          <p:nvPr/>
+        </p:nvSpPr>
+        <p:spPr>
+          <a:xfrm>
+            <a:off x="9017188" y="602402"/>
+            <a:ext cx="685701" cy="646331"/>
+          </a:xfrm>
+          <a:prstGeom prst="rect">
+            <a:avLst/>
+          </a:prstGeom>
+          <a:noFill/>
+        </p:spPr>
+        <p:txBody>
+          <a:bodyPr wrap="none" rtlCol="0">
+            <a:spAutoFit/>
+          </a:bodyPr>
+          <a:lstStyle/>
+          <a:p>
+            <a:r>
+              <a:rPr lang="en-GB" dirty="0"/>
+              <a:t>Layer</a:t>
+            </a:r>
+          </a:p>
+          <a:p>
+            <a:pPr algn="ctr"/>
+            <a:r>
+              <a:rPr lang="en-GB" dirty="0"/>
+              <a:t>N</a:t>
+            </a:r>
+          </a:p>
+        </p:txBody>
+      </p:sp>
+      <p:sp>
+        <p:nvSpPr>
+          <p:cNvPr id="42" name="TextBox 41">
+            <a:extLst>
+              <a:ext uri="{FF2B5EF4-FFF2-40B4-BE49-F238E27FC236}">
+                <a16:creationId xmlns:a16="http://schemas.microsoft.com/office/drawing/2014/main" id="{98E01897-1EA8-E62C-B041-1ACCB21C3039}"/>
+              </a:ext>
+            </a:extLst>
+          </p:cNvPr>
+          <p:cNvSpPr txBox="1"/>
+          <p:nvPr/>
+        </p:nvSpPr>
+        <p:spPr>
+          <a:xfrm>
+            <a:off x="2008225" y="6338532"/>
+            <a:ext cx="354584" cy="369332"/>
+          </a:xfrm>
+          <a:prstGeom prst="rect">
+            <a:avLst/>
+          </a:prstGeom>
+          <a:noFill/>
+        </p:spPr>
+        <p:txBody>
+          <a:bodyPr wrap="none" rtlCol="0">
+            <a:spAutoFit/>
+          </a:bodyPr>
+          <a:lstStyle/>
+          <a:p>
+            <a:r>
+              <a:rPr lang="en-GB" dirty="0"/>
+              <a:t>z</a:t>
+            </a:r>
+            <a:r>
+              <a:rPr lang="en-GB" baseline="-25000" dirty="0"/>
+              <a:t>1</a:t>
+            </a:r>
+          </a:p>
+        </p:txBody>
+      </p:sp>
+      <p:sp>
+        <p:nvSpPr>
+          <p:cNvPr id="43" name="TextBox 42">
+            <a:extLst>
+              <a:ext uri="{FF2B5EF4-FFF2-40B4-BE49-F238E27FC236}">
+                <a16:creationId xmlns:a16="http://schemas.microsoft.com/office/drawing/2014/main" id="{35AF383E-0281-1A5F-3D0A-C0084B771DA8}"/>
+              </a:ext>
+            </a:extLst>
+          </p:cNvPr>
+          <p:cNvSpPr txBox="1"/>
+          <p:nvPr/>
+        </p:nvSpPr>
+        <p:spPr>
+          <a:xfrm>
+            <a:off x="3121465" y="6338532"/>
+            <a:ext cx="354584" cy="369332"/>
+          </a:xfrm>
+          <a:prstGeom prst="rect">
+            <a:avLst/>
+          </a:prstGeom>
+          <a:noFill/>
+        </p:spPr>
+        <p:txBody>
+          <a:bodyPr wrap="none" rtlCol="0">
+            <a:spAutoFit/>
+          </a:bodyPr>
+          <a:lstStyle/>
+          <a:p>
+            <a:r>
+              <a:rPr lang="en-GB" dirty="0"/>
+              <a:t>z</a:t>
+            </a:r>
+            <a:r>
+              <a:rPr lang="en-GB" baseline="-25000" dirty="0"/>
+              <a:t>2</a:t>
+            </a:r>
+          </a:p>
+        </p:txBody>
+      </p:sp>
+      <p:sp>
+        <p:nvSpPr>
+          <p:cNvPr id="45" name="TextBox 44">
+            <a:extLst>
+              <a:ext uri="{FF2B5EF4-FFF2-40B4-BE49-F238E27FC236}">
+                <a16:creationId xmlns:a16="http://schemas.microsoft.com/office/drawing/2014/main" id="{106736D7-3EC4-EE49-06AC-3C79D3E98758}"/>
+              </a:ext>
+            </a:extLst>
+          </p:cNvPr>
+          <p:cNvSpPr txBox="1"/>
+          <p:nvPr/>
+        </p:nvSpPr>
+        <p:spPr>
+          <a:xfrm>
+            <a:off x="4975679" y="6338532"/>
+            <a:ext cx="436338" cy="369332"/>
+          </a:xfrm>
+          <a:prstGeom prst="rect">
+            <a:avLst/>
+          </a:prstGeom>
+          <a:noFill/>
+        </p:spPr>
+        <p:txBody>
+          <a:bodyPr wrap="none" rtlCol="0">
+            <a:spAutoFit/>
+          </a:bodyPr>
+          <a:lstStyle/>
+          <a:p>
+            <a:r>
+              <a:rPr lang="en-GB" dirty="0"/>
+              <a:t>z</a:t>
+            </a:r>
+            <a:r>
+              <a:rPr lang="en-GB" baseline="-25000" dirty="0"/>
+              <a:t>i-1</a:t>
+            </a:r>
+          </a:p>
+        </p:txBody>
+      </p:sp>
+      <p:sp>
+        <p:nvSpPr>
+          <p:cNvPr id="46" name="TextBox 45">
+            <a:extLst>
+              <a:ext uri="{FF2B5EF4-FFF2-40B4-BE49-F238E27FC236}">
+                <a16:creationId xmlns:a16="http://schemas.microsoft.com/office/drawing/2014/main" id="{F9295845-5D00-524D-B3B6-E18D87A1EE32}"/>
+              </a:ext>
+            </a:extLst>
+          </p:cNvPr>
+          <p:cNvSpPr txBox="1"/>
+          <p:nvPr/>
+        </p:nvSpPr>
+        <p:spPr>
+          <a:xfrm>
+            <a:off x="6081392" y="6338532"/>
+            <a:ext cx="311304" cy="369332"/>
+          </a:xfrm>
+          <a:prstGeom prst="rect">
+            <a:avLst/>
+          </a:prstGeom>
+          <a:noFill/>
+        </p:spPr>
+        <p:txBody>
+          <a:bodyPr wrap="none" rtlCol="0">
+            <a:spAutoFit/>
+          </a:bodyPr>
+          <a:lstStyle/>
+          <a:p>
+            <a:r>
+              <a:rPr lang="en-GB" dirty="0"/>
+              <a:t>z</a:t>
+            </a:r>
+            <a:r>
+              <a:rPr lang="en-GB" baseline="-25000" dirty="0"/>
+              <a:t>i</a:t>
+            </a:r>
+          </a:p>
+        </p:txBody>
+      </p:sp>
+      <p:sp>
+        <p:nvSpPr>
+          <p:cNvPr id="47" name="TextBox 46">
+            <a:extLst>
+              <a:ext uri="{FF2B5EF4-FFF2-40B4-BE49-F238E27FC236}">
+                <a16:creationId xmlns:a16="http://schemas.microsoft.com/office/drawing/2014/main" id="{E387CE16-824B-5407-487D-EE2F5034B26C}"/>
+              </a:ext>
+            </a:extLst>
+          </p:cNvPr>
+          <p:cNvSpPr txBox="1"/>
+          <p:nvPr/>
+        </p:nvSpPr>
+        <p:spPr>
+          <a:xfrm>
+            <a:off x="7054111" y="6338532"/>
+            <a:ext cx="466794" cy="369332"/>
+          </a:xfrm>
+          <a:prstGeom prst="rect">
+            <a:avLst/>
+          </a:prstGeom>
+          <a:noFill/>
+        </p:spPr>
+        <p:txBody>
+          <a:bodyPr wrap="none" rtlCol="0">
+            <a:spAutoFit/>
+          </a:bodyPr>
+          <a:lstStyle/>
+          <a:p>
+            <a:r>
+              <a:rPr lang="en-GB" dirty="0"/>
+              <a:t>z</a:t>
+            </a:r>
+            <a:r>
+              <a:rPr lang="en-GB" baseline="-25000" dirty="0"/>
+              <a:t>i+1</a:t>
+            </a:r>
+          </a:p>
+        </p:txBody>
+      </p:sp>
+      <p:sp>
+        <p:nvSpPr>
+          <p:cNvPr id="49" name="TextBox 48">
+            <a:extLst>
+              <a:ext uri="{FF2B5EF4-FFF2-40B4-BE49-F238E27FC236}">
+                <a16:creationId xmlns:a16="http://schemas.microsoft.com/office/drawing/2014/main" id="{17F92355-6E1E-B251-FBB2-66192DF37731}"/>
+              </a:ext>
+            </a:extLst>
+          </p:cNvPr>
+          <p:cNvSpPr txBox="1"/>
+          <p:nvPr/>
+        </p:nvSpPr>
+        <p:spPr>
+          <a:xfrm>
+            <a:off x="8844652" y="6338532"/>
+            <a:ext cx="375424" cy="369332"/>
+          </a:xfrm>
+          <a:prstGeom prst="rect">
+            <a:avLst/>
+          </a:prstGeom>
+          <a:noFill/>
+        </p:spPr>
+        <p:txBody>
+          <a:bodyPr wrap="none" rtlCol="0">
+            <a:spAutoFit/>
+          </a:bodyPr>
+          <a:lstStyle/>
+          <a:p>
+            <a:r>
+              <a:rPr lang="en-GB" dirty="0" err="1"/>
+              <a:t>z</a:t>
+            </a:r>
+            <a:r>
+              <a:rPr lang="en-GB" baseline="-25000" dirty="0" err="1"/>
+              <a:t>N</a:t>
+            </a:r>
+            <a:endParaRPr lang="en-GB" baseline="-25000" dirty="0"/>
+          </a:p>
+        </p:txBody>
+      </p:sp>
+      <p:sp>
+        <p:nvSpPr>
+          <p:cNvPr id="52" name="Arc 51">
+            <a:extLst>
+              <a:ext uri="{FF2B5EF4-FFF2-40B4-BE49-F238E27FC236}">
+                <a16:creationId xmlns:a16="http://schemas.microsoft.com/office/drawing/2014/main" id="{0C64175B-59A0-4EFC-7BD7-FF3D3C63ECE1}"/>
+              </a:ext>
+            </a:extLst>
+          </p:cNvPr>
+          <p:cNvSpPr/>
+          <p:nvPr/>
+        </p:nvSpPr>
+        <p:spPr>
+          <a:xfrm rot="12958696">
+            <a:off x="1305559" y="3302711"/>
+            <a:ext cx="1484948" cy="820448"/>
+          </a:xfrm>
+          <a:prstGeom prst="arc">
+            <a:avLst>
+              <a:gd name="adj1" fmla="val 16200000"/>
+              <a:gd name="adj2" fmla="val 20723960"/>
+            </a:avLst>
+          </a:prstGeom>
+          <a:ln w="25400">
+            <a:solidFill>
+              <a:schemeClr val="tx1"/>
+            </a:solidFill>
+          </a:ln>
+        </p:spPr>
+        <p:style>
+          <a:lnRef idx="1">
+            <a:schemeClr val="accent1"/>
+          </a:lnRef>
+          <a:fillRef idx="0">
+            <a:schemeClr val="accent1"/>
+          </a:fillRef>
+          <a:effectRef idx="0">
+            <a:schemeClr val="accent1"/>
+          </a:effectRef>
+          <a:fontRef idx="minor">
+            <a:schemeClr val="tx1"/>
+          </a:fontRef>
+        </p:style>
+        <p:txBody>
+          <a:bodyPr rtlCol="0" anchor="ctr"/>
+          <a:lstStyle/>
+          <a:p>
+            <a:pPr algn="ctr"/>
+            <a:endParaRPr lang="en-GB"/>
+          </a:p>
+        </p:txBody>
+      </p:sp>
+      <p:sp>
+        <p:nvSpPr>
+          <p:cNvPr id="55" name="TextBox 54">
+            <a:extLst>
+              <a:ext uri="{FF2B5EF4-FFF2-40B4-BE49-F238E27FC236}">
+                <a16:creationId xmlns:a16="http://schemas.microsoft.com/office/drawing/2014/main" id="{81BE4DB4-5646-13C4-7801-6C57B588F3F4}"/>
+              </a:ext>
+            </a:extLst>
+          </p:cNvPr>
+          <p:cNvSpPr txBox="1"/>
+          <p:nvPr/>
+        </p:nvSpPr>
+        <p:spPr>
+          <a:xfrm>
+            <a:off x="1509671" y="3234889"/>
+            <a:ext cx="653443" cy="584775"/>
+          </a:xfrm>
+          <a:prstGeom prst="rect">
+            <a:avLst/>
+          </a:prstGeom>
+          <a:noFill/>
+        </p:spPr>
+        <p:txBody>
+          <a:bodyPr wrap="square">
+            <a:spAutoFit/>
+          </a:bodyPr>
+          <a:lstStyle/>
+          <a:p>
+            <a:r>
+              <a:rPr lang="en-GB" sz="3200" dirty="0" err="1"/>
+              <a:t>ɵ</a:t>
+            </a:r>
+            <a:r>
+              <a:rPr lang="en-GB" sz="3200" baseline="-25000" dirty="0" err="1"/>
+              <a:t>L</a:t>
+            </a:r>
+            <a:endParaRPr lang="en-GB" sz="3200" baseline="-25000" dirty="0">
+              <a:latin typeface="MS Shell Dlg 2" panose="020B0604030504040204" pitchFamily="34" charset="0"/>
+            </a:endParaRPr>
+          </a:p>
+        </p:txBody>
+      </p:sp>
+      <p:sp>
+        <p:nvSpPr>
+          <p:cNvPr id="2" name="TextBox 1">
+            <a:extLst>
+              <a:ext uri="{FF2B5EF4-FFF2-40B4-BE49-F238E27FC236}">
+                <a16:creationId xmlns:a16="http://schemas.microsoft.com/office/drawing/2014/main" id="{64AD015F-AADF-ABE4-099A-ADEF4BDC5222}"/>
+              </a:ext>
+            </a:extLst>
+          </p:cNvPr>
+          <p:cNvSpPr txBox="1"/>
+          <p:nvPr/>
+        </p:nvSpPr>
+        <p:spPr>
+          <a:xfrm>
+            <a:off x="2460063" y="5796061"/>
+            <a:ext cx="385042" cy="369332"/>
+          </a:xfrm>
+          <a:prstGeom prst="rect">
+            <a:avLst/>
+          </a:prstGeom>
+          <a:noFill/>
+        </p:spPr>
+        <p:txBody>
+          <a:bodyPr wrap="none" rtlCol="0">
+            <a:spAutoFit/>
+          </a:bodyPr>
+          <a:lstStyle/>
+          <a:p>
+            <a:r>
+              <a:rPr lang="en-GB" dirty="0"/>
+              <a:t>d</a:t>
+            </a:r>
+            <a:r>
+              <a:rPr lang="en-GB" baseline="-25000" dirty="0"/>
+              <a:t>1</a:t>
+            </a:r>
+          </a:p>
+        </p:txBody>
+      </p:sp>
+      <p:sp>
+        <p:nvSpPr>
+          <p:cNvPr id="3" name="TextBox 2">
+            <a:extLst>
+              <a:ext uri="{FF2B5EF4-FFF2-40B4-BE49-F238E27FC236}">
+                <a16:creationId xmlns:a16="http://schemas.microsoft.com/office/drawing/2014/main" id="{AA8192FC-3B22-AAFB-BFD2-1DD1C647DE18}"/>
+              </a:ext>
+            </a:extLst>
+          </p:cNvPr>
+          <p:cNvSpPr txBox="1"/>
+          <p:nvPr/>
+        </p:nvSpPr>
+        <p:spPr>
+          <a:xfrm>
+            <a:off x="3526674" y="5796061"/>
+            <a:ext cx="385042" cy="369332"/>
+          </a:xfrm>
+          <a:prstGeom prst="rect">
+            <a:avLst/>
+          </a:prstGeom>
+          <a:noFill/>
+        </p:spPr>
+        <p:txBody>
+          <a:bodyPr wrap="none" rtlCol="0">
+            <a:spAutoFit/>
+          </a:bodyPr>
+          <a:lstStyle/>
+          <a:p>
+            <a:r>
+              <a:rPr lang="en-GB" dirty="0"/>
+              <a:t>d</a:t>
+            </a:r>
+            <a:r>
+              <a:rPr lang="en-GB" baseline="-25000" dirty="0"/>
+              <a:t>2</a:t>
+            </a:r>
+          </a:p>
+        </p:txBody>
+      </p:sp>
+      <p:sp>
+        <p:nvSpPr>
+          <p:cNvPr id="4" name="TextBox 3">
+            <a:extLst>
+              <a:ext uri="{FF2B5EF4-FFF2-40B4-BE49-F238E27FC236}">
+                <a16:creationId xmlns:a16="http://schemas.microsoft.com/office/drawing/2014/main" id="{FC2E9BA6-E37E-54DE-C00D-D89A13122B5E}"/>
+              </a:ext>
+            </a:extLst>
+          </p:cNvPr>
+          <p:cNvSpPr txBox="1"/>
+          <p:nvPr/>
+        </p:nvSpPr>
+        <p:spPr>
+          <a:xfrm>
+            <a:off x="5331723" y="5796061"/>
+            <a:ext cx="466794" cy="369332"/>
+          </a:xfrm>
+          <a:prstGeom prst="rect">
+            <a:avLst/>
+          </a:prstGeom>
+          <a:noFill/>
+        </p:spPr>
+        <p:txBody>
+          <a:bodyPr wrap="none" rtlCol="0">
+            <a:spAutoFit/>
+          </a:bodyPr>
+          <a:lstStyle/>
+          <a:p>
+            <a:r>
+              <a:rPr lang="en-GB" dirty="0"/>
+              <a:t>d</a:t>
+            </a:r>
+            <a:r>
+              <a:rPr lang="en-GB" baseline="-25000" dirty="0"/>
+              <a:t>i-1</a:t>
+            </a:r>
+          </a:p>
+        </p:txBody>
+      </p:sp>
+      <p:sp>
+        <p:nvSpPr>
+          <p:cNvPr id="7" name="TextBox 6">
+            <a:extLst>
+              <a:ext uri="{FF2B5EF4-FFF2-40B4-BE49-F238E27FC236}">
+                <a16:creationId xmlns:a16="http://schemas.microsoft.com/office/drawing/2014/main" id="{F5C43D37-CEA8-D677-8B56-45A90F6AD45C}"/>
+              </a:ext>
+            </a:extLst>
+          </p:cNvPr>
+          <p:cNvSpPr txBox="1"/>
+          <p:nvPr/>
+        </p:nvSpPr>
+        <p:spPr>
+          <a:xfrm>
+            <a:off x="6419860" y="5796061"/>
+            <a:ext cx="341760" cy="369332"/>
+          </a:xfrm>
+          <a:prstGeom prst="rect">
+            <a:avLst/>
+          </a:prstGeom>
+          <a:noFill/>
+        </p:spPr>
+        <p:txBody>
+          <a:bodyPr wrap="none" rtlCol="0">
+            <a:spAutoFit/>
+          </a:bodyPr>
+          <a:lstStyle/>
+          <a:p>
+            <a:r>
+              <a:rPr lang="en-GB" dirty="0"/>
+              <a:t>d</a:t>
+            </a:r>
+            <a:r>
+              <a:rPr lang="en-GB" baseline="-25000" dirty="0"/>
+              <a:t>i</a:t>
+            </a:r>
+          </a:p>
+        </p:txBody>
+      </p:sp>
+      <p:sp>
+        <p:nvSpPr>
+          <p:cNvPr id="8" name="TextBox 7">
+            <a:extLst>
+              <a:ext uri="{FF2B5EF4-FFF2-40B4-BE49-F238E27FC236}">
+                <a16:creationId xmlns:a16="http://schemas.microsoft.com/office/drawing/2014/main" id="{83C1E2EE-2144-4F15-9569-97196DFBBCE8}"/>
+              </a:ext>
+            </a:extLst>
+          </p:cNvPr>
+          <p:cNvSpPr txBox="1"/>
+          <p:nvPr/>
+        </p:nvSpPr>
+        <p:spPr>
+          <a:xfrm>
+            <a:off x="7445174" y="5796061"/>
+            <a:ext cx="497252" cy="369332"/>
+          </a:xfrm>
+          <a:prstGeom prst="rect">
+            <a:avLst/>
+          </a:prstGeom>
+          <a:noFill/>
+        </p:spPr>
+        <p:txBody>
+          <a:bodyPr wrap="none" rtlCol="0">
+            <a:spAutoFit/>
+          </a:bodyPr>
+          <a:lstStyle/>
+          <a:p>
+            <a:r>
+              <a:rPr lang="en-GB" dirty="0"/>
+              <a:t>d</a:t>
+            </a:r>
+            <a:r>
+              <a:rPr lang="en-GB" baseline="-25000" dirty="0"/>
+              <a:t>i+1</a:t>
+            </a:r>
+          </a:p>
+        </p:txBody>
+      </p:sp>
+      <p:sp>
+        <p:nvSpPr>
+          <p:cNvPr id="10" name="TextBox 9">
+            <a:extLst>
+              <a:ext uri="{FF2B5EF4-FFF2-40B4-BE49-F238E27FC236}">
+                <a16:creationId xmlns:a16="http://schemas.microsoft.com/office/drawing/2014/main" id="{079A6AFA-AF90-2D0B-1E49-76C8B45A56AD}"/>
+              </a:ext>
+            </a:extLst>
+          </p:cNvPr>
+          <p:cNvSpPr txBox="1"/>
+          <p:nvPr/>
+        </p:nvSpPr>
+        <p:spPr>
+          <a:xfrm>
+            <a:off x="9190847" y="5796061"/>
+            <a:ext cx="405880" cy="369332"/>
+          </a:xfrm>
+          <a:prstGeom prst="rect">
+            <a:avLst/>
+          </a:prstGeom>
+          <a:noFill/>
+        </p:spPr>
+        <p:txBody>
+          <a:bodyPr wrap="none" rtlCol="0">
+            <a:spAutoFit/>
+          </a:bodyPr>
+          <a:lstStyle/>
+          <a:p>
+            <a:r>
+              <a:rPr lang="en-GB" dirty="0" err="1"/>
+              <a:t>d</a:t>
+            </a:r>
+            <a:r>
+              <a:rPr lang="en-GB" baseline="-25000" dirty="0" err="1"/>
+              <a:t>N</a:t>
+            </a:r>
+            <a:endParaRPr lang="en-GB" baseline="-25000" dirty="0"/>
+          </a:p>
+        </p:txBody>
+      </p:sp>
+      <p:cxnSp>
+        <p:nvCxnSpPr>
+          <p:cNvPr id="15" name="Straight Arrow Connector 14">
+            <a:extLst>
+              <a:ext uri="{FF2B5EF4-FFF2-40B4-BE49-F238E27FC236}">
+                <a16:creationId xmlns:a16="http://schemas.microsoft.com/office/drawing/2014/main" id="{FABDF699-B267-921D-1033-4E5198B64942}"/>
+              </a:ext>
+            </a:extLst>
+          </p:cNvPr>
+          <p:cNvCxnSpPr>
+            <a:stCxn id="2" idx="1"/>
+          </p:cNvCxnSpPr>
+          <p:nvPr/>
+        </p:nvCxnSpPr>
+        <p:spPr>
+          <a:xfrm flipH="1">
+            <a:off x="2128596" y="5980727"/>
+            <a:ext cx="331467" cy="0"/>
+          </a:xfrm>
+          <a:prstGeom prst="straightConnector1">
+            <a:avLst/>
+          </a:prstGeom>
+          <a:ln>
+            <a:tailEnd type="triangle"/>
+          </a:ln>
+        </p:spPr>
+        <p:style>
+          <a:lnRef idx="1">
+            <a:schemeClr val="accent1"/>
+          </a:lnRef>
+          <a:fillRef idx="0">
+            <a:schemeClr val="accent1"/>
+          </a:fillRef>
+          <a:effectRef idx="0">
+            <a:schemeClr val="accent1"/>
+          </a:effectRef>
+          <a:fontRef idx="minor">
+            <a:schemeClr val="tx1"/>
+          </a:fontRef>
+        </p:style>
+      </p:cxnSp>
+      <p:cxnSp>
+        <p:nvCxnSpPr>
+          <p:cNvPr id="22" name="Straight Arrow Connector 21">
+            <a:extLst>
+              <a:ext uri="{FF2B5EF4-FFF2-40B4-BE49-F238E27FC236}">
+                <a16:creationId xmlns:a16="http://schemas.microsoft.com/office/drawing/2014/main" id="{E8AFA24D-A50E-8DED-F496-61A1C1439340}"/>
+              </a:ext>
+            </a:extLst>
+          </p:cNvPr>
+          <p:cNvCxnSpPr/>
+          <p:nvPr/>
+        </p:nvCxnSpPr>
+        <p:spPr>
+          <a:xfrm flipH="1">
+            <a:off x="3147082" y="5982561"/>
+            <a:ext cx="331467" cy="0"/>
+          </a:xfrm>
+          <a:prstGeom prst="straightConnector1">
+            <a:avLst/>
+          </a:prstGeom>
+          <a:ln>
+            <a:tailEnd type="triangle"/>
+          </a:ln>
+        </p:spPr>
+        <p:style>
+          <a:lnRef idx="1">
+            <a:schemeClr val="accent1"/>
+          </a:lnRef>
+          <a:fillRef idx="0">
+            <a:schemeClr val="accent1"/>
+          </a:fillRef>
+          <a:effectRef idx="0">
+            <a:schemeClr val="accent1"/>
+          </a:effectRef>
+          <a:fontRef idx="minor">
+            <a:schemeClr val="tx1"/>
+          </a:fontRef>
+        </p:style>
+      </p:cxnSp>
+      <p:cxnSp>
+        <p:nvCxnSpPr>
+          <p:cNvPr id="26" name="Straight Arrow Connector 25">
+            <a:extLst>
+              <a:ext uri="{FF2B5EF4-FFF2-40B4-BE49-F238E27FC236}">
+                <a16:creationId xmlns:a16="http://schemas.microsoft.com/office/drawing/2014/main" id="{A2F51A88-59AD-CA39-7592-350928213BDC}"/>
+              </a:ext>
+            </a:extLst>
+          </p:cNvPr>
+          <p:cNvCxnSpPr/>
+          <p:nvPr/>
+        </p:nvCxnSpPr>
+        <p:spPr>
+          <a:xfrm flipH="1">
+            <a:off x="4994163" y="5974770"/>
+            <a:ext cx="331467" cy="0"/>
+          </a:xfrm>
+          <a:prstGeom prst="straightConnector1">
+            <a:avLst/>
+          </a:prstGeom>
+          <a:ln>
+            <a:tailEnd type="triangle"/>
+          </a:ln>
+        </p:spPr>
+        <p:style>
+          <a:lnRef idx="1">
+            <a:schemeClr val="accent1"/>
+          </a:lnRef>
+          <a:fillRef idx="0">
+            <a:schemeClr val="accent1"/>
+          </a:fillRef>
+          <a:effectRef idx="0">
+            <a:schemeClr val="accent1"/>
+          </a:effectRef>
+          <a:fontRef idx="minor">
+            <a:schemeClr val="tx1"/>
+          </a:fontRef>
+        </p:style>
+      </p:cxnSp>
+      <p:cxnSp>
+        <p:nvCxnSpPr>
+          <p:cNvPr id="44" name="Straight Arrow Connector 43">
+            <a:extLst>
+              <a:ext uri="{FF2B5EF4-FFF2-40B4-BE49-F238E27FC236}">
+                <a16:creationId xmlns:a16="http://schemas.microsoft.com/office/drawing/2014/main" id="{E8A2A2DD-37F4-4D4C-5661-AB1714D7CC2A}"/>
+              </a:ext>
+            </a:extLst>
+          </p:cNvPr>
+          <p:cNvCxnSpPr/>
+          <p:nvPr/>
+        </p:nvCxnSpPr>
+        <p:spPr>
+          <a:xfrm flipH="1">
+            <a:off x="6077259" y="5982561"/>
+            <a:ext cx="331467" cy="0"/>
+          </a:xfrm>
+          <a:prstGeom prst="straightConnector1">
+            <a:avLst/>
+          </a:prstGeom>
+          <a:ln>
+            <a:tailEnd type="triangle"/>
+          </a:ln>
+        </p:spPr>
+        <p:style>
+          <a:lnRef idx="1">
+            <a:schemeClr val="accent1"/>
+          </a:lnRef>
+          <a:fillRef idx="0">
+            <a:schemeClr val="accent1"/>
+          </a:fillRef>
+          <a:effectRef idx="0">
+            <a:schemeClr val="accent1"/>
+          </a:effectRef>
+          <a:fontRef idx="minor">
+            <a:schemeClr val="tx1"/>
+          </a:fontRef>
+        </p:style>
+      </p:cxnSp>
+      <p:cxnSp>
+        <p:nvCxnSpPr>
+          <p:cNvPr id="48" name="Straight Arrow Connector 47">
+            <a:extLst>
+              <a:ext uri="{FF2B5EF4-FFF2-40B4-BE49-F238E27FC236}">
+                <a16:creationId xmlns:a16="http://schemas.microsoft.com/office/drawing/2014/main" id="{9486E5D0-F8D6-546F-5721-C03C461BAE27}"/>
+              </a:ext>
+            </a:extLst>
+          </p:cNvPr>
+          <p:cNvCxnSpPr/>
+          <p:nvPr/>
+        </p:nvCxnSpPr>
+        <p:spPr>
+          <a:xfrm flipH="1">
+            <a:off x="7129789" y="5982561"/>
+            <a:ext cx="331467" cy="0"/>
+          </a:xfrm>
+          <a:prstGeom prst="straightConnector1">
+            <a:avLst/>
+          </a:prstGeom>
+          <a:ln>
+            <a:tailEnd type="triangle"/>
+          </a:ln>
+        </p:spPr>
+        <p:style>
+          <a:lnRef idx="1">
+            <a:schemeClr val="accent1"/>
+          </a:lnRef>
+          <a:fillRef idx="0">
+            <a:schemeClr val="accent1"/>
+          </a:fillRef>
+          <a:effectRef idx="0">
+            <a:schemeClr val="accent1"/>
+          </a:effectRef>
+          <a:fontRef idx="minor">
+            <a:schemeClr val="tx1"/>
+          </a:fontRef>
+        </p:style>
+      </p:cxnSp>
+      <p:cxnSp>
+        <p:nvCxnSpPr>
+          <p:cNvPr id="50" name="Straight Arrow Connector 49">
+            <a:extLst>
+              <a:ext uri="{FF2B5EF4-FFF2-40B4-BE49-F238E27FC236}">
+                <a16:creationId xmlns:a16="http://schemas.microsoft.com/office/drawing/2014/main" id="{E9DE6784-3C8F-493A-6B77-B3EA13E47492}"/>
+              </a:ext>
+            </a:extLst>
+          </p:cNvPr>
+          <p:cNvCxnSpPr/>
+          <p:nvPr/>
+        </p:nvCxnSpPr>
+        <p:spPr>
+          <a:xfrm flipH="1">
+            <a:off x="8859380" y="5982561"/>
+            <a:ext cx="331467" cy="0"/>
+          </a:xfrm>
+          <a:prstGeom prst="straightConnector1">
+            <a:avLst/>
+          </a:prstGeom>
+          <a:ln>
+            <a:tailEnd type="triangle"/>
+          </a:ln>
+        </p:spPr>
+        <p:style>
+          <a:lnRef idx="1">
+            <a:schemeClr val="accent1"/>
+          </a:lnRef>
+          <a:fillRef idx="0">
+            <a:schemeClr val="accent1"/>
+          </a:fillRef>
+          <a:effectRef idx="0">
+            <a:schemeClr val="accent1"/>
+          </a:effectRef>
+          <a:fontRef idx="minor">
+            <a:schemeClr val="tx1"/>
+          </a:fontRef>
+        </p:style>
+      </p:cxnSp>
+      <p:cxnSp>
+        <p:nvCxnSpPr>
+          <p:cNvPr id="51" name="Straight Arrow Connector 50">
+            <a:extLst>
+              <a:ext uri="{FF2B5EF4-FFF2-40B4-BE49-F238E27FC236}">
+                <a16:creationId xmlns:a16="http://schemas.microsoft.com/office/drawing/2014/main" id="{8583A545-7D0A-8463-9B97-80B26FDEFC67}"/>
+              </a:ext>
+            </a:extLst>
+          </p:cNvPr>
+          <p:cNvCxnSpPr>
+            <a:cxnSpLocks/>
+          </p:cNvCxnSpPr>
+          <p:nvPr/>
+        </p:nvCxnSpPr>
+        <p:spPr>
+          <a:xfrm>
+            <a:off x="2786307" y="5982561"/>
+            <a:ext cx="335158" cy="0"/>
+          </a:xfrm>
+          <a:prstGeom prst="straightConnector1">
+            <a:avLst/>
+          </a:prstGeom>
+          <a:ln>
+            <a:tailEnd type="triangle"/>
+          </a:ln>
+        </p:spPr>
+        <p:style>
+          <a:lnRef idx="1">
+            <a:schemeClr val="accent1"/>
+          </a:lnRef>
+          <a:fillRef idx="0">
+            <a:schemeClr val="accent1"/>
+          </a:fillRef>
+          <a:effectRef idx="0">
+            <a:schemeClr val="accent1"/>
+          </a:effectRef>
+          <a:fontRef idx="minor">
+            <a:schemeClr val="tx1"/>
+          </a:fontRef>
+        </p:style>
+      </p:cxnSp>
+      <p:cxnSp>
+        <p:nvCxnSpPr>
+          <p:cNvPr id="58" name="Straight Arrow Connector 57">
+            <a:extLst>
+              <a:ext uri="{FF2B5EF4-FFF2-40B4-BE49-F238E27FC236}">
+                <a16:creationId xmlns:a16="http://schemas.microsoft.com/office/drawing/2014/main" id="{BF50A7F8-76B0-3A1C-85A7-E152632F494B}"/>
+              </a:ext>
+            </a:extLst>
+          </p:cNvPr>
+          <p:cNvCxnSpPr>
+            <a:cxnSpLocks/>
+          </p:cNvCxnSpPr>
+          <p:nvPr/>
+        </p:nvCxnSpPr>
+        <p:spPr>
+          <a:xfrm>
+            <a:off x="3910919" y="5986229"/>
+            <a:ext cx="335158" cy="0"/>
+          </a:xfrm>
+          <a:prstGeom prst="straightConnector1">
+            <a:avLst/>
+          </a:prstGeom>
+          <a:ln>
+            <a:tailEnd type="triangle"/>
+          </a:ln>
+        </p:spPr>
+        <p:style>
+          <a:lnRef idx="1">
+            <a:schemeClr val="accent1"/>
+          </a:lnRef>
+          <a:fillRef idx="0">
+            <a:schemeClr val="accent1"/>
+          </a:fillRef>
+          <a:effectRef idx="0">
+            <a:schemeClr val="accent1"/>
+          </a:effectRef>
+          <a:fontRef idx="minor">
+            <a:schemeClr val="tx1"/>
+          </a:fontRef>
+        </p:style>
+      </p:cxnSp>
+      <p:cxnSp>
+        <p:nvCxnSpPr>
+          <p:cNvPr id="59" name="Straight Arrow Connector 58">
+            <a:extLst>
+              <a:ext uri="{FF2B5EF4-FFF2-40B4-BE49-F238E27FC236}">
+                <a16:creationId xmlns:a16="http://schemas.microsoft.com/office/drawing/2014/main" id="{A70C9898-D448-EA1C-F608-56875AE0C305}"/>
+              </a:ext>
+            </a:extLst>
+          </p:cNvPr>
+          <p:cNvCxnSpPr>
+            <a:cxnSpLocks/>
+          </p:cNvCxnSpPr>
+          <p:nvPr/>
+        </p:nvCxnSpPr>
+        <p:spPr>
+          <a:xfrm>
+            <a:off x="5716765" y="5982561"/>
+            <a:ext cx="335158" cy="0"/>
+          </a:xfrm>
+          <a:prstGeom prst="straightConnector1">
+            <a:avLst/>
+          </a:prstGeom>
+          <a:ln>
+            <a:tailEnd type="triangle"/>
+          </a:ln>
+        </p:spPr>
+        <p:style>
+          <a:lnRef idx="1">
+            <a:schemeClr val="accent1"/>
+          </a:lnRef>
+          <a:fillRef idx="0">
+            <a:schemeClr val="accent1"/>
+          </a:fillRef>
+          <a:effectRef idx="0">
+            <a:schemeClr val="accent1"/>
+          </a:effectRef>
+          <a:fontRef idx="minor">
+            <a:schemeClr val="tx1"/>
+          </a:fontRef>
+        </p:style>
+      </p:cxnSp>
+      <p:cxnSp>
+        <p:nvCxnSpPr>
+          <p:cNvPr id="60" name="Straight Arrow Connector 59">
+            <a:extLst>
+              <a:ext uri="{FF2B5EF4-FFF2-40B4-BE49-F238E27FC236}">
+                <a16:creationId xmlns:a16="http://schemas.microsoft.com/office/drawing/2014/main" id="{961E3375-9222-3FB7-2B14-6C854551E444}"/>
+              </a:ext>
+            </a:extLst>
+          </p:cNvPr>
+          <p:cNvCxnSpPr>
+            <a:cxnSpLocks/>
+          </p:cNvCxnSpPr>
+          <p:nvPr/>
+        </p:nvCxnSpPr>
+        <p:spPr>
+          <a:xfrm>
+            <a:off x="6783368" y="5982561"/>
+            <a:ext cx="335158" cy="0"/>
+          </a:xfrm>
+          <a:prstGeom prst="straightConnector1">
+            <a:avLst/>
+          </a:prstGeom>
+          <a:ln>
+            <a:tailEnd type="triangle"/>
+          </a:ln>
+        </p:spPr>
+        <p:style>
+          <a:lnRef idx="1">
+            <a:schemeClr val="accent1"/>
+          </a:lnRef>
+          <a:fillRef idx="0">
+            <a:schemeClr val="accent1"/>
+          </a:fillRef>
+          <a:effectRef idx="0">
+            <a:schemeClr val="accent1"/>
+          </a:effectRef>
+          <a:fontRef idx="minor">
+            <a:schemeClr val="tx1"/>
+          </a:fontRef>
+        </p:style>
+      </p:cxnSp>
+      <p:cxnSp>
+        <p:nvCxnSpPr>
+          <p:cNvPr id="61" name="Straight Arrow Connector 60">
+            <a:extLst>
+              <a:ext uri="{FF2B5EF4-FFF2-40B4-BE49-F238E27FC236}">
+                <a16:creationId xmlns:a16="http://schemas.microsoft.com/office/drawing/2014/main" id="{9EC40D68-46C5-4388-A65B-A28AF784B1EB}"/>
+              </a:ext>
+            </a:extLst>
+          </p:cNvPr>
+          <p:cNvCxnSpPr>
+            <a:cxnSpLocks/>
+          </p:cNvCxnSpPr>
+          <p:nvPr/>
+        </p:nvCxnSpPr>
+        <p:spPr>
+          <a:xfrm>
+            <a:off x="9535310" y="5982561"/>
+            <a:ext cx="335158" cy="0"/>
+          </a:xfrm>
+          <a:prstGeom prst="straightConnector1">
+            <a:avLst/>
+          </a:prstGeom>
+          <a:ln>
+            <a:tailEnd type="triangle"/>
+          </a:ln>
+        </p:spPr>
+        <p:style>
+          <a:lnRef idx="1">
+            <a:schemeClr val="accent1"/>
+          </a:lnRef>
+          <a:fillRef idx="0">
+            <a:schemeClr val="accent1"/>
+          </a:fillRef>
+          <a:effectRef idx="0">
+            <a:schemeClr val="accent1"/>
+          </a:effectRef>
+          <a:fontRef idx="minor">
+            <a:schemeClr val="tx1"/>
+          </a:fontRef>
+        </p:style>
+      </p:cxnSp>
+      <p:cxnSp>
+        <p:nvCxnSpPr>
+          <p:cNvPr id="62" name="Straight Arrow Connector 61">
+            <a:extLst>
+              <a:ext uri="{FF2B5EF4-FFF2-40B4-BE49-F238E27FC236}">
+                <a16:creationId xmlns:a16="http://schemas.microsoft.com/office/drawing/2014/main" id="{4BE2618C-BD42-6822-9C99-07280DC1812B}"/>
+              </a:ext>
+            </a:extLst>
+          </p:cNvPr>
+          <p:cNvCxnSpPr>
+            <a:cxnSpLocks/>
+          </p:cNvCxnSpPr>
+          <p:nvPr/>
+        </p:nvCxnSpPr>
+        <p:spPr>
+          <a:xfrm>
+            <a:off x="7777632" y="5986229"/>
+            <a:ext cx="335158" cy="0"/>
+          </a:xfrm>
+          <a:prstGeom prst="straightConnector1">
+            <a:avLst/>
+          </a:prstGeom>
+          <a:ln>
+            <a:tailEnd type="triangle"/>
+          </a:ln>
+        </p:spPr>
+        <p:style>
+          <a:lnRef idx="1">
+            <a:schemeClr val="accent1"/>
+          </a:lnRef>
+          <a:fillRef idx="0">
+            <a:schemeClr val="accent1"/>
+          </a:fillRef>
+          <a:effectRef idx="0">
+            <a:schemeClr val="accent1"/>
+          </a:effectRef>
+          <a:fontRef idx="minor">
+            <a:schemeClr val="tx1"/>
+          </a:fontRef>
+        </p:style>
+      </p:cxnSp>
+      <p:grpSp>
+        <p:nvGrpSpPr>
+          <p:cNvPr id="79" name="Group 78">
+            <a:extLst>
+              <a:ext uri="{FF2B5EF4-FFF2-40B4-BE49-F238E27FC236}">
+                <a16:creationId xmlns:a16="http://schemas.microsoft.com/office/drawing/2014/main" id="{B760E906-08D3-2D5C-EA6B-46084A4E24BD}"/>
+              </a:ext>
+            </a:extLst>
+          </p:cNvPr>
+          <p:cNvGrpSpPr/>
+          <p:nvPr/>
+        </p:nvGrpSpPr>
+        <p:grpSpPr>
+          <a:xfrm rot="18490989">
+            <a:off x="9246616" y="2073170"/>
+            <a:ext cx="3449781" cy="0"/>
+            <a:chOff x="5273964" y="4692073"/>
+            <a:chExt cx="3449781" cy="0"/>
+          </a:xfrm>
+        </p:grpSpPr>
+        <p:cxnSp>
+          <p:nvCxnSpPr>
+            <p:cNvPr id="80" name="Straight Arrow Connector 79">
+              <a:extLst>
+                <a:ext uri="{FF2B5EF4-FFF2-40B4-BE49-F238E27FC236}">
+                  <a16:creationId xmlns:a16="http://schemas.microsoft.com/office/drawing/2014/main" id="{CABD8BED-1735-29FB-934F-177DF70F2DE6}"/>
+                </a:ext>
+              </a:extLst>
+            </p:cNvPr>
+            <p:cNvCxnSpPr/>
+            <p:nvPr/>
+          </p:nvCxnSpPr>
+          <p:spPr>
+            <a:xfrm>
+              <a:off x="5273964" y="4692073"/>
+              <a:ext cx="1764145" cy="0"/>
+            </a:xfrm>
+            <a:prstGeom prst="straightConnector1">
+              <a:avLst/>
+            </a:prstGeom>
+            <a:ln w="47625">
+              <a:solidFill>
+                <a:schemeClr val="accent6">
+                  <a:lumMod val="75000"/>
+                </a:schemeClr>
+              </a:solidFill>
+              <a:tailEnd type="triangle"/>
+            </a:ln>
+          </p:spPr>
+          <p:style>
+            <a:lnRef idx="1">
+              <a:schemeClr val="accent1"/>
+            </a:lnRef>
+            <a:fillRef idx="0">
+              <a:schemeClr val="accent1"/>
+            </a:fillRef>
+            <a:effectRef idx="0">
+              <a:schemeClr val="accent1"/>
+            </a:effectRef>
+            <a:fontRef idx="minor">
+              <a:schemeClr val="tx1"/>
+            </a:fontRef>
+          </p:style>
+        </p:cxnSp>
+        <p:cxnSp>
+          <p:nvCxnSpPr>
+            <p:cNvPr id="81" name="Straight Arrow Connector 80">
+              <a:extLst>
+                <a:ext uri="{FF2B5EF4-FFF2-40B4-BE49-F238E27FC236}">
+                  <a16:creationId xmlns:a16="http://schemas.microsoft.com/office/drawing/2014/main" id="{51A1943B-87AE-1F17-0E11-63FF6BADCB73}"/>
+                </a:ext>
+              </a:extLst>
+            </p:cNvPr>
+            <p:cNvCxnSpPr/>
+            <p:nvPr/>
+          </p:nvCxnSpPr>
+          <p:spPr>
+            <a:xfrm>
+              <a:off x="6959600" y="4692073"/>
+              <a:ext cx="1764145" cy="0"/>
+            </a:xfrm>
+            <a:prstGeom prst="straightConnector1">
+              <a:avLst/>
+            </a:prstGeom>
+            <a:ln w="47625">
+              <a:solidFill>
+                <a:schemeClr val="accent6">
+                  <a:lumMod val="75000"/>
+                </a:schemeClr>
+              </a:solidFill>
+              <a:tailEnd type="none"/>
+            </a:ln>
+          </p:spPr>
+          <p:style>
+            <a:lnRef idx="1">
+              <a:schemeClr val="accent1"/>
+            </a:lnRef>
+            <a:fillRef idx="0">
+              <a:schemeClr val="accent1"/>
+            </a:fillRef>
+            <a:effectRef idx="0">
+              <a:schemeClr val="accent1"/>
+            </a:effectRef>
+            <a:fontRef idx="minor">
+              <a:schemeClr val="tx1"/>
+            </a:fontRef>
+          </p:style>
+        </p:cxnSp>
+      </p:grpSp>
+      <p:sp>
+        <p:nvSpPr>
+          <p:cNvPr id="82" name="TextBox 81">
+            <a:extLst>
+              <a:ext uri="{FF2B5EF4-FFF2-40B4-BE49-F238E27FC236}">
+                <a16:creationId xmlns:a16="http://schemas.microsoft.com/office/drawing/2014/main" id="{6564F8B6-2A1A-F089-3222-89F2E52DFE8A}"/>
+              </a:ext>
+            </a:extLst>
+          </p:cNvPr>
+          <p:cNvSpPr txBox="1"/>
+          <p:nvPr/>
+        </p:nvSpPr>
+        <p:spPr>
+          <a:xfrm rot="18442631">
+            <a:off x="10827215" y="1417044"/>
+            <a:ext cx="1349535" cy="646331"/>
+          </a:xfrm>
+          <a:prstGeom prst="rect">
+            <a:avLst/>
+          </a:prstGeom>
+          <a:noFill/>
+        </p:spPr>
+        <p:txBody>
+          <a:bodyPr wrap="square">
+            <a:spAutoFit/>
+          </a:bodyPr>
+          <a:lstStyle/>
+          <a:p>
+            <a:r>
+              <a:rPr lang="en-GB" dirty="0"/>
+              <a:t>Scattered forward</a:t>
+            </a:r>
+          </a:p>
+        </p:txBody>
+      </p:sp>
+      <mc:AlternateContent xmlns:mc="http://schemas.openxmlformats.org/markup-compatibility/2006" xmlns:a14="http://schemas.microsoft.com/office/drawing/2010/main">
+        <mc:Choice Requires="a14">
+          <p:sp>
+            <p:nvSpPr>
+              <p:cNvPr id="83" name="Rectangle: Rounded Corners 82">
+                <a:extLst>
+                  <a:ext uri="{FF2B5EF4-FFF2-40B4-BE49-F238E27FC236}">
+                    <a16:creationId xmlns:a16="http://schemas.microsoft.com/office/drawing/2014/main" id="{8F09C48D-6778-32B9-464A-42D1C515870F}"/>
+                  </a:ext>
+                </a:extLst>
+              </p:cNvPr>
+              <p:cNvSpPr/>
+              <p:nvPr/>
+            </p:nvSpPr>
+            <p:spPr>
+              <a:xfrm>
+                <a:off x="10630406" y="2644664"/>
+                <a:ext cx="814098" cy="1801577"/>
+              </a:xfrm>
+              <a:prstGeom prst="roundRect">
+                <a:avLst/>
+              </a:prstGeom>
+            </p:spPr>
+            <p:style>
+              <a:lnRef idx="2">
+                <a:schemeClr val="accent2">
+                  <a:shade val="15000"/>
+                </a:schemeClr>
+              </a:lnRef>
+              <a:fillRef idx="1">
+                <a:schemeClr val="accent2"/>
+              </a:fillRef>
+              <a:effectRef idx="0">
+                <a:schemeClr val="accent2"/>
+              </a:effectRef>
+              <a:fontRef idx="minor">
+                <a:schemeClr val="lt1"/>
+              </a:fontRef>
+            </p:style>
+            <p:txBody>
+              <a:bodyPr rtlCol="0" anchor="ctr"/>
+              <a:lstStyle/>
+              <a:p>
+                <a:pPr algn="ctr"/>
+                <a14:m>
+                  <m:oMathPara xmlns:m="http://schemas.openxmlformats.org/officeDocument/2006/math">
+                    <m:oMathParaPr>
+                      <m:jc m:val="centerGroup"/>
+                    </m:oMathParaPr>
+                    <m:oMath xmlns:m="http://schemas.openxmlformats.org/officeDocument/2006/math">
+                      <m:sSubSup>
+                        <m:sSubSupPr>
+                          <m:ctrlPr>
+                            <a:rPr lang="en-GB" b="0" i="1" smtClean="0">
+                              <a:latin typeface="Cambria Math" panose="02040503050406030204" pitchFamily="18" charset="0"/>
+                            </a:rPr>
+                          </m:ctrlPr>
+                        </m:sSubSupPr>
+                        <m:e>
+                          <m:r>
+                            <a:rPr lang="en-GB" b="0" i="1" smtClean="0">
+                              <a:latin typeface="Cambria Math" panose="02040503050406030204" pitchFamily="18" charset="0"/>
+                            </a:rPr>
+                            <m:t>𝐸</m:t>
+                          </m:r>
+                        </m:e>
+                        <m:sub>
+                          <m:r>
+                            <a:rPr lang="en-GB" b="0" i="1" smtClean="0">
+                              <a:latin typeface="Cambria Math" panose="02040503050406030204" pitchFamily="18" charset="0"/>
+                            </a:rPr>
+                            <m:t>𝑝</m:t>
+                          </m:r>
+                        </m:sub>
+                        <m:sup>
+                          <m:r>
+                            <a:rPr lang="en-GB" b="0" i="1" smtClean="0">
+                              <a:latin typeface="Cambria Math" panose="02040503050406030204" pitchFamily="18" charset="0"/>
+                            </a:rPr>
+                            <m:t>+</m:t>
+                          </m:r>
+                        </m:sup>
+                      </m:sSubSup>
+                    </m:oMath>
+                  </m:oMathPara>
+                </a14:m>
+                <a:endParaRPr lang="en-GB" b="0" dirty="0"/>
+              </a:p>
+              <a:p>
+                <a:pPr algn="ctr"/>
+                <a14:m>
+                  <m:oMathPara xmlns:m="http://schemas.openxmlformats.org/officeDocument/2006/math">
+                    <m:oMathParaPr>
+                      <m:jc m:val="centerGroup"/>
+                    </m:oMathParaPr>
+                    <m:oMath xmlns:m="http://schemas.openxmlformats.org/officeDocument/2006/math">
+                      <m:sSubSup>
+                        <m:sSubSupPr>
+                          <m:ctrlPr>
+                            <a:rPr lang="en-GB" b="0" i="1" smtClean="0">
+                              <a:latin typeface="Cambria Math" panose="02040503050406030204" pitchFamily="18" charset="0"/>
+                            </a:rPr>
+                          </m:ctrlPr>
+                        </m:sSubSupPr>
+                        <m:e>
+                          <m:r>
+                            <a:rPr lang="en-GB" b="0" i="1" smtClean="0">
+                              <a:latin typeface="Cambria Math" panose="02040503050406030204" pitchFamily="18" charset="0"/>
+                            </a:rPr>
+                            <m:t>𝐸</m:t>
+                          </m:r>
+                        </m:e>
+                        <m:sub>
+                          <m:r>
+                            <a:rPr lang="en-GB" b="0" i="1" smtClean="0">
+                              <a:latin typeface="Cambria Math" panose="02040503050406030204" pitchFamily="18" charset="0"/>
+                            </a:rPr>
+                            <m:t>𝑠</m:t>
+                          </m:r>
+                        </m:sub>
+                        <m:sup>
+                          <m:r>
+                            <a:rPr lang="en-GB" b="0" i="1" smtClean="0">
+                              <a:latin typeface="Cambria Math" panose="02040503050406030204" pitchFamily="18" charset="0"/>
+                            </a:rPr>
+                            <m:t>+</m:t>
+                          </m:r>
+                        </m:sup>
+                      </m:sSubSup>
+                    </m:oMath>
+                  </m:oMathPara>
+                </a14:m>
+                <a:endParaRPr lang="en-GB" b="0" dirty="0"/>
+              </a:p>
+              <a:p>
+                <a:pPr algn="ctr"/>
+                <a:r>
+                  <a:rPr lang="en-GB" dirty="0"/>
+                  <a:t>0</a:t>
+                </a:r>
+              </a:p>
+              <a:p>
+                <a:pPr algn="ctr"/>
+                <a:r>
+                  <a:rPr lang="en-GB" dirty="0"/>
+                  <a:t>0</a:t>
+                </a:r>
+              </a:p>
+            </p:txBody>
+          </p:sp>
+        </mc:Choice>
+        <mc:Fallback xmlns="">
+          <p:sp>
+            <p:nvSpPr>
+              <p:cNvPr id="83" name="Rectangle: Rounded Corners 82">
+                <a:extLst>
+                  <a:ext uri="{FF2B5EF4-FFF2-40B4-BE49-F238E27FC236}">
+                    <a16:creationId xmlns:a16="http://schemas.microsoft.com/office/drawing/2014/main" id="{8F09C48D-6778-32B9-464A-42D1C515870F}"/>
+                  </a:ext>
+                </a:extLst>
+              </p:cNvPr>
+              <p:cNvSpPr>
+                <a:spLocks noRot="1" noChangeAspect="1" noMove="1" noResize="1" noEditPoints="1" noAdjustHandles="1" noChangeArrowheads="1" noChangeShapeType="1" noTextEdit="1"/>
+              </p:cNvSpPr>
+              <p:nvPr/>
+            </p:nvSpPr>
+            <p:spPr>
+              <a:xfrm>
+                <a:off x="10630406" y="2644664"/>
+                <a:ext cx="814098" cy="1801577"/>
+              </a:xfrm>
+              <a:prstGeom prst="roundRect">
+                <a:avLst/>
+              </a:prstGeom>
+              <a:blipFill>
+                <a:blip r:embed="rId2"/>
+                <a:stretch>
+                  <a:fillRect/>
+                </a:stretch>
+              </a:blipFill>
+            </p:spPr>
+            <p:txBody>
+              <a:bodyPr/>
+              <a:lstStyle/>
+              <a:p>
+                <a:r>
+                  <a:rPr lang="en-GB">
+                    <a:noFill/>
+                  </a:rPr>
+                  <a:t> </a:t>
+                </a:r>
+              </a:p>
+            </p:txBody>
+          </p:sp>
+        </mc:Fallback>
+      </mc:AlternateContent>
+      <mc:AlternateContent xmlns:mc="http://schemas.openxmlformats.org/markup-compatibility/2006" xmlns:a14="http://schemas.microsoft.com/office/drawing/2010/main">
+        <mc:Choice Requires="a14">
+          <p:sp>
+            <p:nvSpPr>
+              <p:cNvPr id="84" name="Rectangle: Rounded Corners 83">
+                <a:extLst>
+                  <a:ext uri="{FF2B5EF4-FFF2-40B4-BE49-F238E27FC236}">
+                    <a16:creationId xmlns:a16="http://schemas.microsoft.com/office/drawing/2014/main" id="{0A57833D-9670-C90B-BA02-1A11CBEEDA99}"/>
+                  </a:ext>
+                </a:extLst>
+              </p:cNvPr>
+              <p:cNvSpPr/>
+              <p:nvPr/>
+            </p:nvSpPr>
+            <p:spPr>
+              <a:xfrm>
+                <a:off x="147199" y="2679516"/>
+                <a:ext cx="814098" cy="1801577"/>
+              </a:xfrm>
+              <a:prstGeom prst="roundRect">
+                <a:avLst/>
+              </a:prstGeom>
+            </p:spPr>
+            <p:style>
+              <a:lnRef idx="2">
+                <a:schemeClr val="accent2">
+                  <a:shade val="15000"/>
+                </a:schemeClr>
+              </a:lnRef>
+              <a:fillRef idx="1">
+                <a:schemeClr val="accent2"/>
+              </a:fillRef>
+              <a:effectRef idx="0">
+                <a:schemeClr val="accent2"/>
+              </a:effectRef>
+              <a:fontRef idx="minor">
+                <a:schemeClr val="lt1"/>
+              </a:fontRef>
+            </p:style>
+            <p:txBody>
+              <a:bodyPr rtlCol="0" anchor="ctr"/>
+              <a:lstStyle/>
+              <a:p>
+                <a:pPr algn="ctr"/>
+                <a14:m>
+                  <m:oMathPara xmlns:m="http://schemas.openxmlformats.org/officeDocument/2006/math">
+                    <m:oMathParaPr>
+                      <m:jc m:val="centerGroup"/>
+                    </m:oMathParaPr>
+                    <m:oMath xmlns:m="http://schemas.openxmlformats.org/officeDocument/2006/math">
+                      <m:sSubSup>
+                        <m:sSubSupPr>
+                          <m:ctrlPr>
+                            <a:rPr lang="en-GB" b="0" i="1" smtClean="0">
+                              <a:latin typeface="Cambria Math" panose="02040503050406030204" pitchFamily="18" charset="0"/>
+                            </a:rPr>
+                          </m:ctrlPr>
+                        </m:sSubSupPr>
+                        <m:e>
+                          <m:r>
+                            <a:rPr lang="en-GB" b="0" i="1" smtClean="0">
+                              <a:latin typeface="Cambria Math" panose="02040503050406030204" pitchFamily="18" charset="0"/>
+                            </a:rPr>
+                            <m:t>𝐸</m:t>
+                          </m:r>
+                        </m:e>
+                        <m:sub>
+                          <m:r>
+                            <a:rPr lang="en-GB" b="0" i="1" smtClean="0">
+                              <a:latin typeface="Cambria Math" panose="02040503050406030204" pitchFamily="18" charset="0"/>
+                            </a:rPr>
+                            <m:t>𝑝</m:t>
+                          </m:r>
+                        </m:sub>
+                        <m:sup>
+                          <m:r>
+                            <a:rPr lang="en-GB" b="0" i="1" smtClean="0">
+                              <a:latin typeface="Cambria Math" panose="02040503050406030204" pitchFamily="18" charset="0"/>
+                            </a:rPr>
+                            <m:t>+</m:t>
+                          </m:r>
+                        </m:sup>
+                      </m:sSubSup>
+                    </m:oMath>
+                  </m:oMathPara>
+                </a14:m>
+                <a:endParaRPr lang="en-GB" b="0" dirty="0"/>
+              </a:p>
+              <a:p>
+                <a:pPr algn="ctr"/>
+                <a14:m>
+                  <m:oMathPara xmlns:m="http://schemas.openxmlformats.org/officeDocument/2006/math">
+                    <m:oMathParaPr>
+                      <m:jc m:val="centerGroup"/>
+                    </m:oMathParaPr>
+                    <m:oMath xmlns:m="http://schemas.openxmlformats.org/officeDocument/2006/math">
+                      <m:sSubSup>
+                        <m:sSubSupPr>
+                          <m:ctrlPr>
+                            <a:rPr lang="en-GB" b="0" i="1" smtClean="0">
+                              <a:latin typeface="Cambria Math" panose="02040503050406030204" pitchFamily="18" charset="0"/>
+                            </a:rPr>
+                          </m:ctrlPr>
+                        </m:sSubSupPr>
+                        <m:e>
+                          <m:r>
+                            <a:rPr lang="en-GB" b="0" i="1" smtClean="0">
+                              <a:latin typeface="Cambria Math" panose="02040503050406030204" pitchFamily="18" charset="0"/>
+                            </a:rPr>
+                            <m:t>𝐸</m:t>
+                          </m:r>
+                        </m:e>
+                        <m:sub>
+                          <m:r>
+                            <a:rPr lang="en-GB" b="0" i="1" smtClean="0">
+                              <a:latin typeface="Cambria Math" panose="02040503050406030204" pitchFamily="18" charset="0"/>
+                            </a:rPr>
+                            <m:t>𝑠</m:t>
+                          </m:r>
+                        </m:sub>
+                        <m:sup>
+                          <m:r>
+                            <a:rPr lang="en-GB" b="0" i="1" smtClean="0">
+                              <a:latin typeface="Cambria Math" panose="02040503050406030204" pitchFamily="18" charset="0"/>
+                            </a:rPr>
+                            <m:t>+</m:t>
+                          </m:r>
+                        </m:sup>
+                      </m:sSubSup>
+                    </m:oMath>
+                  </m:oMathPara>
+                </a14:m>
+                <a:endParaRPr lang="en-GB" b="0" dirty="0"/>
+              </a:p>
+              <a:p>
+                <a:pPr algn="ctr"/>
+                <a14:m>
+                  <m:oMathPara xmlns:m="http://schemas.openxmlformats.org/officeDocument/2006/math">
+                    <m:oMathParaPr>
+                      <m:jc m:val="centerGroup"/>
+                    </m:oMathParaPr>
+                    <m:oMath xmlns:m="http://schemas.openxmlformats.org/officeDocument/2006/math">
+                      <m:sSubSup>
+                        <m:sSubSupPr>
+                          <m:ctrlPr>
+                            <a:rPr lang="en-GB" b="0" i="1" smtClean="0">
+                              <a:latin typeface="Cambria Math" panose="02040503050406030204" pitchFamily="18" charset="0"/>
+                            </a:rPr>
+                          </m:ctrlPr>
+                        </m:sSubSupPr>
+                        <m:e>
+                          <m:r>
+                            <a:rPr lang="en-GB" b="0" i="1" smtClean="0">
+                              <a:latin typeface="Cambria Math" panose="02040503050406030204" pitchFamily="18" charset="0"/>
+                            </a:rPr>
+                            <m:t>𝐸</m:t>
+                          </m:r>
+                        </m:e>
+                        <m:sub>
+                          <m:r>
+                            <a:rPr lang="en-GB" b="0" i="1" smtClean="0">
+                              <a:latin typeface="Cambria Math" panose="02040503050406030204" pitchFamily="18" charset="0"/>
+                            </a:rPr>
+                            <m:t>𝑝</m:t>
+                          </m:r>
+                        </m:sub>
+                        <m:sup>
+                          <m:r>
+                            <a:rPr lang="en-GB" b="0" i="1" smtClean="0">
+                              <a:latin typeface="Cambria Math" panose="02040503050406030204" pitchFamily="18" charset="0"/>
+                            </a:rPr>
+                            <m:t>−</m:t>
+                          </m:r>
+                        </m:sup>
+                      </m:sSubSup>
+                    </m:oMath>
+                  </m:oMathPara>
+                </a14:m>
+                <a:endParaRPr lang="en-GB" dirty="0"/>
+              </a:p>
+              <a:p>
+                <a:pPr algn="ctr"/>
+                <a14:m>
+                  <m:oMathPara xmlns:m="http://schemas.openxmlformats.org/officeDocument/2006/math">
+                    <m:oMathParaPr>
+                      <m:jc m:val="centerGroup"/>
+                    </m:oMathParaPr>
+                    <m:oMath xmlns:m="http://schemas.openxmlformats.org/officeDocument/2006/math">
+                      <m:sSubSup>
+                        <m:sSubSupPr>
+                          <m:ctrlPr>
+                            <a:rPr lang="en-GB" b="0" i="1" smtClean="0">
+                              <a:latin typeface="Cambria Math" panose="02040503050406030204" pitchFamily="18" charset="0"/>
+                            </a:rPr>
+                          </m:ctrlPr>
+                        </m:sSubSupPr>
+                        <m:e>
+                          <m:r>
+                            <a:rPr lang="en-GB" b="0" i="1" smtClean="0">
+                              <a:latin typeface="Cambria Math" panose="02040503050406030204" pitchFamily="18" charset="0"/>
+                            </a:rPr>
+                            <m:t>𝐸</m:t>
+                          </m:r>
+                        </m:e>
+                        <m:sub>
+                          <m:r>
+                            <a:rPr lang="en-GB" b="0" i="1" smtClean="0">
+                              <a:latin typeface="Cambria Math" panose="02040503050406030204" pitchFamily="18" charset="0"/>
+                            </a:rPr>
+                            <m:t>𝑠</m:t>
+                          </m:r>
+                        </m:sub>
+                        <m:sup>
+                          <m:r>
+                            <a:rPr lang="en-GB" b="0" i="1" smtClean="0">
+                              <a:latin typeface="Cambria Math" panose="02040503050406030204" pitchFamily="18" charset="0"/>
+                            </a:rPr>
+                            <m:t>−</m:t>
+                          </m:r>
+                        </m:sup>
+                      </m:sSubSup>
+                    </m:oMath>
+                  </m:oMathPara>
+                </a14:m>
+                <a:endParaRPr lang="en-GB" dirty="0"/>
+              </a:p>
+            </p:txBody>
+          </p:sp>
+        </mc:Choice>
+        <mc:Fallback xmlns="">
+          <p:sp>
+            <p:nvSpPr>
+              <p:cNvPr id="84" name="Rectangle: Rounded Corners 83">
+                <a:extLst>
+                  <a:ext uri="{FF2B5EF4-FFF2-40B4-BE49-F238E27FC236}">
+                    <a16:creationId xmlns:a16="http://schemas.microsoft.com/office/drawing/2014/main" id="{0A57833D-9670-C90B-BA02-1A11CBEEDA99}"/>
+                  </a:ext>
+                </a:extLst>
+              </p:cNvPr>
+              <p:cNvSpPr>
+                <a:spLocks noRot="1" noChangeAspect="1" noMove="1" noResize="1" noEditPoints="1" noAdjustHandles="1" noChangeArrowheads="1" noChangeShapeType="1" noTextEdit="1"/>
+              </p:cNvSpPr>
+              <p:nvPr/>
+            </p:nvSpPr>
+            <p:spPr>
+              <a:xfrm>
+                <a:off x="147199" y="2679516"/>
+                <a:ext cx="814098" cy="1801577"/>
+              </a:xfrm>
+              <a:prstGeom prst="roundRect">
+                <a:avLst/>
+              </a:prstGeom>
+              <a:blipFill>
+                <a:blip r:embed="rId3"/>
+                <a:stretch>
+                  <a:fillRect/>
+                </a:stretch>
+              </a:blipFill>
+            </p:spPr>
+            <p:txBody>
+              <a:bodyPr/>
+              <a:lstStyle/>
+              <a:p>
+                <a:r>
+                  <a:rPr lang="en-GB">
+                    <a:noFill/>
+                  </a:rPr>
+                  <a:t> </a:t>
+                </a:r>
+              </a:p>
+            </p:txBody>
+          </p:sp>
+        </mc:Fallback>
+      </mc:AlternateContent>
+      <p:sp>
+        <p:nvSpPr>
+          <p:cNvPr id="85" name="TextBox 84">
+            <a:extLst>
+              <a:ext uri="{FF2B5EF4-FFF2-40B4-BE49-F238E27FC236}">
+                <a16:creationId xmlns:a16="http://schemas.microsoft.com/office/drawing/2014/main" id="{FBC2E278-DA25-B683-8858-0DB2B92B952E}"/>
+              </a:ext>
+            </a:extLst>
+          </p:cNvPr>
+          <p:cNvSpPr txBox="1"/>
+          <p:nvPr/>
+        </p:nvSpPr>
+        <p:spPr>
+          <a:xfrm>
+            <a:off x="-105705" y="4677728"/>
+            <a:ext cx="1331903" cy="369332"/>
+          </a:xfrm>
+          <a:prstGeom prst="rect">
+            <a:avLst/>
+          </a:prstGeom>
+          <a:noFill/>
+        </p:spPr>
+        <p:txBody>
+          <a:bodyPr wrap="none" rtlCol="0">
+            <a:spAutoFit/>
+          </a:bodyPr>
+          <a:lstStyle/>
+          <a:p>
+            <a:r>
+              <a:rPr lang="en-GB" dirty="0" err="1"/>
+              <a:t>Supermatrix</a:t>
+            </a:r>
+            <a:endParaRPr lang="en-GB" dirty="0"/>
+          </a:p>
+        </p:txBody>
+      </p:sp>
+      <p:sp>
+        <p:nvSpPr>
+          <p:cNvPr id="86" name="TextBox 85">
+            <a:extLst>
+              <a:ext uri="{FF2B5EF4-FFF2-40B4-BE49-F238E27FC236}">
+                <a16:creationId xmlns:a16="http://schemas.microsoft.com/office/drawing/2014/main" id="{5BF78BA9-9B71-F5FC-3E43-9862277DF263}"/>
+              </a:ext>
+            </a:extLst>
+          </p:cNvPr>
+          <p:cNvSpPr txBox="1"/>
+          <p:nvPr/>
+        </p:nvSpPr>
+        <p:spPr>
+          <a:xfrm>
+            <a:off x="10455662" y="4671691"/>
+            <a:ext cx="1136337" cy="369332"/>
+          </a:xfrm>
+          <a:prstGeom prst="rect">
+            <a:avLst/>
+          </a:prstGeom>
+          <a:noFill/>
+        </p:spPr>
+        <p:txBody>
+          <a:bodyPr wrap="none" rtlCol="0">
+            <a:spAutoFit/>
+          </a:bodyPr>
+          <a:lstStyle/>
+          <a:p>
+            <a:r>
+              <a:rPr lang="en-GB" dirty="0"/>
+              <a:t>Submatrix</a:t>
+            </a:r>
+          </a:p>
+        </p:txBody>
+      </p:sp>
+      <mc:AlternateContent xmlns:mc="http://schemas.openxmlformats.org/markup-compatibility/2006" xmlns:a14="http://schemas.microsoft.com/office/drawing/2010/main">
+        <mc:Choice Requires="a14">
+          <p:sp>
+            <p:nvSpPr>
+              <p:cNvPr id="89" name="Oval 88">
+                <a:extLst>
+                  <a:ext uri="{FF2B5EF4-FFF2-40B4-BE49-F238E27FC236}">
+                    <a16:creationId xmlns:a16="http://schemas.microsoft.com/office/drawing/2014/main" id="{7A88E250-FF49-88E5-BB7C-186A09F325C0}"/>
+                  </a:ext>
+                </a:extLst>
+              </p:cNvPr>
+              <p:cNvSpPr/>
+              <p:nvPr/>
+            </p:nvSpPr>
+            <p:spPr>
+              <a:xfrm>
+                <a:off x="2856809" y="5041023"/>
+                <a:ext cx="619162" cy="626615"/>
+              </a:xfrm>
+              <a:prstGeom prst="ellipse">
+                <a:avLst/>
+              </a:prstGeom>
+            </p:spPr>
+            <p:style>
+              <a:lnRef idx="2">
+                <a:schemeClr val="accent1">
+                  <a:shade val="15000"/>
+                </a:schemeClr>
+              </a:lnRef>
+              <a:fillRef idx="1">
+                <a:schemeClr val="accent1"/>
+              </a:fillRef>
+              <a:effectRef idx="0">
+                <a:schemeClr val="accent1"/>
+              </a:effectRef>
+              <a:fontRef idx="minor">
+                <a:schemeClr val="lt1"/>
+              </a:fontRef>
+            </p:style>
+            <p:txBody>
+              <a:bodyPr rtlCol="0" anchor="ctr"/>
+              <a:lstStyle/>
+              <a:p>
+                <a:pPr/>
+                <a14:m>
+                  <m:oMathPara xmlns:m="http://schemas.openxmlformats.org/officeDocument/2006/math">
+                    <m:oMathParaPr>
+                      <m:jc m:val="centerGroup"/>
+                    </m:oMathParaPr>
+                    <m:oMath xmlns:m="http://schemas.openxmlformats.org/officeDocument/2006/math">
+                      <m:sSub>
+                        <m:sSubPr>
+                          <m:ctrlPr>
+                            <a:rPr lang="en-GB" sz="1800" b="0" i="1" smtClean="0">
+                              <a:latin typeface="Cambria Math" panose="02040503050406030204" pitchFamily="18" charset="0"/>
+                            </a:rPr>
+                          </m:ctrlPr>
+                        </m:sSubPr>
+                        <m:e>
+                          <m:acc>
+                            <m:accPr>
+                              <m:chr m:val="̅"/>
+                              <m:ctrlPr>
+                                <a:rPr lang="en-GB" sz="1800" b="0" i="1" smtClean="0">
+                                  <a:latin typeface="Cambria Math" panose="02040503050406030204" pitchFamily="18" charset="0"/>
+                                </a:rPr>
+                              </m:ctrlPr>
+                            </m:accPr>
+                            <m:e>
+                              <m:r>
+                                <a:rPr lang="en-GB" sz="1800" b="0" i="1" smtClean="0">
+                                  <a:latin typeface="Cambria Math" panose="02040503050406030204" pitchFamily="18" charset="0"/>
+                                  <a:ea typeface="Cambria Math" panose="02040503050406030204" pitchFamily="18" charset="0"/>
+                                </a:rPr>
+                                <m:t>𝜓</m:t>
+                              </m:r>
+                            </m:e>
+                          </m:acc>
+                        </m:e>
+                        <m:sub>
+                          <m:r>
+                            <a:rPr lang="en-GB" sz="1800" b="0" i="1" smtClean="0">
+                              <a:latin typeface="Cambria Math" panose="02040503050406030204" pitchFamily="18" charset="0"/>
+                              <a:ea typeface="Cambria Math" panose="02040503050406030204" pitchFamily="18" charset="0"/>
+                            </a:rPr>
+                            <m:t>2</m:t>
+                          </m:r>
+                        </m:sub>
+                      </m:sSub>
+                    </m:oMath>
+                  </m:oMathPara>
+                </a14:m>
+                <a:endParaRPr lang="el-GR" sz="1800" b="1" baseline="-25000" dirty="0">
+                  <a:latin typeface="MS Shell Dlg 2" panose="020B0604030504040204" pitchFamily="34" charset="0"/>
+                </a:endParaRPr>
+              </a:p>
+            </p:txBody>
+          </p:sp>
+        </mc:Choice>
+        <mc:Fallback xmlns="">
+          <p:sp>
+            <p:nvSpPr>
+              <p:cNvPr id="89" name="Oval 88">
+                <a:extLst>
+                  <a:ext uri="{FF2B5EF4-FFF2-40B4-BE49-F238E27FC236}">
+                    <a16:creationId xmlns:a16="http://schemas.microsoft.com/office/drawing/2014/main" id="{7A88E250-FF49-88E5-BB7C-186A09F325C0}"/>
+                  </a:ext>
+                </a:extLst>
+              </p:cNvPr>
+              <p:cNvSpPr>
+                <a:spLocks noRot="1" noChangeAspect="1" noMove="1" noResize="1" noEditPoints="1" noAdjustHandles="1" noChangeArrowheads="1" noChangeShapeType="1" noTextEdit="1"/>
+              </p:cNvSpPr>
+              <p:nvPr/>
+            </p:nvSpPr>
+            <p:spPr>
+              <a:xfrm>
+                <a:off x="2856809" y="5041023"/>
+                <a:ext cx="619162" cy="626615"/>
+              </a:xfrm>
+              <a:prstGeom prst="ellipse">
+                <a:avLst/>
+              </a:prstGeom>
+              <a:blipFill>
+                <a:blip r:embed="rId4"/>
+                <a:stretch>
+                  <a:fillRect/>
+                </a:stretch>
+              </a:blipFill>
+            </p:spPr>
+            <p:txBody>
+              <a:bodyPr/>
+              <a:lstStyle/>
+              <a:p>
+                <a:r>
+                  <a:rPr lang="en-GB">
+                    <a:noFill/>
+                  </a:rPr>
+                  <a:t> </a:t>
+                </a:r>
+              </a:p>
+            </p:txBody>
+          </p:sp>
+        </mc:Fallback>
+      </mc:AlternateContent>
+      <mc:AlternateContent xmlns:mc="http://schemas.openxmlformats.org/markup-compatibility/2006" xmlns:a14="http://schemas.microsoft.com/office/drawing/2010/main">
+        <mc:Choice Requires="a14">
+          <p:sp>
+            <p:nvSpPr>
+              <p:cNvPr id="90" name="Oval 89">
+                <a:extLst>
+                  <a:ext uri="{FF2B5EF4-FFF2-40B4-BE49-F238E27FC236}">
+                    <a16:creationId xmlns:a16="http://schemas.microsoft.com/office/drawing/2014/main" id="{096A022A-8F5C-74ED-431C-1C5E4FD1CD77}"/>
+                  </a:ext>
+                </a:extLst>
+              </p:cNvPr>
+              <p:cNvSpPr/>
+              <p:nvPr/>
+            </p:nvSpPr>
+            <p:spPr>
+              <a:xfrm>
+                <a:off x="5790275" y="5056326"/>
+                <a:ext cx="619162" cy="626615"/>
+              </a:xfrm>
+              <a:prstGeom prst="ellipse">
+                <a:avLst/>
+              </a:prstGeom>
+            </p:spPr>
+            <p:style>
+              <a:lnRef idx="2">
+                <a:schemeClr val="accent1">
+                  <a:shade val="15000"/>
+                </a:schemeClr>
+              </a:lnRef>
+              <a:fillRef idx="1">
+                <a:schemeClr val="accent1"/>
+              </a:fillRef>
+              <a:effectRef idx="0">
+                <a:schemeClr val="accent1"/>
+              </a:effectRef>
+              <a:fontRef idx="minor">
+                <a:schemeClr val="lt1"/>
+              </a:fontRef>
+            </p:style>
+            <p:txBody>
+              <a:bodyPr rtlCol="0" anchor="ctr"/>
+              <a:lstStyle/>
+              <a:p>
+                <a:pPr/>
+                <a14:m>
+                  <m:oMathPara xmlns:m="http://schemas.openxmlformats.org/officeDocument/2006/math">
+                    <m:oMathParaPr>
+                      <m:jc m:val="centerGroup"/>
+                    </m:oMathParaPr>
+                    <m:oMath xmlns:m="http://schemas.openxmlformats.org/officeDocument/2006/math">
+                      <m:sSub>
+                        <m:sSubPr>
+                          <m:ctrlPr>
+                            <a:rPr lang="en-GB" sz="1800" b="0" i="1" smtClean="0">
+                              <a:latin typeface="Cambria Math" panose="02040503050406030204" pitchFamily="18" charset="0"/>
+                            </a:rPr>
+                          </m:ctrlPr>
+                        </m:sSubPr>
+                        <m:e>
+                          <m:acc>
+                            <m:accPr>
+                              <m:chr m:val="̅"/>
+                              <m:ctrlPr>
+                                <a:rPr lang="en-GB" sz="1800" b="0" i="1" smtClean="0">
+                                  <a:latin typeface="Cambria Math" panose="02040503050406030204" pitchFamily="18" charset="0"/>
+                                </a:rPr>
+                              </m:ctrlPr>
+                            </m:accPr>
+                            <m:e>
+                              <m:r>
+                                <a:rPr lang="en-GB" sz="1800" b="0" i="1" smtClean="0">
+                                  <a:latin typeface="Cambria Math" panose="02040503050406030204" pitchFamily="18" charset="0"/>
+                                  <a:ea typeface="Cambria Math" panose="02040503050406030204" pitchFamily="18" charset="0"/>
+                                </a:rPr>
+                                <m:t>𝜓</m:t>
+                              </m:r>
+                            </m:e>
+                          </m:acc>
+                        </m:e>
+                        <m:sub>
+                          <m:r>
+                            <a:rPr lang="en-GB" sz="1800" b="0" i="1" smtClean="0">
+                              <a:latin typeface="Cambria Math" panose="02040503050406030204" pitchFamily="18" charset="0"/>
+                            </a:rPr>
+                            <m:t>𝑖</m:t>
+                          </m:r>
+                        </m:sub>
+                      </m:sSub>
+                    </m:oMath>
+                  </m:oMathPara>
+                </a14:m>
+                <a:endParaRPr lang="el-GR" sz="1800" b="1" baseline="-25000" dirty="0">
+                  <a:latin typeface="MS Shell Dlg 2" panose="020B0604030504040204" pitchFamily="34" charset="0"/>
+                </a:endParaRPr>
+              </a:p>
+            </p:txBody>
+          </p:sp>
+        </mc:Choice>
+        <mc:Fallback xmlns="">
+          <p:sp>
+            <p:nvSpPr>
+              <p:cNvPr id="90" name="Oval 89">
+                <a:extLst>
+                  <a:ext uri="{FF2B5EF4-FFF2-40B4-BE49-F238E27FC236}">
+                    <a16:creationId xmlns:a16="http://schemas.microsoft.com/office/drawing/2014/main" id="{096A022A-8F5C-74ED-431C-1C5E4FD1CD77}"/>
+                  </a:ext>
+                </a:extLst>
+              </p:cNvPr>
+              <p:cNvSpPr>
+                <a:spLocks noRot="1" noChangeAspect="1" noMove="1" noResize="1" noEditPoints="1" noAdjustHandles="1" noChangeArrowheads="1" noChangeShapeType="1" noTextEdit="1"/>
+              </p:cNvSpPr>
+              <p:nvPr/>
+            </p:nvSpPr>
+            <p:spPr>
+              <a:xfrm>
+                <a:off x="5790275" y="5056326"/>
+                <a:ext cx="619162" cy="626615"/>
+              </a:xfrm>
+              <a:prstGeom prst="ellipse">
+                <a:avLst/>
+              </a:prstGeom>
+              <a:blipFill>
+                <a:blip r:embed="rId5"/>
+                <a:stretch>
+                  <a:fillRect/>
+                </a:stretch>
+              </a:blipFill>
+            </p:spPr>
+            <p:txBody>
+              <a:bodyPr/>
+              <a:lstStyle/>
+              <a:p>
+                <a:r>
+                  <a:rPr lang="en-GB">
+                    <a:noFill/>
+                  </a:rPr>
+                  <a:t> </a:t>
+                </a:r>
+              </a:p>
+            </p:txBody>
+          </p:sp>
+        </mc:Fallback>
+      </mc:AlternateContent>
+      <mc:AlternateContent xmlns:mc="http://schemas.openxmlformats.org/markup-compatibility/2006" xmlns:a14="http://schemas.microsoft.com/office/drawing/2010/main">
+        <mc:Choice Requires="a14">
+          <p:sp>
+            <p:nvSpPr>
+              <p:cNvPr id="91" name="Oval 90">
+                <a:extLst>
+                  <a:ext uri="{FF2B5EF4-FFF2-40B4-BE49-F238E27FC236}">
+                    <a16:creationId xmlns:a16="http://schemas.microsoft.com/office/drawing/2014/main" id="{8F7A4559-8628-49D3-5667-ADB789FDCE1B}"/>
+                  </a:ext>
+                </a:extLst>
+              </p:cNvPr>
+              <p:cNvSpPr/>
+              <p:nvPr/>
+            </p:nvSpPr>
+            <p:spPr>
+              <a:xfrm>
+                <a:off x="6819569" y="5056326"/>
+                <a:ext cx="619162" cy="626615"/>
+              </a:xfrm>
+              <a:prstGeom prst="ellipse">
+                <a:avLst/>
+              </a:prstGeom>
+            </p:spPr>
+            <p:style>
+              <a:lnRef idx="2">
+                <a:schemeClr val="accent1">
+                  <a:shade val="15000"/>
+                </a:schemeClr>
+              </a:lnRef>
+              <a:fillRef idx="1">
+                <a:schemeClr val="accent1"/>
+              </a:fillRef>
+              <a:effectRef idx="0">
+                <a:schemeClr val="accent1"/>
+              </a:effectRef>
+              <a:fontRef idx="minor">
+                <a:schemeClr val="lt1"/>
+              </a:fontRef>
+            </p:style>
+            <p:txBody>
+              <a:bodyPr wrap="none" lIns="36000" rtlCol="0" anchor="ctr"/>
+              <a:lstStyle/>
+              <a:p>
+                <a:pPr/>
+                <a14:m>
+                  <m:oMathPara xmlns:m="http://schemas.openxmlformats.org/officeDocument/2006/math">
+                    <m:oMathParaPr>
+                      <m:jc m:val="centerGroup"/>
+                    </m:oMathParaPr>
+                    <m:oMath xmlns:m="http://schemas.openxmlformats.org/officeDocument/2006/math">
+                      <m:sSub>
+                        <m:sSubPr>
+                          <m:ctrlPr>
+                            <a:rPr lang="en-GB" sz="1800" b="0" i="1" smtClean="0">
+                              <a:latin typeface="Cambria Math" panose="02040503050406030204" pitchFamily="18" charset="0"/>
+                            </a:rPr>
+                          </m:ctrlPr>
+                        </m:sSubPr>
+                        <m:e>
+                          <m:acc>
+                            <m:accPr>
+                              <m:chr m:val="̅"/>
+                              <m:ctrlPr>
+                                <a:rPr lang="en-GB" sz="1800" b="0" i="1" smtClean="0">
+                                  <a:latin typeface="Cambria Math" panose="02040503050406030204" pitchFamily="18" charset="0"/>
+                                </a:rPr>
+                              </m:ctrlPr>
+                            </m:accPr>
+                            <m:e>
+                              <m:r>
+                                <a:rPr lang="en-GB" sz="1800" b="0" i="1" smtClean="0">
+                                  <a:latin typeface="Cambria Math" panose="02040503050406030204" pitchFamily="18" charset="0"/>
+                                  <a:ea typeface="Cambria Math" panose="02040503050406030204" pitchFamily="18" charset="0"/>
+                                </a:rPr>
+                                <m:t>𝜓</m:t>
+                              </m:r>
+                            </m:e>
+                          </m:acc>
+                        </m:e>
+                        <m:sub>
+                          <m:r>
+                            <a:rPr lang="en-GB" sz="1800" b="0" i="1" smtClean="0">
+                              <a:latin typeface="Cambria Math" panose="02040503050406030204" pitchFamily="18" charset="0"/>
+                            </a:rPr>
+                            <m:t>𝑖</m:t>
+                          </m:r>
+                          <m:r>
+                            <a:rPr lang="en-GB" sz="1800" b="0" i="1" smtClean="0">
+                              <a:latin typeface="Cambria Math" panose="02040503050406030204" pitchFamily="18" charset="0"/>
+                            </a:rPr>
+                            <m:t>+1</m:t>
+                          </m:r>
+                        </m:sub>
+                      </m:sSub>
+                    </m:oMath>
+                  </m:oMathPara>
+                </a14:m>
+                <a:endParaRPr lang="el-GR" sz="1800" b="1" baseline="-25000" dirty="0">
+                  <a:latin typeface="MS Shell Dlg 2" panose="020B0604030504040204" pitchFamily="34" charset="0"/>
+                </a:endParaRPr>
+              </a:p>
+            </p:txBody>
+          </p:sp>
+        </mc:Choice>
+        <mc:Fallback xmlns="">
+          <p:sp>
+            <p:nvSpPr>
+              <p:cNvPr id="91" name="Oval 90">
+                <a:extLst>
+                  <a:ext uri="{FF2B5EF4-FFF2-40B4-BE49-F238E27FC236}">
+                    <a16:creationId xmlns:a16="http://schemas.microsoft.com/office/drawing/2014/main" id="{8F7A4559-8628-49D3-5667-ADB789FDCE1B}"/>
+                  </a:ext>
+                </a:extLst>
+              </p:cNvPr>
+              <p:cNvSpPr>
+                <a:spLocks noRot="1" noChangeAspect="1" noMove="1" noResize="1" noEditPoints="1" noAdjustHandles="1" noChangeArrowheads="1" noChangeShapeType="1" noTextEdit="1"/>
+              </p:cNvSpPr>
+              <p:nvPr/>
+            </p:nvSpPr>
+            <p:spPr>
+              <a:xfrm>
+                <a:off x="6819569" y="5056326"/>
+                <a:ext cx="619162" cy="626615"/>
+              </a:xfrm>
+              <a:prstGeom prst="ellipse">
+                <a:avLst/>
+              </a:prstGeom>
+              <a:blipFill>
+                <a:blip r:embed="rId6"/>
+                <a:stretch>
+                  <a:fillRect r="-971"/>
+                </a:stretch>
+              </a:blipFill>
+            </p:spPr>
+            <p:txBody>
+              <a:bodyPr/>
+              <a:lstStyle/>
+              <a:p>
+                <a:r>
+                  <a:rPr lang="en-GB">
+                    <a:noFill/>
+                  </a:rPr>
+                  <a:t> </a:t>
+                </a:r>
+              </a:p>
+            </p:txBody>
+          </p:sp>
+        </mc:Fallback>
+      </mc:AlternateContent>
+      <mc:AlternateContent xmlns:mc="http://schemas.openxmlformats.org/markup-compatibility/2006" xmlns:a14="http://schemas.microsoft.com/office/drawing/2010/main">
+        <mc:Choice Requires="a14">
+          <p:sp>
+            <p:nvSpPr>
+              <p:cNvPr id="92" name="Oval 91">
+                <a:extLst>
+                  <a:ext uri="{FF2B5EF4-FFF2-40B4-BE49-F238E27FC236}">
+                    <a16:creationId xmlns:a16="http://schemas.microsoft.com/office/drawing/2014/main" id="{0EFF3480-A88E-7EAD-DB44-FC625E786DC8}"/>
+                  </a:ext>
+                </a:extLst>
+              </p:cNvPr>
+              <p:cNvSpPr/>
+              <p:nvPr/>
+            </p:nvSpPr>
+            <p:spPr>
+              <a:xfrm>
+                <a:off x="8571685" y="5046183"/>
+                <a:ext cx="619162" cy="626615"/>
+              </a:xfrm>
+              <a:prstGeom prst="ellipse">
+                <a:avLst/>
+              </a:prstGeom>
+            </p:spPr>
+            <p:style>
+              <a:lnRef idx="2">
+                <a:schemeClr val="accent1">
+                  <a:shade val="15000"/>
+                </a:schemeClr>
+              </a:lnRef>
+              <a:fillRef idx="1">
+                <a:schemeClr val="accent1"/>
+              </a:fillRef>
+              <a:effectRef idx="0">
+                <a:schemeClr val="accent1"/>
+              </a:effectRef>
+              <a:fontRef idx="minor">
+                <a:schemeClr val="lt1"/>
+              </a:fontRef>
+            </p:style>
+            <p:txBody>
+              <a:bodyPr wrap="none" rtlCol="0" anchor="ctr"/>
+              <a:lstStyle/>
+              <a:p>
+                <a:pPr/>
+                <a14:m>
+                  <m:oMathPara xmlns:m="http://schemas.openxmlformats.org/officeDocument/2006/math">
+                    <m:oMathParaPr>
+                      <m:jc m:val="centerGroup"/>
+                    </m:oMathParaPr>
+                    <m:oMath xmlns:m="http://schemas.openxmlformats.org/officeDocument/2006/math">
+                      <m:sSub>
+                        <m:sSubPr>
+                          <m:ctrlPr>
+                            <a:rPr lang="en-GB" sz="1800" b="0" i="1" smtClean="0">
+                              <a:latin typeface="Cambria Math" panose="02040503050406030204" pitchFamily="18" charset="0"/>
+                            </a:rPr>
+                          </m:ctrlPr>
+                        </m:sSubPr>
+                        <m:e>
+                          <m:acc>
+                            <m:accPr>
+                              <m:chr m:val="̅"/>
+                              <m:ctrlPr>
+                                <a:rPr lang="en-GB" sz="1800" b="0" i="1" smtClean="0">
+                                  <a:latin typeface="Cambria Math" panose="02040503050406030204" pitchFamily="18" charset="0"/>
+                                </a:rPr>
+                              </m:ctrlPr>
+                            </m:accPr>
+                            <m:e>
+                              <m:r>
+                                <a:rPr lang="en-GB" sz="1800" b="0" i="1" smtClean="0">
+                                  <a:latin typeface="Cambria Math" panose="02040503050406030204" pitchFamily="18" charset="0"/>
+                                  <a:ea typeface="Cambria Math" panose="02040503050406030204" pitchFamily="18" charset="0"/>
+                                </a:rPr>
+                                <m:t>𝜓</m:t>
+                              </m:r>
+                            </m:e>
+                          </m:acc>
+                        </m:e>
+                        <m:sub>
+                          <m:r>
+                            <a:rPr lang="en-GB" sz="1800" b="0" i="1" smtClean="0">
+                              <a:latin typeface="Cambria Math" panose="02040503050406030204" pitchFamily="18" charset="0"/>
+                              <a:ea typeface="Cambria Math" panose="02040503050406030204" pitchFamily="18" charset="0"/>
+                            </a:rPr>
+                            <m:t>𝑁</m:t>
+                          </m:r>
+                        </m:sub>
+                      </m:sSub>
+                    </m:oMath>
+                  </m:oMathPara>
+                </a14:m>
+                <a:endParaRPr lang="el-GR" sz="1800" b="1" baseline="-25000" dirty="0">
+                  <a:latin typeface="MS Shell Dlg 2" panose="020B0604030504040204" pitchFamily="34" charset="0"/>
+                </a:endParaRPr>
+              </a:p>
+            </p:txBody>
+          </p:sp>
+        </mc:Choice>
+        <mc:Fallback xmlns="">
+          <p:sp>
+            <p:nvSpPr>
+              <p:cNvPr id="92" name="Oval 91">
+                <a:extLst>
+                  <a:ext uri="{FF2B5EF4-FFF2-40B4-BE49-F238E27FC236}">
+                    <a16:creationId xmlns:a16="http://schemas.microsoft.com/office/drawing/2014/main" id="{0EFF3480-A88E-7EAD-DB44-FC625E786DC8}"/>
+                  </a:ext>
+                </a:extLst>
+              </p:cNvPr>
+              <p:cNvSpPr>
+                <a:spLocks noRot="1" noChangeAspect="1" noMove="1" noResize="1" noEditPoints="1" noAdjustHandles="1" noChangeArrowheads="1" noChangeShapeType="1" noTextEdit="1"/>
+              </p:cNvSpPr>
+              <p:nvPr/>
+            </p:nvSpPr>
+            <p:spPr>
+              <a:xfrm>
+                <a:off x="8571685" y="5046183"/>
+                <a:ext cx="619162" cy="626615"/>
+              </a:xfrm>
+              <a:prstGeom prst="ellipse">
+                <a:avLst/>
+              </a:prstGeom>
+              <a:blipFill>
+                <a:blip r:embed="rId7"/>
+                <a:stretch>
+                  <a:fillRect/>
+                </a:stretch>
+              </a:blipFill>
+            </p:spPr>
+            <p:txBody>
+              <a:bodyPr/>
+              <a:lstStyle/>
+              <a:p>
+                <a:r>
+                  <a:rPr lang="en-GB">
+                    <a:noFill/>
+                  </a:rPr>
+                  <a:t> </a:t>
+                </a:r>
+              </a:p>
+            </p:txBody>
+          </p:sp>
+        </mc:Fallback>
+      </mc:AlternateContent>
+      <mc:AlternateContent xmlns:mc="http://schemas.openxmlformats.org/markup-compatibility/2006" xmlns:a14="http://schemas.microsoft.com/office/drawing/2010/main">
+        <mc:Choice Requires="a14">
+          <p:sp>
+            <p:nvSpPr>
+              <p:cNvPr id="93" name="Oval 92">
+                <a:extLst>
+                  <a:ext uri="{FF2B5EF4-FFF2-40B4-BE49-F238E27FC236}">
+                    <a16:creationId xmlns:a16="http://schemas.microsoft.com/office/drawing/2014/main" id="{B413F8CE-22AD-F6C5-CF44-78B0782F9268}"/>
+                  </a:ext>
+                </a:extLst>
+              </p:cNvPr>
+              <p:cNvSpPr/>
+              <p:nvPr/>
+            </p:nvSpPr>
+            <p:spPr>
+              <a:xfrm>
+                <a:off x="9567155" y="5056326"/>
+                <a:ext cx="619162" cy="626615"/>
+              </a:xfrm>
+              <a:prstGeom prst="ellipse">
+                <a:avLst/>
+              </a:prstGeom>
+            </p:spPr>
+            <p:style>
+              <a:lnRef idx="2">
+                <a:schemeClr val="accent1">
+                  <a:shade val="15000"/>
+                </a:schemeClr>
+              </a:lnRef>
+              <a:fillRef idx="1">
+                <a:schemeClr val="accent1"/>
+              </a:fillRef>
+              <a:effectRef idx="0">
+                <a:schemeClr val="accent1"/>
+              </a:effectRef>
+              <a:fontRef idx="minor">
+                <a:schemeClr val="lt1"/>
+              </a:fontRef>
+            </p:style>
+            <p:txBody>
+              <a:bodyPr wrap="none" lIns="0" rtlCol="0" anchor="ctr"/>
+              <a:lstStyle/>
+              <a:p>
+                <a:pPr/>
+                <a14:m>
+                  <m:oMathPara xmlns:m="http://schemas.openxmlformats.org/officeDocument/2006/math">
+                    <m:oMathParaPr>
+                      <m:jc m:val="centerGroup"/>
+                    </m:oMathParaPr>
+                    <m:oMath xmlns:m="http://schemas.openxmlformats.org/officeDocument/2006/math">
+                      <m:sSub>
+                        <m:sSubPr>
+                          <m:ctrlPr>
+                            <a:rPr lang="en-GB" sz="1800" b="0" i="1" smtClean="0">
+                              <a:latin typeface="Cambria Math" panose="02040503050406030204" pitchFamily="18" charset="0"/>
+                            </a:rPr>
+                          </m:ctrlPr>
+                        </m:sSubPr>
+                        <m:e>
+                          <m:acc>
+                            <m:accPr>
+                              <m:chr m:val="̅"/>
+                              <m:ctrlPr>
+                                <a:rPr lang="en-GB" sz="1800" b="0" i="1" smtClean="0">
+                                  <a:latin typeface="Cambria Math" panose="02040503050406030204" pitchFamily="18" charset="0"/>
+                                </a:rPr>
+                              </m:ctrlPr>
+                            </m:accPr>
+                            <m:e>
+                              <m:r>
+                                <a:rPr lang="en-GB" sz="1800" b="0" i="1" smtClean="0">
+                                  <a:latin typeface="Cambria Math" panose="02040503050406030204" pitchFamily="18" charset="0"/>
+                                  <a:ea typeface="Cambria Math" panose="02040503050406030204" pitchFamily="18" charset="0"/>
+                                </a:rPr>
+                                <m:t>𝜓</m:t>
+                              </m:r>
+                            </m:e>
+                          </m:acc>
+                        </m:e>
+                        <m:sub>
+                          <m:r>
+                            <a:rPr lang="en-GB" sz="1800" b="0" i="1" smtClean="0">
+                              <a:latin typeface="Cambria Math" panose="02040503050406030204" pitchFamily="18" charset="0"/>
+                              <a:ea typeface="Cambria Math" panose="02040503050406030204" pitchFamily="18" charset="0"/>
+                            </a:rPr>
+                            <m:t>𝑁</m:t>
+                          </m:r>
+                          <m:r>
+                            <a:rPr lang="en-GB" sz="1800" b="0" i="1" smtClean="0">
+                              <a:latin typeface="Cambria Math" panose="02040503050406030204" pitchFamily="18" charset="0"/>
+                              <a:ea typeface="Cambria Math" panose="02040503050406030204" pitchFamily="18" charset="0"/>
+                            </a:rPr>
+                            <m:t>+1</m:t>
+                          </m:r>
+                        </m:sub>
+                      </m:sSub>
+                    </m:oMath>
+                  </m:oMathPara>
+                </a14:m>
+                <a:endParaRPr lang="el-GR" sz="1800" b="1" baseline="-25000" dirty="0">
+                  <a:latin typeface="MS Shell Dlg 2" panose="020B0604030504040204" pitchFamily="34" charset="0"/>
+                </a:endParaRPr>
+              </a:p>
+            </p:txBody>
+          </p:sp>
+        </mc:Choice>
+        <mc:Fallback xmlns="">
+          <p:sp>
+            <p:nvSpPr>
+              <p:cNvPr id="93" name="Oval 92">
+                <a:extLst>
+                  <a:ext uri="{FF2B5EF4-FFF2-40B4-BE49-F238E27FC236}">
+                    <a16:creationId xmlns:a16="http://schemas.microsoft.com/office/drawing/2014/main" id="{B413F8CE-22AD-F6C5-CF44-78B0782F9268}"/>
+                  </a:ext>
+                </a:extLst>
+              </p:cNvPr>
+              <p:cNvSpPr>
+                <a:spLocks noRot="1" noChangeAspect="1" noMove="1" noResize="1" noEditPoints="1" noAdjustHandles="1" noChangeArrowheads="1" noChangeShapeType="1" noTextEdit="1"/>
+              </p:cNvSpPr>
+              <p:nvPr/>
+            </p:nvSpPr>
+            <p:spPr>
+              <a:xfrm>
+                <a:off x="9567155" y="5056326"/>
+                <a:ext cx="619162" cy="626615"/>
+              </a:xfrm>
+              <a:prstGeom prst="ellipse">
+                <a:avLst/>
+              </a:prstGeom>
+              <a:blipFill>
+                <a:blip r:embed="rId8"/>
+                <a:stretch>
+                  <a:fillRect l="-1923" r="-5769"/>
+                </a:stretch>
+              </a:blipFill>
+            </p:spPr>
+            <p:txBody>
+              <a:bodyPr/>
+              <a:lstStyle/>
+              <a:p>
+                <a:r>
+                  <a:rPr lang="en-GB">
+                    <a:noFill/>
+                  </a:rPr>
+                  <a:t> </a:t>
+                </a:r>
+              </a:p>
+            </p:txBody>
+          </p:sp>
+        </mc:Fallback>
+      </mc:AlternateContent>
+      <p:cxnSp>
+        <p:nvCxnSpPr>
+          <p:cNvPr id="14" name="Straight Connector 13">
+            <a:extLst>
+              <a:ext uri="{FF2B5EF4-FFF2-40B4-BE49-F238E27FC236}">
+                <a16:creationId xmlns:a16="http://schemas.microsoft.com/office/drawing/2014/main" id="{20877E41-994A-E9C6-4150-17E342E421BA}"/>
+              </a:ext>
+            </a:extLst>
+          </p:cNvPr>
+          <p:cNvCxnSpPr>
+            <a:cxnSpLocks/>
+          </p:cNvCxnSpPr>
+          <p:nvPr/>
+        </p:nvCxnSpPr>
+        <p:spPr>
+          <a:xfrm>
+            <a:off x="6422347" y="0"/>
+            <a:ext cx="14093" cy="6692622"/>
+          </a:xfrm>
+          <a:prstGeom prst="line">
+            <a:avLst/>
+          </a:prstGeom>
+          <a:ln w="31750">
+            <a:solidFill>
+              <a:schemeClr val="accent2">
+                <a:lumMod val="75000"/>
+              </a:schemeClr>
+            </a:solidFill>
+            <a:prstDash val="dash"/>
+          </a:ln>
+        </p:spPr>
+        <p:style>
+          <a:lnRef idx="3">
+            <a:schemeClr val="accent2"/>
+          </a:lnRef>
+          <a:fillRef idx="0">
+            <a:schemeClr val="accent2"/>
+          </a:fillRef>
+          <a:effectRef idx="2">
+            <a:schemeClr val="accent2"/>
+          </a:effectRef>
+          <a:fontRef idx="minor">
+            <a:schemeClr val="tx1"/>
+          </a:fontRef>
+        </p:style>
+      </p:cxnSp>
+      <mc:AlternateContent xmlns:mc="http://schemas.openxmlformats.org/markup-compatibility/2006" xmlns:a14="http://schemas.microsoft.com/office/drawing/2010/main">
+        <mc:Choice Requires="a14">
+          <p:sp>
+            <p:nvSpPr>
+              <p:cNvPr id="95" name="Oval 94">
+                <a:extLst>
+                  <a:ext uri="{FF2B5EF4-FFF2-40B4-BE49-F238E27FC236}">
+                    <a16:creationId xmlns:a16="http://schemas.microsoft.com/office/drawing/2014/main" id="{3086158F-BE7B-05CC-D044-EEABB4E7FCF7}"/>
+                  </a:ext>
+                </a:extLst>
+              </p:cNvPr>
+              <p:cNvSpPr/>
+              <p:nvPr/>
+            </p:nvSpPr>
+            <p:spPr>
+              <a:xfrm>
+                <a:off x="4693953" y="5038392"/>
+                <a:ext cx="619162" cy="626615"/>
+              </a:xfrm>
+              <a:prstGeom prst="ellipse">
+                <a:avLst/>
+              </a:prstGeom>
+            </p:spPr>
+            <p:style>
+              <a:lnRef idx="2">
+                <a:schemeClr val="accent1">
+                  <a:shade val="15000"/>
+                </a:schemeClr>
+              </a:lnRef>
+              <a:fillRef idx="1">
+                <a:schemeClr val="accent1"/>
+              </a:fillRef>
+              <a:effectRef idx="0">
+                <a:schemeClr val="accent1"/>
+              </a:effectRef>
+              <a:fontRef idx="minor">
+                <a:schemeClr val="lt1"/>
+              </a:fontRef>
+            </p:style>
+            <p:txBody>
+              <a:bodyPr wrap="none" rtlCol="0" anchor="ctr"/>
+              <a:lstStyle/>
+              <a:p>
+                <a:pPr/>
+                <a14:m>
+                  <m:oMathPara xmlns:m="http://schemas.openxmlformats.org/officeDocument/2006/math">
+                    <m:oMathParaPr>
+                      <m:jc m:val="centerGroup"/>
+                    </m:oMathParaPr>
+                    <m:oMath xmlns:m="http://schemas.openxmlformats.org/officeDocument/2006/math">
+                      <m:sSub>
+                        <m:sSubPr>
+                          <m:ctrlPr>
+                            <a:rPr lang="en-GB" sz="1800" b="0" i="1" smtClean="0">
+                              <a:latin typeface="Cambria Math" panose="02040503050406030204" pitchFamily="18" charset="0"/>
+                            </a:rPr>
+                          </m:ctrlPr>
+                        </m:sSubPr>
+                        <m:e>
+                          <m:acc>
+                            <m:accPr>
+                              <m:chr m:val="̅"/>
+                              <m:ctrlPr>
+                                <a:rPr lang="en-GB" sz="1800" b="0" i="1" smtClean="0">
+                                  <a:latin typeface="Cambria Math" panose="02040503050406030204" pitchFamily="18" charset="0"/>
+                                </a:rPr>
+                              </m:ctrlPr>
+                            </m:accPr>
+                            <m:e>
+                              <m:r>
+                                <a:rPr lang="en-GB" sz="1800" b="0" i="1" smtClean="0">
+                                  <a:latin typeface="Cambria Math" panose="02040503050406030204" pitchFamily="18" charset="0"/>
+                                  <a:ea typeface="Cambria Math" panose="02040503050406030204" pitchFamily="18" charset="0"/>
+                                </a:rPr>
+                                <m:t>𝜓</m:t>
+                              </m:r>
+                            </m:e>
+                          </m:acc>
+                        </m:e>
+                        <m:sub>
+                          <m:r>
+                            <a:rPr lang="en-GB" sz="1800" b="0" i="1" smtClean="0">
+                              <a:latin typeface="Cambria Math" panose="02040503050406030204" pitchFamily="18" charset="0"/>
+                            </a:rPr>
+                            <m:t>𝑖</m:t>
+                          </m:r>
+                          <m:r>
+                            <a:rPr lang="en-GB" sz="1800" b="0" i="1" smtClean="0">
+                              <a:latin typeface="Cambria Math" panose="02040503050406030204" pitchFamily="18" charset="0"/>
+                            </a:rPr>
+                            <m:t>−1</m:t>
+                          </m:r>
+                        </m:sub>
+                      </m:sSub>
+                    </m:oMath>
+                  </m:oMathPara>
+                </a14:m>
+                <a:endParaRPr lang="el-GR" sz="1800" b="1" baseline="-25000" dirty="0">
+                  <a:latin typeface="MS Shell Dlg 2" panose="020B0604030504040204" pitchFamily="34" charset="0"/>
+                </a:endParaRPr>
+              </a:p>
+            </p:txBody>
+          </p:sp>
+        </mc:Choice>
+        <mc:Fallback xmlns="">
+          <p:sp>
+            <p:nvSpPr>
+              <p:cNvPr id="95" name="Oval 94">
+                <a:extLst>
+                  <a:ext uri="{FF2B5EF4-FFF2-40B4-BE49-F238E27FC236}">
+                    <a16:creationId xmlns:a16="http://schemas.microsoft.com/office/drawing/2014/main" id="{3086158F-BE7B-05CC-D044-EEABB4E7FCF7}"/>
+                  </a:ext>
+                </a:extLst>
+              </p:cNvPr>
+              <p:cNvSpPr>
+                <a:spLocks noRot="1" noChangeAspect="1" noMove="1" noResize="1" noEditPoints="1" noAdjustHandles="1" noChangeArrowheads="1" noChangeShapeType="1" noTextEdit="1"/>
+              </p:cNvSpPr>
+              <p:nvPr/>
+            </p:nvSpPr>
+            <p:spPr>
+              <a:xfrm>
+                <a:off x="4693953" y="5038392"/>
+                <a:ext cx="619162" cy="626615"/>
+              </a:xfrm>
+              <a:prstGeom prst="ellipse">
+                <a:avLst/>
+              </a:prstGeom>
+              <a:blipFill>
+                <a:blip r:embed="rId9"/>
+                <a:stretch>
+                  <a:fillRect r="-8654"/>
+                </a:stretch>
+              </a:blipFill>
+            </p:spPr>
+            <p:txBody>
+              <a:bodyPr/>
+              <a:lstStyle/>
+              <a:p>
+                <a:r>
+                  <a:rPr lang="en-GB">
+                    <a:noFill/>
+                  </a:rPr>
+                  <a:t> </a:t>
+                </a:r>
+              </a:p>
+            </p:txBody>
+          </p:sp>
+        </mc:Fallback>
+      </mc:AlternateContent>
+      <mc:AlternateContent xmlns:mc="http://schemas.openxmlformats.org/markup-compatibility/2006" xmlns:a14="http://schemas.microsoft.com/office/drawing/2010/main">
+        <mc:Choice Requires="a14">
+          <p:sp>
+            <p:nvSpPr>
+              <p:cNvPr id="96" name="Rectangle 95">
+                <a:extLst>
+                  <a:ext uri="{FF2B5EF4-FFF2-40B4-BE49-F238E27FC236}">
+                    <a16:creationId xmlns:a16="http://schemas.microsoft.com/office/drawing/2014/main" id="{50015CB0-5760-A3BD-06CB-B33F1AB817C5}"/>
+                  </a:ext>
+                </a:extLst>
+              </p:cNvPr>
+              <p:cNvSpPr/>
+              <p:nvPr/>
+            </p:nvSpPr>
+            <p:spPr>
+              <a:xfrm>
+                <a:off x="5136974" y="1616292"/>
+                <a:ext cx="760205" cy="288346"/>
+              </a:xfrm>
+              <a:prstGeom prst="rect">
+                <a:avLst/>
+              </a:prstGeom>
+            </p:spPr>
+            <p:style>
+              <a:lnRef idx="1">
+                <a:schemeClr val="accent2"/>
+              </a:lnRef>
+              <a:fillRef idx="2">
+                <a:schemeClr val="accent2"/>
+              </a:fillRef>
+              <a:effectRef idx="1">
+                <a:schemeClr val="accent2"/>
+              </a:effectRef>
+              <a:fontRef idx="minor">
+                <a:schemeClr val="dk1"/>
+              </a:fontRef>
+            </p:style>
+            <p:txBody>
+              <a:bodyPr rtlCol="0" anchor="ctr"/>
+              <a:lstStyle/>
+              <a:p>
+                <a:pPr algn="ctr"/>
+                <a14:m>
+                  <m:oMathPara xmlns:m="http://schemas.openxmlformats.org/officeDocument/2006/math">
+                    <m:oMathParaPr>
+                      <m:jc m:val="centerGroup"/>
+                    </m:oMathParaPr>
+                    <m:oMath xmlns:m="http://schemas.openxmlformats.org/officeDocument/2006/math">
+                      <m:sSub>
+                        <m:sSubPr>
+                          <m:ctrlPr>
+                            <a:rPr lang="en-GB" sz="1400" i="1" smtClean="0">
+                              <a:latin typeface="Cambria Math" panose="02040503050406030204" pitchFamily="18" charset="0"/>
+                            </a:rPr>
+                          </m:ctrlPr>
+                        </m:sSubPr>
+                        <m:e>
+                          <m:acc>
+                            <m:accPr>
+                              <m:chr m:val="̅"/>
+                              <m:ctrlPr>
+                                <a:rPr lang="en-GB" sz="1400" i="1">
+                                  <a:latin typeface="Cambria Math" panose="02040503050406030204" pitchFamily="18" charset="0"/>
+                                </a:rPr>
+                              </m:ctrlPr>
+                            </m:accPr>
+                            <m:e>
+                              <m:r>
+                                <a:rPr lang="en-GB" sz="1400" i="1">
+                                  <a:latin typeface="Cambria Math" panose="02040503050406030204" pitchFamily="18" charset="0"/>
+                                </a:rPr>
+                                <m:t>𝐸</m:t>
+                              </m:r>
+                            </m:e>
+                          </m:acc>
+                        </m:e>
+                        <m:sub>
+                          <m:r>
+                            <a:rPr lang="en-GB" sz="1400" b="0" i="1" smtClean="0">
+                              <a:latin typeface="Cambria Math" panose="02040503050406030204" pitchFamily="18" charset="0"/>
+                            </a:rPr>
+                            <m:t>𝑖</m:t>
+                          </m:r>
+                        </m:sub>
+                      </m:sSub>
+                      <m:d>
+                        <m:dPr>
+                          <m:ctrlPr>
+                            <a:rPr lang="en-GB" sz="1400" i="1" smtClean="0">
+                              <a:latin typeface="Cambria Math" panose="02040503050406030204" pitchFamily="18" charset="0"/>
+                            </a:rPr>
+                          </m:ctrlPr>
+                        </m:dPr>
+                        <m:e>
+                          <m:r>
+                            <a:rPr lang="en-GB" sz="1400" b="0" i="1" smtClean="0">
+                              <a:latin typeface="Cambria Math" panose="02040503050406030204" pitchFamily="18" charset="0"/>
+                            </a:rPr>
+                            <m:t> </m:t>
+                          </m:r>
+                          <m:sSub>
+                            <m:sSubPr>
+                              <m:ctrlPr>
+                                <a:rPr lang="en-GB" sz="1400" b="0" i="1" smtClean="0">
+                                  <a:latin typeface="Cambria Math" panose="02040503050406030204" pitchFamily="18" charset="0"/>
+                                </a:rPr>
+                              </m:ctrlPr>
+                            </m:sSubPr>
+                            <m:e>
+                              <m:r>
+                                <a:rPr lang="en-GB" sz="1400" b="0" i="1" smtClean="0">
+                                  <a:latin typeface="Cambria Math" panose="02040503050406030204" pitchFamily="18" charset="0"/>
+                                </a:rPr>
+                                <m:t>𝑧</m:t>
+                              </m:r>
+                            </m:e>
+                            <m:sub>
+                              <m:r>
+                                <a:rPr lang="en-GB" sz="1400" b="0" i="1" smtClean="0">
+                                  <a:latin typeface="Cambria Math" panose="02040503050406030204" pitchFamily="18" charset="0"/>
+                                </a:rPr>
+                                <m:t>𝑖</m:t>
+                              </m:r>
+                            </m:sub>
+                          </m:sSub>
+                        </m:e>
+                      </m:d>
+                    </m:oMath>
+                  </m:oMathPara>
+                </a14:m>
+                <a:endParaRPr lang="en-GB" sz="1400" dirty="0"/>
+              </a:p>
+            </p:txBody>
+          </p:sp>
+        </mc:Choice>
+        <mc:Fallback xmlns="">
+          <p:sp>
+            <p:nvSpPr>
+              <p:cNvPr id="96" name="Rectangle 95">
+                <a:extLst>
+                  <a:ext uri="{FF2B5EF4-FFF2-40B4-BE49-F238E27FC236}">
+                    <a16:creationId xmlns:a16="http://schemas.microsoft.com/office/drawing/2014/main" id="{50015CB0-5760-A3BD-06CB-B33F1AB817C5}"/>
+                  </a:ext>
+                </a:extLst>
+              </p:cNvPr>
+              <p:cNvSpPr>
+                <a:spLocks noRot="1" noChangeAspect="1" noMove="1" noResize="1" noEditPoints="1" noAdjustHandles="1" noChangeArrowheads="1" noChangeShapeType="1" noTextEdit="1"/>
+              </p:cNvSpPr>
+              <p:nvPr/>
+            </p:nvSpPr>
+            <p:spPr>
+              <a:xfrm>
+                <a:off x="5136974" y="1616292"/>
+                <a:ext cx="760205" cy="288346"/>
+              </a:xfrm>
+              <a:prstGeom prst="rect">
+                <a:avLst/>
+              </a:prstGeom>
+              <a:blipFill>
+                <a:blip r:embed="rId10"/>
+                <a:stretch>
+                  <a:fillRect/>
+                </a:stretch>
+              </a:blipFill>
+            </p:spPr>
+            <p:txBody>
+              <a:bodyPr/>
+              <a:lstStyle/>
+              <a:p>
+                <a:r>
+                  <a:rPr lang="en-GB">
+                    <a:noFill/>
+                  </a:rPr>
+                  <a:t> </a:t>
+                </a:r>
+              </a:p>
+            </p:txBody>
+          </p:sp>
+        </mc:Fallback>
+      </mc:AlternateContent>
+      <mc:AlternateContent xmlns:mc="http://schemas.openxmlformats.org/markup-compatibility/2006" xmlns:a14="http://schemas.microsoft.com/office/drawing/2010/main">
+        <mc:Choice Requires="a14">
+          <p:sp>
+            <p:nvSpPr>
+              <p:cNvPr id="97" name="Rectangle 96">
+                <a:extLst>
+                  <a:ext uri="{FF2B5EF4-FFF2-40B4-BE49-F238E27FC236}">
+                    <a16:creationId xmlns:a16="http://schemas.microsoft.com/office/drawing/2014/main" id="{79F97EDF-EB0D-6B54-13FB-A128A901516B}"/>
+                  </a:ext>
+                </a:extLst>
+              </p:cNvPr>
+              <p:cNvSpPr/>
+              <p:nvPr/>
+            </p:nvSpPr>
+            <p:spPr>
+              <a:xfrm>
+                <a:off x="7186505" y="1616293"/>
+                <a:ext cx="755920" cy="263058"/>
+              </a:xfrm>
+              <a:prstGeom prst="rect">
+                <a:avLst/>
+              </a:prstGeom>
+            </p:spPr>
+            <p:style>
+              <a:lnRef idx="1">
+                <a:schemeClr val="accent2"/>
+              </a:lnRef>
+              <a:fillRef idx="2">
+                <a:schemeClr val="accent2"/>
+              </a:fillRef>
+              <a:effectRef idx="1">
+                <a:schemeClr val="accent2"/>
+              </a:effectRef>
+              <a:fontRef idx="minor">
+                <a:schemeClr val="dk1"/>
+              </a:fontRef>
+            </p:style>
+            <p:txBody>
+              <a:bodyPr rtlCol="0" anchor="ctr"/>
+              <a:lstStyle/>
+              <a:p>
+                <a:pPr algn="ctr"/>
+                <a14:m>
+                  <m:oMathPara xmlns:m="http://schemas.openxmlformats.org/officeDocument/2006/math">
+                    <m:oMathParaPr>
+                      <m:jc m:val="centerGroup"/>
+                    </m:oMathParaPr>
+                    <m:oMath xmlns:m="http://schemas.openxmlformats.org/officeDocument/2006/math">
+                      <m:sSub>
+                        <m:sSubPr>
+                          <m:ctrlPr>
+                            <a:rPr lang="en-GB" sz="1400" i="1" smtClean="0">
+                              <a:latin typeface="Cambria Math" panose="02040503050406030204" pitchFamily="18" charset="0"/>
+                            </a:rPr>
+                          </m:ctrlPr>
+                        </m:sSubPr>
+                        <m:e>
+                          <m:acc>
+                            <m:accPr>
+                              <m:chr m:val="̅"/>
+                              <m:ctrlPr>
+                                <a:rPr lang="en-GB" sz="1400" i="1">
+                                  <a:latin typeface="Cambria Math" panose="02040503050406030204" pitchFamily="18" charset="0"/>
+                                </a:rPr>
+                              </m:ctrlPr>
+                            </m:accPr>
+                            <m:e>
+                              <m:r>
+                                <a:rPr lang="en-GB" sz="1400" i="1">
+                                  <a:latin typeface="Cambria Math" panose="02040503050406030204" pitchFamily="18" charset="0"/>
+                                </a:rPr>
+                                <m:t>𝐸</m:t>
+                              </m:r>
+                            </m:e>
+                          </m:acc>
+                        </m:e>
+                        <m:sub>
+                          <m:r>
+                            <a:rPr lang="en-GB" sz="1400" b="0" i="1" smtClean="0">
+                              <a:latin typeface="Cambria Math" panose="02040503050406030204" pitchFamily="18" charset="0"/>
+                            </a:rPr>
+                            <m:t>𝑖</m:t>
+                          </m:r>
+                        </m:sub>
+                      </m:sSub>
+                      <m:d>
+                        <m:dPr>
+                          <m:ctrlPr>
+                            <a:rPr lang="en-GB" sz="1400" i="1" smtClean="0">
+                              <a:latin typeface="Cambria Math" panose="02040503050406030204" pitchFamily="18" charset="0"/>
+                            </a:rPr>
+                          </m:ctrlPr>
+                        </m:dPr>
+                        <m:e>
+                          <m:r>
+                            <a:rPr lang="en-GB" sz="1400" b="0" i="1" smtClean="0">
+                              <a:latin typeface="Cambria Math" panose="02040503050406030204" pitchFamily="18" charset="0"/>
+                            </a:rPr>
+                            <m:t> </m:t>
+                          </m:r>
+                          <m:sSub>
+                            <m:sSubPr>
+                              <m:ctrlPr>
+                                <a:rPr lang="en-GB" sz="1400" b="0" i="1" smtClean="0">
+                                  <a:latin typeface="Cambria Math" panose="02040503050406030204" pitchFamily="18" charset="0"/>
+                                </a:rPr>
+                              </m:ctrlPr>
+                            </m:sSubPr>
+                            <m:e>
+                              <m:r>
+                                <a:rPr lang="en-GB" sz="1400" b="0" i="1" smtClean="0">
+                                  <a:latin typeface="Cambria Math" panose="02040503050406030204" pitchFamily="18" charset="0"/>
+                                </a:rPr>
+                                <m:t>𝑧</m:t>
+                              </m:r>
+                            </m:e>
+                            <m:sub>
+                              <m:r>
+                                <a:rPr lang="en-GB" sz="1400" b="0" i="1" smtClean="0">
+                                  <a:latin typeface="Cambria Math" panose="02040503050406030204" pitchFamily="18" charset="0"/>
+                                </a:rPr>
+                                <m:t>𝑖</m:t>
+                              </m:r>
+                              <m:r>
+                                <a:rPr lang="en-GB" sz="1400" b="0" i="1" smtClean="0">
+                                  <a:latin typeface="Cambria Math" panose="02040503050406030204" pitchFamily="18" charset="0"/>
+                                </a:rPr>
+                                <m:t>+1</m:t>
+                              </m:r>
+                            </m:sub>
+                          </m:sSub>
+                        </m:e>
+                      </m:d>
+                    </m:oMath>
+                  </m:oMathPara>
+                </a14:m>
+                <a:endParaRPr lang="en-GB" sz="1400" dirty="0"/>
+              </a:p>
+            </p:txBody>
+          </p:sp>
+        </mc:Choice>
+        <mc:Fallback xmlns="">
+          <p:sp>
+            <p:nvSpPr>
+              <p:cNvPr id="97" name="Rectangle 96">
+                <a:extLst>
+                  <a:ext uri="{FF2B5EF4-FFF2-40B4-BE49-F238E27FC236}">
+                    <a16:creationId xmlns:a16="http://schemas.microsoft.com/office/drawing/2014/main" id="{79F97EDF-EB0D-6B54-13FB-A128A901516B}"/>
+                  </a:ext>
+                </a:extLst>
+              </p:cNvPr>
+              <p:cNvSpPr>
+                <a:spLocks noRot="1" noChangeAspect="1" noMove="1" noResize="1" noEditPoints="1" noAdjustHandles="1" noChangeArrowheads="1" noChangeShapeType="1" noTextEdit="1"/>
+              </p:cNvSpPr>
+              <p:nvPr/>
+            </p:nvSpPr>
+            <p:spPr>
+              <a:xfrm>
+                <a:off x="7186505" y="1616293"/>
+                <a:ext cx="755920" cy="263058"/>
+              </a:xfrm>
+              <a:prstGeom prst="rect">
+                <a:avLst/>
+              </a:prstGeom>
+              <a:blipFill>
+                <a:blip r:embed="rId11"/>
+                <a:stretch>
+                  <a:fillRect l="-4000" b="-4545"/>
+                </a:stretch>
+              </a:blipFill>
+            </p:spPr>
+            <p:txBody>
+              <a:bodyPr/>
+              <a:lstStyle/>
+              <a:p>
+                <a:r>
+                  <a:rPr lang="en-GB">
+                    <a:noFill/>
+                  </a:rPr>
+                  <a:t> </a:t>
+                </a:r>
+              </a:p>
+            </p:txBody>
+          </p:sp>
+        </mc:Fallback>
+      </mc:AlternateContent>
+      <p:sp>
+        <p:nvSpPr>
+          <p:cNvPr id="98" name="Arrow: Right 97">
+            <a:extLst>
+              <a:ext uri="{FF2B5EF4-FFF2-40B4-BE49-F238E27FC236}">
+                <a16:creationId xmlns:a16="http://schemas.microsoft.com/office/drawing/2014/main" id="{109685EF-874E-1200-03C5-D12FE5A3F785}"/>
+              </a:ext>
+            </a:extLst>
+          </p:cNvPr>
+          <p:cNvSpPr/>
+          <p:nvPr/>
+        </p:nvSpPr>
+        <p:spPr>
+          <a:xfrm>
+            <a:off x="6141149" y="1801675"/>
+            <a:ext cx="947118" cy="573669"/>
+          </a:xfrm>
+          <a:prstGeom prst="rightArrow">
+            <a:avLst/>
+          </a:prstGeom>
+          <a:solidFill>
+            <a:srgbClr val="FF0000"/>
+          </a:solidFill>
+        </p:spPr>
+        <p:style>
+          <a:lnRef idx="2">
+            <a:schemeClr val="accent1">
+              <a:shade val="15000"/>
+            </a:schemeClr>
+          </a:lnRef>
+          <a:fillRef idx="1">
+            <a:schemeClr val="accent1"/>
+          </a:fillRef>
+          <a:effectRef idx="0">
+            <a:schemeClr val="accent1"/>
+          </a:effectRef>
+          <a:fontRef idx="minor">
+            <a:schemeClr val="lt1"/>
+          </a:fontRef>
+        </p:style>
+        <p:txBody>
+          <a:bodyPr rtlCol="0" anchor="ctr"/>
+          <a:lstStyle/>
+          <a:p>
+            <a:pPr algn="ctr"/>
+            <a:r>
+              <a:rPr lang="en-GB" sz="1400" dirty="0"/>
+              <a:t>K(d</a:t>
+            </a:r>
+            <a:r>
+              <a:rPr lang="en-GB" sz="1400" baseline="-25000" dirty="0"/>
+              <a:t>i</a:t>
+            </a:r>
+            <a:r>
+              <a:rPr lang="en-GB" sz="1400" dirty="0"/>
+              <a:t>)</a:t>
+            </a:r>
+          </a:p>
+        </p:txBody>
+      </p:sp>
+      <p:cxnSp>
+        <p:nvCxnSpPr>
+          <p:cNvPr id="100" name="Connector: Elbow 99">
+            <a:extLst>
+              <a:ext uri="{FF2B5EF4-FFF2-40B4-BE49-F238E27FC236}">
+                <a16:creationId xmlns:a16="http://schemas.microsoft.com/office/drawing/2014/main" id="{22219274-508F-FCB6-D9B9-F16CA4CF1986}"/>
+              </a:ext>
+            </a:extLst>
+          </p:cNvPr>
+          <p:cNvCxnSpPr/>
+          <p:nvPr/>
+        </p:nvCxnSpPr>
+        <p:spPr>
+          <a:xfrm>
+            <a:off x="5380897" y="1933604"/>
+            <a:ext cx="784749" cy="170422"/>
+          </a:xfrm>
+          <a:prstGeom prst="bentConnector3">
+            <a:avLst>
+              <a:gd name="adj1" fmla="val 4618"/>
+            </a:avLst>
+          </a:prstGeom>
+          <a:ln w="38100">
+            <a:solidFill>
+              <a:schemeClr val="accent2">
+                <a:lumMod val="75000"/>
+              </a:schemeClr>
+            </a:solidFill>
+            <a:tailEnd type="triangle"/>
+          </a:ln>
+        </p:spPr>
+        <p:style>
+          <a:lnRef idx="1">
+            <a:schemeClr val="accent1"/>
+          </a:lnRef>
+          <a:fillRef idx="0">
+            <a:schemeClr val="accent1"/>
+          </a:fillRef>
+          <a:effectRef idx="0">
+            <a:schemeClr val="accent1"/>
+          </a:effectRef>
+          <a:fontRef idx="minor">
+            <a:schemeClr val="tx1"/>
+          </a:fontRef>
+        </p:style>
+      </p:cxnSp>
+      <p:cxnSp>
+        <p:nvCxnSpPr>
+          <p:cNvPr id="103" name="Connector: Elbow 102">
+            <a:extLst>
+              <a:ext uri="{FF2B5EF4-FFF2-40B4-BE49-F238E27FC236}">
+                <a16:creationId xmlns:a16="http://schemas.microsoft.com/office/drawing/2014/main" id="{4B3F3F4F-6D71-0D1B-685D-8D17D1C745FA}"/>
+              </a:ext>
+            </a:extLst>
+          </p:cNvPr>
+          <p:cNvCxnSpPr>
+            <a:cxnSpLocks/>
+            <a:stCxn id="97" idx="2"/>
+          </p:cNvCxnSpPr>
+          <p:nvPr/>
+        </p:nvCxnSpPr>
+        <p:spPr>
+          <a:xfrm rot="5400000">
+            <a:off x="7222851" y="1752829"/>
+            <a:ext cx="215092" cy="468136"/>
+          </a:xfrm>
+          <a:prstGeom prst="bentConnector2">
+            <a:avLst/>
+          </a:prstGeom>
+          <a:ln w="38100">
+            <a:solidFill>
+              <a:schemeClr val="accent2">
+                <a:lumMod val="75000"/>
+              </a:schemeClr>
+            </a:solidFill>
+            <a:tailEnd type="triangle"/>
+          </a:ln>
+        </p:spPr>
+        <p:style>
+          <a:lnRef idx="1">
+            <a:schemeClr val="accent1"/>
+          </a:lnRef>
+          <a:fillRef idx="0">
+            <a:schemeClr val="accent1"/>
+          </a:fillRef>
+          <a:effectRef idx="0">
+            <a:schemeClr val="accent1"/>
+          </a:effectRef>
+          <a:fontRef idx="minor">
+            <a:schemeClr val="tx1"/>
+          </a:fontRef>
+        </p:style>
+      </p:cxnSp>
+      <mc:AlternateContent xmlns:mc="http://schemas.openxmlformats.org/markup-compatibility/2006" xmlns:a14="http://schemas.microsoft.com/office/drawing/2010/main">
+        <mc:Choice Requires="a14">
+          <p:sp>
+            <p:nvSpPr>
+              <p:cNvPr id="105" name="Rectangle 104">
+                <a:extLst>
+                  <a:ext uri="{FF2B5EF4-FFF2-40B4-BE49-F238E27FC236}">
+                    <a16:creationId xmlns:a16="http://schemas.microsoft.com/office/drawing/2014/main" id="{5FEC1351-7AEB-3418-ABEB-116314106B27}"/>
+                  </a:ext>
+                </a:extLst>
+              </p:cNvPr>
+              <p:cNvSpPr/>
+              <p:nvPr/>
+            </p:nvSpPr>
+            <p:spPr>
+              <a:xfrm>
+                <a:off x="3080239" y="3542121"/>
+                <a:ext cx="2885191" cy="1309792"/>
+              </a:xfrm>
+              <a:prstGeom prst="rect">
+                <a:avLst/>
+              </a:prstGeom>
+            </p:spPr>
+            <p:style>
+              <a:lnRef idx="1">
+                <a:schemeClr val="accent2"/>
+              </a:lnRef>
+              <a:fillRef idx="2">
+                <a:schemeClr val="accent2"/>
+              </a:fillRef>
+              <a:effectRef idx="1">
+                <a:schemeClr val="accent2"/>
+              </a:effectRef>
+              <a:fontRef idx="minor">
+                <a:schemeClr val="dk1"/>
+              </a:fontRef>
+            </p:style>
+            <p:txBody>
+              <a:bodyPr rtlCol="0" anchor="ctr"/>
+              <a:lstStyle/>
+              <a:p>
+                <a:pPr algn="ctr"/>
+                <a14:m>
+                  <m:oMathPara xmlns:m="http://schemas.openxmlformats.org/officeDocument/2006/math">
+                    <m:oMathParaPr>
+                      <m:jc m:val="centerGroup"/>
+                    </m:oMathParaPr>
+                    <m:oMath xmlns:m="http://schemas.openxmlformats.org/officeDocument/2006/math">
+                      <m:sSub>
+                        <m:sSubPr>
+                          <m:ctrlPr>
+                            <a:rPr lang="en-GB" sz="1400" b="0" i="1" smtClean="0">
+                              <a:latin typeface="Cambria Math" panose="02040503050406030204" pitchFamily="18" charset="0"/>
+                            </a:rPr>
+                          </m:ctrlPr>
+                        </m:sSubPr>
+                        <m:e>
+                          <m:acc>
+                            <m:accPr>
+                              <m:chr m:val="̅"/>
+                              <m:ctrlPr>
+                                <a:rPr lang="en-GB" sz="1400" b="0" i="1" smtClean="0">
+                                  <a:latin typeface="Cambria Math" panose="02040503050406030204" pitchFamily="18" charset="0"/>
+                                </a:rPr>
+                              </m:ctrlPr>
+                            </m:accPr>
+                            <m:e>
+                              <m:r>
+                                <a:rPr lang="en-GB" sz="1400" b="0" i="1" smtClean="0">
+                                  <a:latin typeface="Cambria Math" panose="02040503050406030204" pitchFamily="18" charset="0"/>
+                                  <a:ea typeface="Cambria Math" panose="02040503050406030204" pitchFamily="18" charset="0"/>
+                                </a:rPr>
+                                <m:t>𝜓</m:t>
+                              </m:r>
+                            </m:e>
+                          </m:acc>
+                        </m:e>
+                        <m:sub>
+                          <m:r>
+                            <a:rPr lang="en-GB" sz="1400" b="0" i="1" smtClean="0">
+                              <a:latin typeface="Cambria Math" panose="02040503050406030204" pitchFamily="18" charset="0"/>
+                            </a:rPr>
+                            <m:t>𝑖</m:t>
+                          </m:r>
+                        </m:sub>
+                      </m:sSub>
+                      <m:d>
+                        <m:dPr>
+                          <m:ctrlPr>
+                            <a:rPr lang="en-GB" sz="1400" b="0" i="1" smtClean="0">
+                              <a:latin typeface="Cambria Math" panose="02040503050406030204" pitchFamily="18" charset="0"/>
+                            </a:rPr>
+                          </m:ctrlPr>
+                        </m:dPr>
+                        <m:e>
+                          <m:sSub>
+                            <m:sSubPr>
+                              <m:ctrlPr>
+                                <a:rPr lang="en-GB" sz="1400" b="0" i="1" smtClean="0">
+                                  <a:latin typeface="Cambria Math" panose="02040503050406030204" pitchFamily="18" charset="0"/>
+                                </a:rPr>
+                              </m:ctrlPr>
+                            </m:sSubPr>
+                            <m:e>
+                              <m:r>
+                                <a:rPr lang="en-GB" sz="1400" b="0" i="1" smtClean="0">
+                                  <a:latin typeface="Cambria Math" panose="02040503050406030204" pitchFamily="18" charset="0"/>
+                                </a:rPr>
+                                <m:t>𝑧</m:t>
+                              </m:r>
+                            </m:e>
+                            <m:sub>
+                              <m:r>
+                                <a:rPr lang="en-GB" sz="1400" b="0" i="1" smtClean="0">
+                                  <a:latin typeface="Cambria Math" panose="02040503050406030204" pitchFamily="18" charset="0"/>
+                                </a:rPr>
+                                <m:t>𝑖</m:t>
+                              </m:r>
+                            </m:sub>
+                          </m:sSub>
+                        </m:e>
+                      </m:d>
+                      <m:r>
+                        <a:rPr lang="en-GB" sz="1400" b="0" i="1" smtClean="0">
+                          <a:latin typeface="Cambria Math" panose="02040503050406030204" pitchFamily="18" charset="0"/>
+                        </a:rPr>
+                        <m:t>=</m:t>
+                      </m:r>
+                      <m:d>
+                        <m:dPr>
+                          <m:ctrlPr>
+                            <a:rPr lang="en-GB" sz="1400" b="0" i="1" smtClean="0">
+                              <a:latin typeface="Cambria Math" panose="02040503050406030204" pitchFamily="18" charset="0"/>
+                            </a:rPr>
+                          </m:ctrlPr>
+                        </m:dPr>
+                        <m:e>
+                          <m:m>
+                            <m:mPr>
+                              <m:mcs>
+                                <m:mc>
+                                  <m:mcPr>
+                                    <m:count m:val="1"/>
+                                    <m:mcJc m:val="center"/>
+                                  </m:mcPr>
+                                </m:mc>
+                              </m:mcs>
+                              <m:ctrlPr>
+                                <a:rPr lang="en-GB" sz="1400" b="0" i="1" smtClean="0">
+                                  <a:latin typeface="Cambria Math" panose="02040503050406030204" pitchFamily="18" charset="0"/>
+                                </a:rPr>
+                              </m:ctrlPr>
+                            </m:mPr>
+                            <m:mr>
+                              <m:e>
+                                <m:sSub>
+                                  <m:sSubPr>
+                                    <m:ctrlPr>
+                                      <a:rPr lang="en-GB" sz="1400" b="0" i="1" smtClean="0">
+                                        <a:latin typeface="Cambria Math" panose="02040503050406030204" pitchFamily="18" charset="0"/>
+                                      </a:rPr>
+                                    </m:ctrlPr>
+                                  </m:sSubPr>
+                                  <m:e>
+                                    <m:r>
+                                      <a:rPr lang="en-GB" sz="1400" b="0" i="1" smtClean="0">
+                                        <a:latin typeface="Cambria Math" panose="02040503050406030204" pitchFamily="18" charset="0"/>
+                                      </a:rPr>
+                                      <m:t>𝐸</m:t>
+                                    </m:r>
+                                  </m:e>
+                                  <m:sub>
+                                    <m:r>
+                                      <a:rPr lang="en-GB" sz="1400" b="0" i="1" smtClean="0">
+                                        <a:latin typeface="Cambria Math" panose="02040503050406030204" pitchFamily="18" charset="0"/>
+                                      </a:rPr>
+                                      <m:t>𝑥</m:t>
+                                    </m:r>
+                                  </m:sub>
+                                </m:sSub>
+                                <m:d>
+                                  <m:dPr>
+                                    <m:ctrlPr>
+                                      <a:rPr lang="en-GB" sz="1400" b="0" i="1" smtClean="0">
+                                        <a:latin typeface="Cambria Math" panose="02040503050406030204" pitchFamily="18" charset="0"/>
+                                      </a:rPr>
+                                    </m:ctrlPr>
+                                  </m:dPr>
+                                  <m:e>
+                                    <m:sSub>
+                                      <m:sSubPr>
+                                        <m:ctrlPr>
+                                          <a:rPr lang="en-GB" sz="1400" b="0" i="1" smtClean="0">
+                                            <a:latin typeface="Cambria Math" panose="02040503050406030204" pitchFamily="18" charset="0"/>
+                                          </a:rPr>
+                                        </m:ctrlPr>
+                                      </m:sSubPr>
+                                      <m:e>
+                                        <m:r>
+                                          <a:rPr lang="en-GB" sz="1400" b="0" i="1" smtClean="0">
+                                            <a:latin typeface="Cambria Math" panose="02040503050406030204" pitchFamily="18" charset="0"/>
+                                          </a:rPr>
+                                          <m:t>𝑧</m:t>
+                                        </m:r>
+                                      </m:e>
+                                      <m:sub>
+                                        <m:r>
+                                          <a:rPr lang="en-GB" sz="1400" b="0" i="1" smtClean="0">
+                                            <a:latin typeface="Cambria Math" panose="02040503050406030204" pitchFamily="18" charset="0"/>
+                                          </a:rPr>
+                                          <m:t>𝑖</m:t>
+                                        </m:r>
+                                      </m:sub>
+                                    </m:sSub>
+                                  </m:e>
+                                </m:d>
+                              </m:e>
+                            </m:mr>
+                            <m:mr>
+                              <m:e>
+                                <m:sSub>
+                                  <m:sSubPr>
+                                    <m:ctrlPr>
+                                      <a:rPr lang="en-GB" sz="1400" i="1">
+                                        <a:latin typeface="Cambria Math" panose="02040503050406030204" pitchFamily="18" charset="0"/>
+                                      </a:rPr>
+                                    </m:ctrlPr>
+                                  </m:sSubPr>
+                                  <m:e>
+                                    <m:r>
+                                      <a:rPr lang="en-GB" sz="1400" b="0" i="1" smtClean="0">
+                                        <a:latin typeface="Cambria Math" panose="02040503050406030204" pitchFamily="18" charset="0"/>
+                                      </a:rPr>
+                                      <m:t>𝐻</m:t>
+                                    </m:r>
+                                  </m:e>
+                                  <m:sub>
+                                    <m:r>
+                                      <a:rPr lang="en-GB" sz="1400" b="0" i="1" smtClean="0">
+                                        <a:latin typeface="Cambria Math" panose="02040503050406030204" pitchFamily="18" charset="0"/>
+                                      </a:rPr>
+                                      <m:t>𝑦</m:t>
+                                    </m:r>
+                                  </m:sub>
+                                </m:sSub>
+                                <m:d>
+                                  <m:dPr>
+                                    <m:ctrlPr>
+                                      <a:rPr lang="en-GB" sz="1400" i="1">
+                                        <a:latin typeface="Cambria Math" panose="02040503050406030204" pitchFamily="18" charset="0"/>
+                                      </a:rPr>
+                                    </m:ctrlPr>
+                                  </m:dPr>
+                                  <m:e>
+                                    <m:sSub>
+                                      <m:sSubPr>
+                                        <m:ctrlPr>
+                                          <a:rPr lang="en-GB" sz="1400" i="1">
+                                            <a:latin typeface="Cambria Math" panose="02040503050406030204" pitchFamily="18" charset="0"/>
+                                          </a:rPr>
+                                        </m:ctrlPr>
+                                      </m:sSubPr>
+                                      <m:e>
+                                        <m:r>
+                                          <a:rPr lang="en-GB" sz="1400" b="0" i="1" smtClean="0">
+                                            <a:latin typeface="Cambria Math" panose="02040503050406030204" pitchFamily="18" charset="0"/>
+                                          </a:rPr>
+                                          <m:t>𝑧</m:t>
+                                        </m:r>
+                                      </m:e>
+                                      <m:sub>
+                                        <m:r>
+                                          <a:rPr lang="en-GB" sz="1400" i="1">
+                                            <a:latin typeface="Cambria Math" panose="02040503050406030204" pitchFamily="18" charset="0"/>
+                                          </a:rPr>
+                                          <m:t>𝑖</m:t>
+                                        </m:r>
+                                      </m:sub>
+                                    </m:sSub>
+                                  </m:e>
+                                </m:d>
+                              </m:e>
+                            </m:mr>
+                            <m:mr>
+                              <m:e>
+                                <m:sSub>
+                                  <m:sSubPr>
+                                    <m:ctrlPr>
+                                      <a:rPr lang="en-GB" sz="1400" i="1">
+                                        <a:latin typeface="Cambria Math" panose="02040503050406030204" pitchFamily="18" charset="0"/>
+                                      </a:rPr>
+                                    </m:ctrlPr>
+                                  </m:sSubPr>
+                                  <m:e>
+                                    <m:r>
+                                      <a:rPr lang="en-GB" sz="1400" i="1">
+                                        <a:latin typeface="Cambria Math" panose="02040503050406030204" pitchFamily="18" charset="0"/>
+                                      </a:rPr>
+                                      <m:t>𝐸</m:t>
+                                    </m:r>
+                                  </m:e>
+                                  <m:sub>
+                                    <m:r>
+                                      <a:rPr lang="en-GB" sz="1400" b="0" i="1" smtClean="0">
+                                        <a:latin typeface="Cambria Math" panose="02040503050406030204" pitchFamily="18" charset="0"/>
+                                      </a:rPr>
+                                      <m:t>𝑦</m:t>
+                                    </m:r>
+                                  </m:sub>
+                                </m:sSub>
+                                <m:d>
+                                  <m:dPr>
+                                    <m:ctrlPr>
+                                      <a:rPr lang="en-GB" sz="1400" i="1">
+                                        <a:latin typeface="Cambria Math" panose="02040503050406030204" pitchFamily="18" charset="0"/>
+                                      </a:rPr>
+                                    </m:ctrlPr>
+                                  </m:dPr>
+                                  <m:e>
+                                    <m:sSub>
+                                      <m:sSubPr>
+                                        <m:ctrlPr>
+                                          <a:rPr lang="en-GB" sz="1400" i="1">
+                                            <a:latin typeface="Cambria Math" panose="02040503050406030204" pitchFamily="18" charset="0"/>
+                                          </a:rPr>
+                                        </m:ctrlPr>
+                                      </m:sSubPr>
+                                      <m:e>
+                                        <m:r>
+                                          <a:rPr lang="en-GB" sz="1400" b="0" i="1" smtClean="0">
+                                            <a:latin typeface="Cambria Math" panose="02040503050406030204" pitchFamily="18" charset="0"/>
+                                          </a:rPr>
+                                          <m:t>𝑧</m:t>
+                                        </m:r>
+                                      </m:e>
+                                      <m:sub>
+                                        <m:r>
+                                          <a:rPr lang="en-GB" sz="1400" i="1">
+                                            <a:latin typeface="Cambria Math" panose="02040503050406030204" pitchFamily="18" charset="0"/>
+                                          </a:rPr>
+                                          <m:t>𝑖</m:t>
+                                        </m:r>
+                                      </m:sub>
+                                    </m:sSub>
+                                  </m:e>
+                                </m:d>
+                              </m:e>
+                            </m:mr>
+                            <m:mr>
+                              <m:e>
+                                <m:sSub>
+                                  <m:sSubPr>
+                                    <m:ctrlPr>
+                                      <a:rPr lang="en-GB" sz="1400" i="1">
+                                        <a:latin typeface="Cambria Math" panose="02040503050406030204" pitchFamily="18" charset="0"/>
+                                      </a:rPr>
+                                    </m:ctrlPr>
+                                  </m:sSubPr>
+                                  <m:e>
+                                    <m:r>
+                                      <a:rPr lang="en-GB" sz="1400" b="0" i="1" smtClean="0">
+                                        <a:latin typeface="Cambria Math" panose="02040503050406030204" pitchFamily="18" charset="0"/>
+                                      </a:rPr>
+                                      <m:t>−</m:t>
+                                    </m:r>
+                                    <m:r>
+                                      <a:rPr lang="en-GB" sz="1400" b="0" i="1" smtClean="0">
+                                        <a:latin typeface="Cambria Math" panose="02040503050406030204" pitchFamily="18" charset="0"/>
+                                      </a:rPr>
+                                      <m:t>𝐻</m:t>
+                                    </m:r>
+                                  </m:e>
+                                  <m:sub>
+                                    <m:r>
+                                      <a:rPr lang="en-GB" sz="1400" b="0" i="1" smtClean="0">
+                                        <a:latin typeface="Cambria Math" panose="02040503050406030204" pitchFamily="18" charset="0"/>
+                                      </a:rPr>
+                                      <m:t>𝑦</m:t>
+                                    </m:r>
+                                  </m:sub>
+                                </m:sSub>
+                                <m:d>
+                                  <m:dPr>
+                                    <m:ctrlPr>
+                                      <a:rPr lang="en-GB" sz="1400" i="1">
+                                        <a:latin typeface="Cambria Math" panose="02040503050406030204" pitchFamily="18" charset="0"/>
+                                      </a:rPr>
+                                    </m:ctrlPr>
+                                  </m:dPr>
+                                  <m:e>
+                                    <m:r>
+                                      <a:rPr lang="en-GB" sz="1400" b="0" i="1" smtClean="0">
+                                        <a:latin typeface="Cambria Math" panose="02040503050406030204" pitchFamily="18" charset="0"/>
+                                      </a:rPr>
+                                      <m:t>𝑧</m:t>
+                                    </m:r>
+                                  </m:e>
+                                </m:d>
+                              </m:e>
+                            </m:mr>
+                          </m:m>
+                        </m:e>
+                      </m:d>
+                      <m:r>
+                        <a:rPr lang="en-GB" sz="1400" b="0" i="1" smtClean="0">
+                          <a:latin typeface="Cambria Math" panose="02040503050406030204" pitchFamily="18" charset="0"/>
+                        </a:rPr>
+                        <m:t>=</m:t>
+                      </m:r>
+                      <m:sSub>
+                        <m:sSubPr>
+                          <m:ctrlPr>
+                            <a:rPr lang="en-GB" sz="1400" b="0" i="1" smtClean="0">
+                              <a:latin typeface="Cambria Math" panose="02040503050406030204" pitchFamily="18" charset="0"/>
+                            </a:rPr>
+                          </m:ctrlPr>
+                        </m:sSubPr>
+                        <m:e>
+                          <m:acc>
+                            <m:accPr>
+                              <m:chr m:val="̿"/>
+                              <m:ctrlPr>
+                                <a:rPr lang="en-GB" sz="1400" b="0" i="1" smtClean="0">
+                                  <a:latin typeface="Cambria Math" panose="02040503050406030204" pitchFamily="18" charset="0"/>
+                                </a:rPr>
+                              </m:ctrlPr>
+                            </m:accPr>
+                            <m:e>
+                              <m:sSub>
+                                <m:sSubPr>
+                                  <m:ctrlPr>
+                                    <a:rPr lang="en-GB" sz="1400" b="0" i="1" smtClean="0">
+                                      <a:latin typeface="Cambria Math" panose="02040503050406030204" pitchFamily="18" charset="0"/>
+                                    </a:rPr>
+                                  </m:ctrlPr>
+                                </m:sSubPr>
+                                <m:e>
+                                  <m:r>
+                                    <a:rPr lang="en-GB" sz="1400" b="0" i="1" smtClean="0">
+                                      <a:latin typeface="Cambria Math" panose="02040503050406030204" pitchFamily="18" charset="0"/>
+                                    </a:rPr>
+                                    <m:t>𝐴</m:t>
+                                  </m:r>
+                                </m:e>
+                                <m:sub>
+                                  <m:r>
+                                    <a:rPr lang="en-GB" sz="1400" b="0" i="1" smtClean="0">
+                                      <a:latin typeface="Cambria Math" panose="02040503050406030204" pitchFamily="18" charset="0"/>
+                                    </a:rPr>
+                                    <m:t>𝑖</m:t>
+                                  </m:r>
+                                </m:sub>
+                              </m:sSub>
+                            </m:e>
+                          </m:acc>
+                          <m:acc>
+                            <m:accPr>
+                              <m:chr m:val="̅"/>
+                              <m:ctrlPr>
+                                <a:rPr lang="en-GB" sz="1400" b="0" i="1" smtClean="0">
+                                  <a:latin typeface="Cambria Math" panose="02040503050406030204" pitchFamily="18" charset="0"/>
+                                </a:rPr>
+                              </m:ctrlPr>
+                            </m:accPr>
+                            <m:e>
+                              <m:r>
+                                <a:rPr lang="en-GB" sz="1400" i="1">
+                                  <a:latin typeface="Cambria Math" panose="02040503050406030204" pitchFamily="18" charset="0"/>
+                                </a:rPr>
+                                <m:t>𝐸</m:t>
+                              </m:r>
+                            </m:e>
+                          </m:acc>
+                        </m:e>
+                        <m:sub>
+                          <m:r>
+                            <a:rPr lang="en-GB" sz="1400" b="0" i="1" smtClean="0">
+                              <a:latin typeface="Cambria Math" panose="02040503050406030204" pitchFamily="18" charset="0"/>
+                            </a:rPr>
+                            <m:t>𝑖</m:t>
+                          </m:r>
+                        </m:sub>
+                      </m:sSub>
+                      <m:d>
+                        <m:dPr>
+                          <m:ctrlPr>
+                            <a:rPr lang="en-GB" sz="1400" b="0" i="1" smtClean="0">
+                              <a:latin typeface="Cambria Math" panose="02040503050406030204" pitchFamily="18" charset="0"/>
+                            </a:rPr>
+                          </m:ctrlPr>
+                        </m:dPr>
+                        <m:e>
+                          <m:r>
+                            <a:rPr lang="en-GB" sz="1400" b="0" i="1" smtClean="0">
+                              <a:latin typeface="Cambria Math" panose="02040503050406030204" pitchFamily="18" charset="0"/>
+                            </a:rPr>
+                            <m:t> </m:t>
+                          </m:r>
+                          <m:sSub>
+                            <m:sSubPr>
+                              <m:ctrlPr>
+                                <a:rPr lang="en-GB" sz="1400" b="0" i="1" smtClean="0">
+                                  <a:latin typeface="Cambria Math" panose="02040503050406030204" pitchFamily="18" charset="0"/>
+                                </a:rPr>
+                              </m:ctrlPr>
+                            </m:sSubPr>
+                            <m:e>
+                              <m:r>
+                                <a:rPr lang="en-GB" sz="1400" b="0" i="1" smtClean="0">
+                                  <a:latin typeface="Cambria Math" panose="02040503050406030204" pitchFamily="18" charset="0"/>
+                                </a:rPr>
+                                <m:t>𝑧</m:t>
+                              </m:r>
+                            </m:e>
+                            <m:sub>
+                              <m:r>
+                                <a:rPr lang="en-GB" sz="1400" b="0" i="1" smtClean="0">
+                                  <a:latin typeface="Cambria Math" panose="02040503050406030204" pitchFamily="18" charset="0"/>
+                                </a:rPr>
+                                <m:t>𝑖</m:t>
+                              </m:r>
+                            </m:sub>
+                          </m:sSub>
+                        </m:e>
+                      </m:d>
+                    </m:oMath>
+                  </m:oMathPara>
+                </a14:m>
+                <a:endParaRPr lang="en-GB" sz="1400" dirty="0"/>
+              </a:p>
+            </p:txBody>
+          </p:sp>
+        </mc:Choice>
+        <mc:Fallback xmlns="">
+          <p:sp>
+            <p:nvSpPr>
+              <p:cNvPr id="105" name="Rectangle 104">
+                <a:extLst>
+                  <a:ext uri="{FF2B5EF4-FFF2-40B4-BE49-F238E27FC236}">
+                    <a16:creationId xmlns:a16="http://schemas.microsoft.com/office/drawing/2014/main" id="{5FEC1351-7AEB-3418-ABEB-116314106B27}"/>
+                  </a:ext>
+                </a:extLst>
+              </p:cNvPr>
+              <p:cNvSpPr>
+                <a:spLocks noRot="1" noChangeAspect="1" noMove="1" noResize="1" noEditPoints="1" noAdjustHandles="1" noChangeArrowheads="1" noChangeShapeType="1" noTextEdit="1"/>
+              </p:cNvSpPr>
+              <p:nvPr/>
+            </p:nvSpPr>
+            <p:spPr>
+              <a:xfrm>
+                <a:off x="3080239" y="3542121"/>
+                <a:ext cx="2885191" cy="1309792"/>
+              </a:xfrm>
+              <a:prstGeom prst="rect">
+                <a:avLst/>
+              </a:prstGeom>
+              <a:blipFill>
+                <a:blip r:embed="rId12"/>
+                <a:stretch>
+                  <a:fillRect/>
+                </a:stretch>
+              </a:blipFill>
+            </p:spPr>
+            <p:txBody>
+              <a:bodyPr/>
+              <a:lstStyle/>
+              <a:p>
+                <a:r>
+                  <a:rPr lang="en-GB">
+                    <a:noFill/>
+                  </a:rPr>
+                  <a:t> </a:t>
+                </a:r>
+              </a:p>
+            </p:txBody>
+          </p:sp>
+        </mc:Fallback>
+      </mc:AlternateContent>
+      <p:cxnSp>
+        <p:nvCxnSpPr>
+          <p:cNvPr id="107" name="Connector: Elbow 106">
+            <a:extLst>
+              <a:ext uri="{FF2B5EF4-FFF2-40B4-BE49-F238E27FC236}">
+                <a16:creationId xmlns:a16="http://schemas.microsoft.com/office/drawing/2014/main" id="{86503256-0F21-D62F-FEB0-240AC45F44B0}"/>
+              </a:ext>
+            </a:extLst>
+          </p:cNvPr>
+          <p:cNvCxnSpPr>
+            <a:cxnSpLocks/>
+          </p:cNvCxnSpPr>
+          <p:nvPr/>
+        </p:nvCxnSpPr>
+        <p:spPr>
+          <a:xfrm rot="16200000" flipV="1">
+            <a:off x="5204795" y="4489419"/>
+            <a:ext cx="727763" cy="623001"/>
+          </a:xfrm>
+          <a:prstGeom prst="bentConnector3">
+            <a:avLst/>
+          </a:prstGeom>
+          <a:ln w="38100">
+            <a:solidFill>
+              <a:schemeClr val="accent2">
+                <a:lumMod val="75000"/>
+              </a:schemeClr>
+            </a:solidFill>
+            <a:tailEnd type="triangle"/>
+          </a:ln>
+        </p:spPr>
+        <p:style>
+          <a:lnRef idx="1">
+            <a:schemeClr val="accent1"/>
+          </a:lnRef>
+          <a:fillRef idx="0">
+            <a:schemeClr val="accent1"/>
+          </a:fillRef>
+          <a:effectRef idx="0">
+            <a:schemeClr val="accent1"/>
+          </a:effectRef>
+          <a:fontRef idx="minor">
+            <a:schemeClr val="tx1"/>
+          </a:fontRef>
+        </p:style>
+      </p:cxnSp>
+      <mc:AlternateContent xmlns:mc="http://schemas.openxmlformats.org/markup-compatibility/2006" xmlns:a14="http://schemas.microsoft.com/office/drawing/2010/main">
+        <mc:Choice Requires="a14">
+          <p:sp>
+            <p:nvSpPr>
+              <p:cNvPr id="11" name="Rectangle 10">
+                <a:extLst>
+                  <a:ext uri="{FF2B5EF4-FFF2-40B4-BE49-F238E27FC236}">
+                    <a16:creationId xmlns:a16="http://schemas.microsoft.com/office/drawing/2014/main" id="{C0ADEC7E-EE9B-7905-AEBF-DF47C4629B6E}"/>
+                  </a:ext>
+                </a:extLst>
+              </p:cNvPr>
+              <p:cNvSpPr/>
+              <p:nvPr/>
+            </p:nvSpPr>
+            <p:spPr>
+              <a:xfrm>
+                <a:off x="6546648" y="3665945"/>
+                <a:ext cx="2416176" cy="929911"/>
+              </a:xfrm>
+              <a:prstGeom prst="rect">
+                <a:avLst/>
+              </a:prstGeom>
+            </p:spPr>
+            <p:style>
+              <a:lnRef idx="1">
+                <a:schemeClr val="accent2"/>
+              </a:lnRef>
+              <a:fillRef idx="2">
+                <a:schemeClr val="accent2"/>
+              </a:fillRef>
+              <a:effectRef idx="1">
+                <a:schemeClr val="accent2"/>
+              </a:effectRef>
+              <a:fontRef idx="minor">
+                <a:schemeClr val="dk1"/>
+              </a:fontRef>
+            </p:style>
+            <p:txBody>
+              <a:bodyPr rtlCol="0" anchor="ctr"/>
+              <a:lstStyle/>
+              <a:p>
+                <a:pPr algn="ctr"/>
+                <a14:m>
+                  <m:oMathPara xmlns:m="http://schemas.openxmlformats.org/officeDocument/2006/math">
+                    <m:oMathParaPr>
+                      <m:jc m:val="centerGroup"/>
+                    </m:oMathParaPr>
+                    <m:oMath xmlns:m="http://schemas.openxmlformats.org/officeDocument/2006/math">
+                      <m:sSub>
+                        <m:sSubPr>
+                          <m:ctrlPr>
+                            <a:rPr lang="en-GB" sz="1400" i="1">
+                              <a:latin typeface="Cambria Math" panose="02040503050406030204" pitchFamily="18" charset="0"/>
+                            </a:rPr>
+                          </m:ctrlPr>
+                        </m:sSubPr>
+                        <m:e>
+                          <m:acc>
+                            <m:accPr>
+                              <m:chr m:val="̿"/>
+                              <m:ctrlPr>
+                                <a:rPr lang="en-GB" sz="1400" i="1">
+                                  <a:latin typeface="Cambria Math" panose="02040503050406030204" pitchFamily="18" charset="0"/>
+                                </a:rPr>
+                              </m:ctrlPr>
+                            </m:accPr>
+                            <m:e>
+                              <m:r>
+                                <a:rPr lang="en-GB" sz="1400" i="1">
+                                  <a:latin typeface="Cambria Math" panose="02040503050406030204" pitchFamily="18" charset="0"/>
+                                </a:rPr>
+                                <m:t>𝐴</m:t>
+                              </m:r>
+                            </m:e>
+                          </m:acc>
+                        </m:e>
+                        <m:sub>
+                          <m:r>
+                            <a:rPr lang="en-GB" sz="1400" i="1">
+                              <a:latin typeface="Cambria Math" panose="02040503050406030204" pitchFamily="18" charset="0"/>
+                            </a:rPr>
+                            <m:t>𝑖</m:t>
+                          </m:r>
+                        </m:sub>
+                      </m:sSub>
+                      <m:sSub>
+                        <m:sSubPr>
+                          <m:ctrlPr>
+                            <a:rPr lang="en-GB" sz="1400" i="1">
+                              <a:latin typeface="Cambria Math" panose="02040503050406030204" pitchFamily="18" charset="0"/>
+                            </a:rPr>
+                          </m:ctrlPr>
+                        </m:sSubPr>
+                        <m:e>
+                          <m:acc>
+                            <m:accPr>
+                              <m:chr m:val="̅"/>
+                              <m:ctrlPr>
+                                <a:rPr lang="en-GB" sz="1400" i="1">
+                                  <a:latin typeface="Cambria Math" panose="02040503050406030204" pitchFamily="18" charset="0"/>
+                                </a:rPr>
+                              </m:ctrlPr>
+                            </m:accPr>
+                            <m:e>
+                              <m:r>
+                                <a:rPr lang="en-GB" sz="1400" i="1">
+                                  <a:latin typeface="Cambria Math" panose="02040503050406030204" pitchFamily="18" charset="0"/>
+                                </a:rPr>
+                                <m:t>𝐸</m:t>
+                              </m:r>
+                            </m:e>
+                          </m:acc>
+                        </m:e>
+                        <m:sub>
+                          <m:r>
+                            <a:rPr lang="en-GB" sz="1400" i="1">
+                              <a:latin typeface="Cambria Math" panose="02040503050406030204" pitchFamily="18" charset="0"/>
+                            </a:rPr>
+                            <m:t>𝑖</m:t>
+                          </m:r>
+                        </m:sub>
+                      </m:sSub>
+                      <m:r>
+                        <a:rPr lang="en-GB" sz="1400" i="1">
+                          <a:latin typeface="Cambria Math" panose="02040503050406030204" pitchFamily="18" charset="0"/>
+                        </a:rPr>
+                        <m:t>(</m:t>
+                      </m:r>
+                      <m:sSub>
+                        <m:sSubPr>
+                          <m:ctrlPr>
+                            <a:rPr lang="en-GB" sz="1400" i="1">
+                              <a:latin typeface="Cambria Math" panose="02040503050406030204" pitchFamily="18" charset="0"/>
+                            </a:rPr>
+                          </m:ctrlPr>
+                        </m:sSubPr>
+                        <m:e>
+                          <m:r>
+                            <a:rPr lang="en-GB" sz="1400" i="1">
+                              <a:latin typeface="Cambria Math" panose="02040503050406030204" pitchFamily="18" charset="0"/>
+                            </a:rPr>
+                            <m:t>𝑧</m:t>
+                          </m:r>
+                        </m:e>
+                        <m:sub>
+                          <m:r>
+                            <a:rPr lang="en-GB" sz="1400" i="1">
+                              <a:latin typeface="Cambria Math" panose="02040503050406030204" pitchFamily="18" charset="0"/>
+                            </a:rPr>
+                            <m:t>𝑖</m:t>
+                          </m:r>
+                          <m:r>
+                            <a:rPr lang="en-GB" sz="1400" i="1">
+                              <a:latin typeface="Cambria Math" panose="02040503050406030204" pitchFamily="18" charset="0"/>
+                            </a:rPr>
+                            <m:t>+1</m:t>
+                          </m:r>
+                        </m:sub>
+                      </m:sSub>
+                      <m:r>
+                        <a:rPr lang="en-GB" sz="1400" i="1">
+                          <a:latin typeface="Cambria Math" panose="02040503050406030204" pitchFamily="18" charset="0"/>
+                        </a:rPr>
+                        <m:t>)</m:t>
+                      </m:r>
+                      <m:r>
+                        <a:rPr lang="en-GB" sz="1400" b="0" i="1" smtClean="0">
+                          <a:latin typeface="Cambria Math" panose="02040503050406030204" pitchFamily="18" charset="0"/>
+                        </a:rPr>
+                        <m:t>=</m:t>
+                      </m:r>
+                      <m:sSub>
+                        <m:sSubPr>
+                          <m:ctrlPr>
+                            <a:rPr lang="en-GB" sz="1400" b="0" i="1" smtClean="0">
+                              <a:latin typeface="Cambria Math" panose="02040503050406030204" pitchFamily="18" charset="0"/>
+                            </a:rPr>
+                          </m:ctrlPr>
+                        </m:sSubPr>
+                        <m:e>
+                          <m:acc>
+                            <m:accPr>
+                              <m:chr m:val="̿"/>
+                              <m:ctrlPr>
+                                <a:rPr lang="en-GB" sz="1400" b="0" i="1" smtClean="0">
+                                  <a:latin typeface="Cambria Math" panose="02040503050406030204" pitchFamily="18" charset="0"/>
+                                </a:rPr>
+                              </m:ctrlPr>
+                            </m:accPr>
+                            <m:e>
+                              <m:r>
+                                <a:rPr lang="en-GB" sz="1400" b="0" i="1" smtClean="0">
+                                  <a:latin typeface="Cambria Math" panose="02040503050406030204" pitchFamily="18" charset="0"/>
+                                </a:rPr>
+                                <m:t>𝐴</m:t>
+                              </m:r>
+                            </m:e>
+                          </m:acc>
+                        </m:e>
+                        <m:sub>
+                          <m:r>
+                            <a:rPr lang="en-GB" sz="1400" b="0" i="1" smtClean="0">
+                              <a:latin typeface="Cambria Math" panose="02040503050406030204" pitchFamily="18" charset="0"/>
+                            </a:rPr>
+                            <m:t>𝑖</m:t>
+                          </m:r>
+                          <m:r>
+                            <a:rPr lang="en-GB" sz="1400" b="0" i="1" smtClean="0">
+                              <a:latin typeface="Cambria Math" panose="02040503050406030204" pitchFamily="18" charset="0"/>
+                            </a:rPr>
+                            <m:t>+1</m:t>
+                          </m:r>
+                        </m:sub>
+                      </m:sSub>
+                      <m:sSub>
+                        <m:sSubPr>
+                          <m:ctrlPr>
+                            <a:rPr lang="en-GB" sz="1400" b="0" i="1" smtClean="0">
+                              <a:latin typeface="Cambria Math" panose="02040503050406030204" pitchFamily="18" charset="0"/>
+                            </a:rPr>
+                          </m:ctrlPr>
+                        </m:sSubPr>
+                        <m:e>
+                          <m:acc>
+                            <m:accPr>
+                              <m:chr m:val="̅"/>
+                              <m:ctrlPr>
+                                <a:rPr lang="en-GB" sz="1400" b="0" i="1" smtClean="0">
+                                  <a:latin typeface="Cambria Math" panose="02040503050406030204" pitchFamily="18" charset="0"/>
+                                </a:rPr>
+                              </m:ctrlPr>
+                            </m:accPr>
+                            <m:e>
+                              <m:r>
+                                <a:rPr lang="en-GB" sz="1400" b="0" i="1" smtClean="0">
+                                  <a:latin typeface="Cambria Math" panose="02040503050406030204" pitchFamily="18" charset="0"/>
+                                </a:rPr>
+                                <m:t>𝐸</m:t>
+                              </m:r>
+                            </m:e>
+                          </m:acc>
+                        </m:e>
+                        <m:sub>
+                          <m:r>
+                            <a:rPr lang="en-GB" sz="1400" b="0" i="1" smtClean="0">
+                              <a:latin typeface="Cambria Math" panose="02040503050406030204" pitchFamily="18" charset="0"/>
+                            </a:rPr>
+                            <m:t>𝑖</m:t>
+                          </m:r>
+                          <m:r>
+                            <a:rPr lang="en-GB" sz="1400" b="0" i="1" smtClean="0">
+                              <a:latin typeface="Cambria Math" panose="02040503050406030204" pitchFamily="18" charset="0"/>
+                            </a:rPr>
+                            <m:t>+1</m:t>
+                          </m:r>
+                        </m:sub>
+                      </m:sSub>
+                      <m:r>
+                        <a:rPr lang="en-GB" sz="1400" b="0" i="1" smtClean="0">
+                          <a:latin typeface="Cambria Math" panose="02040503050406030204" pitchFamily="18" charset="0"/>
+                        </a:rPr>
+                        <m:t>(</m:t>
+                      </m:r>
+                      <m:sSub>
+                        <m:sSubPr>
+                          <m:ctrlPr>
+                            <a:rPr lang="en-GB" sz="1400" b="0" i="1" smtClean="0">
+                              <a:latin typeface="Cambria Math" panose="02040503050406030204" pitchFamily="18" charset="0"/>
+                            </a:rPr>
+                          </m:ctrlPr>
+                        </m:sSubPr>
+                        <m:e>
+                          <m:r>
+                            <a:rPr lang="en-GB" sz="1400" b="0" i="1" smtClean="0">
+                              <a:latin typeface="Cambria Math" panose="02040503050406030204" pitchFamily="18" charset="0"/>
+                            </a:rPr>
+                            <m:t>𝑧</m:t>
+                          </m:r>
+                        </m:e>
+                        <m:sub>
+                          <m:r>
+                            <a:rPr lang="en-GB" sz="1400" b="0" i="1" smtClean="0">
+                              <a:latin typeface="Cambria Math" panose="02040503050406030204" pitchFamily="18" charset="0"/>
+                            </a:rPr>
+                            <m:t>𝑖</m:t>
+                          </m:r>
+                          <m:r>
+                            <a:rPr lang="en-GB" sz="1400" b="0" i="1" smtClean="0">
+                              <a:latin typeface="Cambria Math" panose="02040503050406030204" pitchFamily="18" charset="0"/>
+                            </a:rPr>
+                            <m:t>+1</m:t>
+                          </m:r>
+                        </m:sub>
+                      </m:sSub>
+                      <m:r>
+                        <a:rPr lang="en-GB" sz="1400" b="0" i="1" smtClean="0">
+                          <a:latin typeface="Cambria Math" panose="02040503050406030204" pitchFamily="18" charset="0"/>
+                        </a:rPr>
+                        <m:t>)</m:t>
+                      </m:r>
+                    </m:oMath>
+                  </m:oMathPara>
+                </a14:m>
+                <a:endParaRPr lang="en-GB" sz="1400" dirty="0"/>
+              </a:p>
+            </p:txBody>
+          </p:sp>
+        </mc:Choice>
+        <mc:Fallback xmlns="">
+          <p:sp>
+            <p:nvSpPr>
+              <p:cNvPr id="11" name="Rectangle 10">
+                <a:extLst>
+                  <a:ext uri="{FF2B5EF4-FFF2-40B4-BE49-F238E27FC236}">
+                    <a16:creationId xmlns:a16="http://schemas.microsoft.com/office/drawing/2014/main" id="{C0ADEC7E-EE9B-7905-AEBF-DF47C4629B6E}"/>
+                  </a:ext>
+                </a:extLst>
+              </p:cNvPr>
+              <p:cNvSpPr>
+                <a:spLocks noRot="1" noChangeAspect="1" noMove="1" noResize="1" noEditPoints="1" noAdjustHandles="1" noChangeArrowheads="1" noChangeShapeType="1" noTextEdit="1"/>
+              </p:cNvSpPr>
+              <p:nvPr/>
+            </p:nvSpPr>
+            <p:spPr>
+              <a:xfrm>
+                <a:off x="6546648" y="3665945"/>
+                <a:ext cx="2416176" cy="929911"/>
+              </a:xfrm>
+              <a:prstGeom prst="rect">
+                <a:avLst/>
+              </a:prstGeom>
+              <a:blipFill>
+                <a:blip r:embed="rId13"/>
+                <a:stretch>
+                  <a:fillRect/>
+                </a:stretch>
+              </a:blipFill>
+            </p:spPr>
+            <p:txBody>
+              <a:bodyPr/>
+              <a:lstStyle/>
+              <a:p>
+                <a:r>
+                  <a:rPr lang="en-GB">
+                    <a:noFill/>
+                  </a:rPr>
+                  <a:t> </a:t>
+                </a:r>
+              </a:p>
+            </p:txBody>
+          </p:sp>
+        </mc:Fallback>
+      </mc:AlternateContent>
+      <p:sp>
+        <p:nvSpPr>
+          <p:cNvPr id="54" name="Arrow: Right 53">
+            <a:extLst>
+              <a:ext uri="{FF2B5EF4-FFF2-40B4-BE49-F238E27FC236}">
+                <a16:creationId xmlns:a16="http://schemas.microsoft.com/office/drawing/2014/main" id="{B3691038-6D8B-97ED-14F2-357CC7F3F46D}"/>
+              </a:ext>
+            </a:extLst>
+          </p:cNvPr>
+          <p:cNvSpPr/>
+          <p:nvPr/>
+        </p:nvSpPr>
+        <p:spPr>
+          <a:xfrm rot="16738739">
+            <a:off x="6331214" y="3201558"/>
+            <a:ext cx="1293085" cy="117430"/>
+          </a:xfrm>
+          <a:prstGeom prst="rightArrow">
+            <a:avLst/>
+          </a:prstGeom>
+          <a:solidFill>
+            <a:srgbClr val="00B050"/>
+          </a:solidFill>
+        </p:spPr>
+        <p:style>
+          <a:lnRef idx="2">
+            <a:schemeClr val="accent1">
+              <a:shade val="15000"/>
+            </a:schemeClr>
+          </a:lnRef>
+          <a:fillRef idx="1">
+            <a:schemeClr val="accent1"/>
+          </a:fillRef>
+          <a:effectRef idx="0">
+            <a:schemeClr val="accent1"/>
+          </a:effectRef>
+          <a:fontRef idx="minor">
+            <a:schemeClr val="lt1"/>
+          </a:fontRef>
+        </p:style>
+        <p:txBody>
+          <a:bodyPr rtlCol="0" anchor="ctr"/>
+          <a:lstStyle/>
+          <a:p>
+            <a:pPr algn="ctr"/>
+            <a:endParaRPr lang="en-GB" dirty="0"/>
+          </a:p>
+        </p:txBody>
+      </p:sp>
+      <p:sp>
+        <p:nvSpPr>
+          <p:cNvPr id="56" name="Arrow: Right 55">
+            <a:extLst>
+              <a:ext uri="{FF2B5EF4-FFF2-40B4-BE49-F238E27FC236}">
+                <a16:creationId xmlns:a16="http://schemas.microsoft.com/office/drawing/2014/main" id="{2D3FE859-060A-DD63-9A55-900C0C7D7AC7}"/>
+              </a:ext>
+            </a:extLst>
+          </p:cNvPr>
+          <p:cNvSpPr/>
+          <p:nvPr/>
+        </p:nvSpPr>
+        <p:spPr>
+          <a:xfrm rot="13752936">
+            <a:off x="6881827" y="3207698"/>
+            <a:ext cx="1678545" cy="125003"/>
+          </a:xfrm>
+          <a:prstGeom prst="rightArrow">
+            <a:avLst/>
+          </a:prstGeom>
+          <a:solidFill>
+            <a:srgbClr val="00B050"/>
+          </a:solidFill>
+        </p:spPr>
+        <p:style>
+          <a:lnRef idx="2">
+            <a:schemeClr val="accent1">
+              <a:shade val="15000"/>
+            </a:schemeClr>
+          </a:lnRef>
+          <a:fillRef idx="1">
+            <a:schemeClr val="accent1"/>
+          </a:fillRef>
+          <a:effectRef idx="0">
+            <a:schemeClr val="accent1"/>
+          </a:effectRef>
+          <a:fontRef idx="minor">
+            <a:schemeClr val="lt1"/>
+          </a:fontRef>
+        </p:style>
+        <p:txBody>
+          <a:bodyPr rtlCol="0" anchor="ctr"/>
+          <a:lstStyle/>
+          <a:p>
+            <a:pPr algn="ctr"/>
+            <a:endParaRPr lang="en-GB" dirty="0"/>
+          </a:p>
+        </p:txBody>
+      </p:sp>
+      <p:sp>
+        <p:nvSpPr>
+          <p:cNvPr id="63" name="Star: 5 Points 62">
+            <a:extLst>
+              <a:ext uri="{FF2B5EF4-FFF2-40B4-BE49-F238E27FC236}">
+                <a16:creationId xmlns:a16="http://schemas.microsoft.com/office/drawing/2014/main" id="{162086D4-1E9D-5330-8483-C7A3C32F6C26}"/>
+              </a:ext>
+            </a:extLst>
+          </p:cNvPr>
+          <p:cNvSpPr/>
+          <p:nvPr/>
+        </p:nvSpPr>
+        <p:spPr>
+          <a:xfrm>
+            <a:off x="6236975" y="2544071"/>
+            <a:ext cx="431861" cy="384214"/>
+          </a:xfrm>
+          <a:prstGeom prst="star5">
+            <a:avLst>
+              <a:gd name="adj" fmla="val 23630"/>
+              <a:gd name="hf" fmla="val 105146"/>
+              <a:gd name="vf" fmla="val 110557"/>
+            </a:avLst>
+          </a:prstGeom>
+        </p:spPr>
+        <p:style>
+          <a:lnRef idx="2">
+            <a:schemeClr val="accent1">
+              <a:shade val="15000"/>
+            </a:schemeClr>
+          </a:lnRef>
+          <a:fillRef idx="1">
+            <a:schemeClr val="accent1"/>
+          </a:fillRef>
+          <a:effectRef idx="0">
+            <a:schemeClr val="accent1"/>
+          </a:effectRef>
+          <a:fontRef idx="minor">
+            <a:schemeClr val="lt1"/>
+          </a:fontRef>
+        </p:style>
+        <p:txBody>
+          <a:bodyPr rtlCol="0" anchor="ctr"/>
+          <a:lstStyle/>
+          <a:p>
+            <a:pPr algn="ctr"/>
+            <a:endParaRPr lang="en-GB"/>
+          </a:p>
+        </p:txBody>
+      </p:sp>
+      <p:sp>
+        <p:nvSpPr>
+          <p:cNvPr id="67" name="AutoShape 4" descr="FreeRDP clipboard image">
+            <a:extLst>
+              <a:ext uri="{FF2B5EF4-FFF2-40B4-BE49-F238E27FC236}">
+                <a16:creationId xmlns:a16="http://schemas.microsoft.com/office/drawing/2014/main" id="{8CC452C8-A1BF-F566-FF8E-9DEA650A9FDB}"/>
+              </a:ext>
+            </a:extLst>
+          </p:cNvPr>
+          <p:cNvSpPr>
+            <a:spLocks noChangeAspect="1" noChangeArrowheads="1"/>
+          </p:cNvSpPr>
+          <p:nvPr/>
+        </p:nvSpPr>
+        <p:spPr bwMode="auto">
+          <a:xfrm>
+            <a:off x="5943600" y="3276600"/>
+            <a:ext cx="304800" cy="304800"/>
+          </a:xfrm>
+          <a:prstGeom prst="rect">
+            <a:avLst/>
+          </a:prstGeom>
+          <a:noFill/>
+          <a:extLst>
+            <a:ext uri="{909E8E84-426E-40DD-AFC4-6F175D3DCCD1}">
+              <a14:hiddenFill xmlns:a14="http://schemas.microsoft.com/office/drawing/2010/main">
+                <a:solidFill>
+                  <a:srgbClr val="FFFFFF"/>
+                </a:solidFill>
+              </a14:hiddenFill>
+            </a:ext>
+          </a:extLst>
+        </p:spPr>
+        <p:txBody>
+          <a:bodyPr vert="horz" wrap="square" lIns="91440" tIns="45720" rIns="91440" bIns="45720" numCol="1" anchor="t" anchorCtr="0" compatLnSpc="1">
+            <a:prstTxWarp prst="textNoShape">
+              <a:avLst/>
+            </a:prstTxWarp>
+          </a:bodyPr>
+          <a:lstStyle/>
+          <a:p>
+            <a:endParaRPr lang="en-GB"/>
+          </a:p>
+        </p:txBody>
+      </p:sp>
+      <p:sp>
+        <p:nvSpPr>
+          <p:cNvPr id="68" name="Arc 67">
+            <a:extLst>
+              <a:ext uri="{FF2B5EF4-FFF2-40B4-BE49-F238E27FC236}">
+                <a16:creationId xmlns:a16="http://schemas.microsoft.com/office/drawing/2014/main" id="{5E832438-EFDE-0DD8-CB6E-7C67F8C227F6}"/>
+              </a:ext>
+            </a:extLst>
+          </p:cNvPr>
+          <p:cNvSpPr/>
+          <p:nvPr/>
+        </p:nvSpPr>
+        <p:spPr>
+          <a:xfrm rot="16611233">
+            <a:off x="948602" y="2637408"/>
+            <a:ext cx="1484948" cy="820448"/>
+          </a:xfrm>
+          <a:prstGeom prst="arc">
+            <a:avLst>
+              <a:gd name="adj1" fmla="val 13113298"/>
+              <a:gd name="adj2" fmla="val 20460197"/>
+            </a:avLst>
+          </a:prstGeom>
+          <a:ln w="25400">
+            <a:solidFill>
+              <a:schemeClr val="tx1"/>
+            </a:solidFill>
+          </a:ln>
+        </p:spPr>
+        <p:style>
+          <a:lnRef idx="1">
+            <a:schemeClr val="accent1"/>
+          </a:lnRef>
+          <a:fillRef idx="0">
+            <a:schemeClr val="accent1"/>
+          </a:fillRef>
+          <a:effectRef idx="0">
+            <a:schemeClr val="accent1"/>
+          </a:effectRef>
+          <a:fontRef idx="minor">
+            <a:schemeClr val="tx1"/>
+          </a:fontRef>
+        </p:style>
+        <p:txBody>
+          <a:bodyPr rtlCol="0" anchor="ctr"/>
+          <a:lstStyle/>
+          <a:p>
+            <a:pPr algn="ctr"/>
+            <a:endParaRPr lang="en-GB"/>
+          </a:p>
+        </p:txBody>
+      </p:sp>
+      <p:sp>
+        <p:nvSpPr>
+          <p:cNvPr id="69" name="TextBox 68">
+            <a:extLst>
+              <a:ext uri="{FF2B5EF4-FFF2-40B4-BE49-F238E27FC236}">
+                <a16:creationId xmlns:a16="http://schemas.microsoft.com/office/drawing/2014/main" id="{55263D86-7483-7E27-9AC0-35723BF61E41}"/>
+              </a:ext>
+            </a:extLst>
+          </p:cNvPr>
+          <p:cNvSpPr txBox="1"/>
+          <p:nvPr/>
+        </p:nvSpPr>
+        <p:spPr>
+          <a:xfrm>
+            <a:off x="1422698" y="2764085"/>
+            <a:ext cx="653443" cy="584775"/>
+          </a:xfrm>
+          <a:prstGeom prst="rect">
+            <a:avLst/>
+          </a:prstGeom>
+          <a:noFill/>
+        </p:spPr>
+        <p:txBody>
+          <a:bodyPr wrap="square">
+            <a:spAutoFit/>
+          </a:bodyPr>
+          <a:lstStyle/>
+          <a:p>
+            <a:r>
+              <a:rPr lang="en-GB" sz="3200" dirty="0" err="1"/>
+              <a:t>ɵ</a:t>
+            </a:r>
+            <a:r>
+              <a:rPr lang="en-GB" sz="3200" baseline="-25000" dirty="0" err="1"/>
+              <a:t>S</a:t>
+            </a:r>
+            <a:endParaRPr lang="en-GB" sz="3200" baseline="-25000" dirty="0">
+              <a:latin typeface="MS Shell Dlg 2" panose="020B0604030504040204" pitchFamily="34" charset="0"/>
+            </a:endParaRPr>
+          </a:p>
+        </p:txBody>
+      </p:sp>
+      <mc:AlternateContent xmlns:mc="http://schemas.openxmlformats.org/markup-compatibility/2006" xmlns:a14="http://schemas.microsoft.com/office/drawing/2010/main">
+        <mc:Choice Requires="a14">
+          <p:sp>
+            <p:nvSpPr>
+              <p:cNvPr id="88" name="Oval 87">
+                <a:extLst>
+                  <a:ext uri="{FF2B5EF4-FFF2-40B4-BE49-F238E27FC236}">
+                    <a16:creationId xmlns:a16="http://schemas.microsoft.com/office/drawing/2014/main" id="{96A52B86-CB28-D18B-6BD2-F42C9317D5CB}"/>
+                  </a:ext>
+                </a:extLst>
+              </p:cNvPr>
+              <p:cNvSpPr/>
+              <p:nvPr/>
+            </p:nvSpPr>
+            <p:spPr>
+              <a:xfrm>
+                <a:off x="1763965" y="5041023"/>
+                <a:ext cx="619162" cy="626615"/>
+              </a:xfrm>
+              <a:prstGeom prst="ellipse">
+                <a:avLst/>
+              </a:prstGeom>
+            </p:spPr>
+            <p:style>
+              <a:lnRef idx="2">
+                <a:schemeClr val="accent1">
+                  <a:shade val="15000"/>
+                </a:schemeClr>
+              </a:lnRef>
+              <a:fillRef idx="1">
+                <a:schemeClr val="accent1"/>
+              </a:fillRef>
+              <a:effectRef idx="0">
+                <a:schemeClr val="accent1"/>
+              </a:effectRef>
+              <a:fontRef idx="minor">
+                <a:schemeClr val="lt1"/>
+              </a:fontRef>
+            </p:style>
+            <p:txBody>
+              <a:bodyPr rtlCol="0" anchor="ctr"/>
+              <a:lstStyle/>
+              <a:p>
+                <a:pPr/>
+                <a14:m>
+                  <m:oMathPara xmlns:m="http://schemas.openxmlformats.org/officeDocument/2006/math">
+                    <m:oMathParaPr>
+                      <m:jc m:val="centerGroup"/>
+                    </m:oMathParaPr>
+                    <m:oMath xmlns:m="http://schemas.openxmlformats.org/officeDocument/2006/math">
+                      <m:sSub>
+                        <m:sSubPr>
+                          <m:ctrlPr>
+                            <a:rPr lang="en-GB" sz="1800" b="0" i="1" smtClean="0">
+                              <a:latin typeface="Cambria Math" panose="02040503050406030204" pitchFamily="18" charset="0"/>
+                            </a:rPr>
+                          </m:ctrlPr>
+                        </m:sSubPr>
+                        <m:e>
+                          <m:acc>
+                            <m:accPr>
+                              <m:chr m:val="̅"/>
+                              <m:ctrlPr>
+                                <a:rPr lang="en-GB" sz="1800" b="0" i="1" smtClean="0">
+                                  <a:latin typeface="Cambria Math" panose="02040503050406030204" pitchFamily="18" charset="0"/>
+                                </a:rPr>
+                              </m:ctrlPr>
+                            </m:accPr>
+                            <m:e>
+                              <m:r>
+                                <a:rPr lang="en-GB" sz="1800" b="0" i="1" smtClean="0">
+                                  <a:latin typeface="Cambria Math" panose="02040503050406030204" pitchFamily="18" charset="0"/>
+                                  <a:ea typeface="Cambria Math" panose="02040503050406030204" pitchFamily="18" charset="0"/>
+                                </a:rPr>
+                                <m:t>𝜓</m:t>
+                              </m:r>
+                            </m:e>
+                          </m:acc>
+                        </m:e>
+                        <m:sub>
+                          <m:r>
+                            <a:rPr lang="en-GB" sz="1800" b="0" i="1" smtClean="0">
+                              <a:latin typeface="Cambria Math" panose="02040503050406030204" pitchFamily="18" charset="0"/>
+                              <a:ea typeface="Cambria Math" panose="02040503050406030204" pitchFamily="18" charset="0"/>
+                            </a:rPr>
+                            <m:t>1</m:t>
+                          </m:r>
+                        </m:sub>
+                      </m:sSub>
+                    </m:oMath>
+                  </m:oMathPara>
+                </a14:m>
+                <a:endParaRPr lang="el-GR" sz="1800" b="1" baseline="-25000" dirty="0">
+                  <a:latin typeface="MS Shell Dlg 2" panose="020B0604030504040204" pitchFamily="34" charset="0"/>
+                </a:endParaRPr>
+              </a:p>
+            </p:txBody>
+          </p:sp>
+        </mc:Choice>
+        <mc:Fallback xmlns="">
+          <p:sp>
+            <p:nvSpPr>
+              <p:cNvPr id="88" name="Oval 87">
+                <a:extLst>
+                  <a:ext uri="{FF2B5EF4-FFF2-40B4-BE49-F238E27FC236}">
+                    <a16:creationId xmlns:a16="http://schemas.microsoft.com/office/drawing/2014/main" id="{96A52B86-CB28-D18B-6BD2-F42C9317D5CB}"/>
+                  </a:ext>
+                </a:extLst>
+              </p:cNvPr>
+              <p:cNvSpPr>
+                <a:spLocks noRot="1" noChangeAspect="1" noMove="1" noResize="1" noEditPoints="1" noAdjustHandles="1" noChangeArrowheads="1" noChangeShapeType="1" noTextEdit="1"/>
+              </p:cNvSpPr>
+              <p:nvPr/>
+            </p:nvSpPr>
+            <p:spPr>
+              <a:xfrm>
+                <a:off x="1763965" y="5041023"/>
+                <a:ext cx="619162" cy="626615"/>
+              </a:xfrm>
+              <a:prstGeom prst="ellipse">
+                <a:avLst/>
+              </a:prstGeom>
+              <a:blipFill>
+                <a:blip r:embed="rId14"/>
+                <a:stretch>
+                  <a:fillRect/>
+                </a:stretch>
+              </a:blipFill>
+            </p:spPr>
+            <p:txBody>
+              <a:bodyPr/>
+              <a:lstStyle/>
+              <a:p>
+                <a:r>
+                  <a:rPr lang="en-GB">
+                    <a:noFill/>
+                  </a:rPr>
+                  <a:t> </a:t>
+                </a:r>
+              </a:p>
+            </p:txBody>
+          </p:sp>
+        </mc:Fallback>
+      </mc:AlternateContent>
+    </p:spTree>
+    <p:extLst>
+      <p:ext uri="{BB962C8B-B14F-4D97-AF65-F5344CB8AC3E}">
+        <p14:creationId xmlns:p14="http://schemas.microsoft.com/office/powerpoint/2010/main" val="1731644098"/>
+      </p:ext>
+    </p:extLst>
+  </p:cSld>
+  <p:clrMapOvr>
+    <a:masterClrMapping/>
+  </p:clrMapOvr>
+</p:sld>
+</file>
+
+<file path=ppt/slides/slide8.xml><?xml version="1.0" encoding="utf-8"?>
 <p:sld xmlns:a="http://schemas.openxmlformats.org/drawingml/2006/main" xmlns:r="http://schemas.openxmlformats.org/officeDocument/2006/relationships" xmlns:p="http://schemas.openxmlformats.org/presentationml/2006/main">
   <p:cSld>
     <p:spTree>
